--- a/reports/Tikee_Presentacion_Prototipo.pptx
+++ b/reports/Tikee_Presentacion_Prototipo.pptx
@@ -16,9 +16,10 @@
     <p:sldId id="264" r:id="rId10"/>
     <p:sldId id="265" r:id="rId11"/>
     <p:sldId id="266" r:id="rId12"/>
+    <p:sldId id="267" r:id="rId13"/>
   </p:sldIdLst>
   <p:notesMasterIdLst>
-    <p:notesMasterId r:id="rId13"/>
+    <p:notesMasterId r:id="rId14"/>
   </p:notesMasterIdLst>
   <p:sldSz cx="12191695" cy="6858000"/>
   <p:notesSz cx="6858000" cy="12191695"/>
@@ -1192,7 +1193,7 @@
           <a:p>
             <a:r>
               <a:rPr lang="en-US" dirty="0"/>
-              <a:t/>
+              <a:t>Bienvenida. Tikee prueba, de forma honesta y reproducible, si la optimización combinatoria (QUBO) mejora la selección de variables para scoring crediticio frente a los métodos que ya usa la industria. Adelantar que el resultado no es el esperado de un pitch de 'IA cuántica' — y que esa honestidad es el punto.</a:t>
             </a:r>
             <a:endParaRPr lang="en-US" dirty="0"/>
           </a:p>
@@ -1280,7 +1281,7 @@
           <a:p>
             <a:r>
               <a:rPr lang="en-US" dirty="0"/>
-              <a:t/>
+              <a:t>No apurar esta diapositiva ni tratarla como trámite. Nombrar las 4 limitaciones en voz alta es lo que distingue un pitch académico honesto de un pitch de ventas — y es exactamente lo que el usuario pidió priorizar: vender la idea COMO prototipo, no como producto terminado.</a:t>
             </a:r>
             <a:endParaRPr lang="en-US" dirty="0"/>
           </a:p>
@@ -1368,7 +1369,7 @@
           <a:p>
             <a:r>
               <a:rPr lang="en-US" dirty="0"/>
-              <a:t/>
+              <a:t>El roadmap responde a la pregunta obvia del jurado: '¿y ahora qué?'. v1.1 ataca la brecha de Nivel B directamente. v1.2 es el paso que convierte esto de tesis a piloto real: se necesita un convenio con una cooperativa SEPS. v2.0 es la visión a largo plazo — mitigar, no solo medir.</a:t>
             </a:r>
             <a:endParaRPr lang="en-US" dirty="0"/>
           </a:p>
@@ -1392,6 +1393,94 @@
             <a:fld id="{F7021451-1387-4CA6-816F-3879F97B5CBC}" type="slidenum">
               <a:rPr lang="en-US"/>
               <a:t>11</a:t>
+            </a:fld>
+            <a:endParaRPr lang="en-US"/>
+          </a:p>
+        </p:txBody>
+      </p:sp>
+    </p:spTree>
+    <p:extLst>
+      <p:ext uri="{BB962C8B-B14F-4D97-AF65-F5344CB8AC3E}">
+        <p14:creationId xmlns:p14="http://schemas.microsoft.com/office/powerpoint/2010/main" val="1024086991"/>
+      </p:ext>
+    </p:extLst>
+  </p:cSld>
+  <p:clrMapOvr>
+    <a:masterClrMapping/>
+  </p:clrMapOvr>
+</p:notes>
+</file>
+
+<file path=ppt/notesSlides/notesSlide12.xml><?xml version="1.0" encoding="utf-8"?>
+<p:notes xmlns:a="http://schemas.openxmlformats.org/drawingml/2006/main" xmlns:r="http://schemas.openxmlformats.org/officeDocument/2006/relationships" xmlns:p="http://schemas.openxmlformats.org/presentationml/2006/main">
+  <p:cSld>
+    <p:spTree>
+      <p:nvGrpSpPr>
+        <p:cNvPr id="1" name=""/>
+        <p:cNvGrpSpPr/>
+        <p:nvPr/>
+      </p:nvGrpSpPr>
+      <p:grpSpPr>
+        <a:xfrm>
+          <a:off x="0" y="0"/>
+          <a:ext cx="0" cy="0"/>
+          <a:chOff x="0" y="0"/>
+          <a:chExt cx="0" cy="0"/>
+        </a:xfrm>
+      </p:grpSpPr>
+      <p:sp>
+        <p:nvSpPr>
+          <p:cNvPr id="2" name="Slide Image Placeholder 1"/>
+          <p:cNvSpPr>
+            <a:spLocks noGrp="1" noRot="1" noChangeAspect="1"/>
+          </p:cNvSpPr>
+          <p:nvPr>
+            <p:ph type="sldImg"/>
+          </p:nvPr>
+        </p:nvSpPr>
+        <p:spPr/>
+      </p:sp>
+      <p:sp>
+        <p:nvSpPr>
+          <p:cNvPr id="3" name="Notes Placeholder 2"/>
+          <p:cNvSpPr>
+            <a:spLocks noGrp="1"/>
+          </p:cNvSpPr>
+          <p:nvPr>
+            <p:ph type="body" idx="1"/>
+          </p:nvPr>
+        </p:nvSpPr>
+        <p:spPr/>
+        <p:txBody>
+          <a:bodyPr/>
+          <a:lstStyle/>
+          <a:p>
+            <a:r>
+              <a:rPr lang="en-US" dirty="0"/>
+              <a:t>Cierre. Repetir la reformulación explícitamente: no vendemos 'IA cuántica que gana en todo', vendemos un framework de auditoría con verificación matemática cruzada que demuestra, con datos y no con promesas, dónde ayuda una optimización combinatoria y dónde no. Invitar a preguntas y recordar que la demo (QR de la diapositiva 2) queda disponible para que la prueben ellos mismos.</a:t>
+            </a:r>
+            <a:endParaRPr lang="en-US" dirty="0"/>
+          </a:p>
+        </p:txBody>
+      </p:sp>
+      <p:sp>
+        <p:nvSpPr>
+          <p:cNvPr id="4" name="Slide Number Placeholder 3"/>
+          <p:cNvSpPr>
+            <a:spLocks noGrp="1"/>
+          </p:cNvSpPr>
+          <p:nvPr>
+            <p:ph type="sldNum" sz="quarter" idx="10"/>
+          </p:nvPr>
+        </p:nvSpPr>
+        <p:spPr/>
+        <p:txBody>
+          <a:bodyPr/>
+          <a:lstStyle/>
+          <a:p>
+            <a:fld id="{F7021451-1387-4CA6-816F-3879F97B5CBC}" type="slidenum">
+              <a:rPr lang="en-US"/>
+              <a:t>12</a:t>
             </a:fld>
             <a:endParaRPr lang="en-US"/>
           </a:p>
@@ -1456,7 +1545,7 @@
           <a:p>
             <a:r>
               <a:rPr lang="en-US" dirty="0"/>
-              <a:t/>
+              <a:t>Si el jurado/audiencia tiene el teléfono a mano, este es el momento de que escaneen el QR y sigan la demo en paralelo en la pestaña Simulador mientras avanza la presentación. La app no entrena nada en vivo (carga modelos ya entrenados), así que no se cuelga en el peor momento.</a:t>
             </a:r>
             <a:endParaRPr lang="en-US" dirty="0"/>
           </a:p>
@@ -1544,7 +1633,7 @@
           <a:p>
             <a:r>
               <a:rPr lang="en-US" dirty="0"/>
-              <a:t/>
+              <a:t>Punto clave: nadie audita hoy cuánto sesgo indirecto sobrevive en el modelo final. LASSO y stepwise optimizan precisión, no auditabilidad. Ese vacío es lo que este prototipo se propone medir, no resolver mágicamente con 'IA cuántica'.</a:t>
             </a:r>
             <a:endParaRPr lang="en-US" dirty="0"/>
           </a:p>
@@ -1632,7 +1721,7 @@
           <a:p>
             <a:r>
               <a:rPr lang="en-US" dirty="0"/>
-              <a:t/>
+              <a:t>Enfatizar el diseño experimental, no los solucionadores en sí: separar formulación, heurístico y paradigma cuántico es lo que permite decir con precisión DÓNDE está el problema cuando algo falla, en vez de un 'no funcionó' genérico.</a:t>
             </a:r>
             <a:endParaRPr lang="en-US" dirty="0"/>
           </a:p>
@@ -1720,7 +1809,7 @@
           <a:p>
             <a:r>
               <a:rPr lang="en-US" dirty="0"/>
-              <a:t/>
+              <a:t>Esta diapositiva existe para que confíen en los números que vienen. 26/26 pruebas, coincidencia exacta MILP-vs-enumeración en las 10 semillas, cero ajuste post-hoc de hiperparámetros. Sin esto, cualquier resultado — bueno o malo — sería sospechoso.</a:t>
             </a:r>
             <a:endParaRPr lang="en-US" dirty="0"/>
           </a:p>
@@ -1808,7 +1897,7 @@
           <a:p>
             <a:r>
               <a:rPr lang="en-US" dirty="0"/>
-              <a:t/>
+              <a:t>Resultado neutral-a-positivo, no vender de más: sin diferencia estadística en AUC. Lo real es la parsimonia (8.8 vs 13.3 variables) y que abre la puerta al hallazgo de equidad de la diapositiva 8. La menor estabilidad (Jaccard 0.45) es una limitación real, dicha sin rodeos.</a:t>
             </a:r>
             <a:endParaRPr lang="en-US" dirty="0"/>
           </a:p>
@@ -1896,7 +1985,7 @@
           <a:p>
             <a:r>
               <a:rPr lang="en-US" dirty="0"/>
-              <a:t/>
+              <a:t>El momento más honesto del pitch: aquí QUBO pierde de forma estadísticamente real, no por casualidad. Explicar la causa (ruido puro compitiendo con señal débil cuando sobra cardinalidad) y ser explícitos en que probamos un arreglo rápido y no calificó — eso genera más confianza que ocultarlo.</a:t>
             </a:r>
             <a:endParaRPr lang="en-US" dirty="0"/>
           </a:p>
@@ -1984,7 +2073,7 @@
           <a:p>
             <a:r>
               <a:rPr lang="en-US" dirty="0"/>
-              <a:t/>
+              <a:t>Pausa aquí. Esta es la diapositiva que justifica el proyecto completo. 1.00 a 0.61 no es un matiz — es la diferencia entre 'la zona de residencia se puede reconstruir perfecto' y 'ya no se puede'. Nunca se usó zona de residencia como variable de entrada del modelo de crédito; esto se filtra por las variables correlacionadas que sobreviven.</a:t>
             </a:r>
             <a:endParaRPr lang="en-US" dirty="0"/>
           </a:p>
@@ -2072,7 +2161,7 @@
           <a:p>
             <a:r>
               <a:rPr lang="en-US" dirty="0"/>
-              <a:t/>
+              <a:t>Traducir el hallazgo técnico a lenguaje de negocio/regulatorio para el jurado no técnico: 'defendible ante el supervisor' importa más para una cooperativa SEPS que 0.003 de AUC. La última fila es la más importante — decir la verdad incómoda de que a veces la recomendación honesta es NO adoptar el optimizador, y que el framework es lo que permite decidirlo con datos.</a:t>
             </a:r>
             <a:endParaRPr lang="en-US" dirty="0"/>
           </a:p>
@@ -2747,7 +2836,7 @@
                 <a:ea typeface="Calibri" pitchFamily="34" charset="-122"/>
                 <a:cs typeface="Calibri" pitchFamily="34" charset="-120"/>
               </a:rPr>
-              <a:t>PRÓXIMOS PASOS</a:t>
+              <a:t>HONESTIDAD ANTE TODO</a:t>
             </a:r>
             <a:endParaRPr lang="en-US" sz="1200" dirty="0"/>
           </a:p>
@@ -2786,7 +2875,7 @@
                 <a:ea typeface="Cambria" pitchFamily="34" charset="-122"/>
                 <a:cs typeface="Cambria" pitchFamily="34" charset="-120"/>
               </a:rPr>
-              <a:t>De prototipo académico a herramienta piloteable</a:t>
+              <a:t>Lo que este prototipo todavía no resuelve</a:t>
             </a:r>
             <a:endParaRPr lang="en-US" sz="3000" dirty="0"/>
           </a:p>
@@ -2800,16 +2889,14 @@
         </p:nvSpPr>
         <p:spPr>
           <a:xfrm>
-            <a:off x="548640" y="2011680"/>
-            <a:ext cx="3429000" cy="3383280"/>
-          </a:xfrm>
-          <a:prstGeom prst="roundRect">
-            <a:avLst>
-              <a:gd name="adj" fmla="val 3243"/>
-            </a:avLst>
+            <a:off x="640080" y="1901952"/>
+            <a:ext cx="128016" cy="128016"/>
+          </a:xfrm>
+          <a:prstGeom prst="rect">
+            <a:avLst/>
           </a:prstGeom>
           <a:solidFill>
-            <a:srgbClr val="F3F5FC"/>
+            <a:srgbClr val="B23A48"/>
           </a:solidFill>
           <a:ln/>
         </p:spPr>
@@ -2822,102 +2909,24 @@
         </p:nvSpPr>
         <p:spPr>
           <a:xfrm>
-            <a:off x="777240" y="2240280"/>
-            <a:ext cx="2971800" cy="411480"/>
-          </a:xfrm>
-          <a:prstGeom prst="rect">
-            <a:avLst/>
-          </a:prstGeom>
-          <a:noFill/>
-          <a:ln/>
-        </p:spPr>
-        <p:txBody>
-          <a:bodyPr wrap="square" rtlCol="0" anchor="ctr"/>
-          <a:lstStyle/>
-          <a:p>
-            <a:pPr indent="0" marL="0">
-              <a:buNone/>
-            </a:pPr>
-            <a:r>
-              <a:rPr lang="en-US" sz="2000" b="1" dirty="0">
-                <a:solidFill>
-                  <a:srgbClr val="B23A48"/>
-                </a:solidFill>
-                <a:latin typeface="Cambria" pitchFamily="34" charset="0"/>
-                <a:ea typeface="Cambria" pitchFamily="34" charset="-122"/>
-                <a:cs typeface="Cambria" pitchFamily="34" charset="-120"/>
-              </a:rPr>
-              <a:t>v1.1</a:t>
-            </a:r>
-            <a:endParaRPr lang="en-US" sz="2000" dirty="0"/>
-          </a:p>
-        </p:txBody>
-      </p:sp>
-      <p:sp>
-        <p:nvSpPr>
-          <p:cNvPr id="6" name="Text 4"/>
-          <p:cNvSpPr/>
-          <p:nvPr/>
-        </p:nvSpPr>
-        <p:spPr>
-          <a:xfrm>
-            <a:off x="777240" y="2788920"/>
-            <a:ext cx="2971800" cy="777240"/>
-          </a:xfrm>
-          <a:prstGeom prst="rect">
-            <a:avLst/>
-          </a:prstGeom>
-          <a:noFill/>
-          <a:ln/>
-        </p:spPr>
-        <p:txBody>
-          <a:bodyPr wrap="square" rtlCol="0" anchor="ctr"/>
-          <a:lstStyle/>
-          <a:p>
-            <a:pPr indent="0" marL="0">
-              <a:buNone/>
-            </a:pPr>
-            <a:r>
-              <a:rPr lang="en-US" sz="1500" b="1" dirty="0">
-                <a:solidFill>
-                  <a:srgbClr val="1E2761"/>
-                </a:solidFill>
-                <a:latin typeface="Cambria" pitchFamily="34" charset="0"/>
-                <a:ea typeface="Cambria" pitchFamily="34" charset="-122"/>
-                <a:cs typeface="Cambria" pitchFamily="34" charset="-120"/>
-              </a:rPr>
-              <a:t>Estimador de relevancia robusto</a:t>
-            </a:r>
-            <a:endParaRPr lang="en-US" sz="1500" dirty="0"/>
-          </a:p>
-        </p:txBody>
-      </p:sp>
-      <p:sp>
-        <p:nvSpPr>
-          <p:cNvPr id="7" name="Text 5"/>
-          <p:cNvSpPr/>
-          <p:nvPr/>
-        </p:nvSpPr>
-        <p:spPr>
-          <a:xfrm>
-            <a:off x="777240" y="3611880"/>
-            <a:ext cx="2971800" cy="1645920"/>
-          </a:xfrm>
-          <a:prstGeom prst="rect">
-            <a:avLst/>
-          </a:prstGeom>
-          <a:noFill/>
-          <a:ln/>
-        </p:spPr>
-        <p:txBody>
-          <a:bodyPr wrap="square" rtlCol="0" anchor="ctr"/>
-          <a:lstStyle/>
-          <a:p>
-            <a:pPr indent="0" marL="0">
-              <a:buNone/>
-            </a:pPr>
-            <a:r>
-              <a:rPr lang="en-US" sz="1250" dirty="0">
+            <a:off x="960120" y="1828800"/>
+            <a:ext cx="10332720" cy="685800"/>
+          </a:xfrm>
+          <a:prstGeom prst="rect">
+            <a:avLst/>
+          </a:prstGeom>
+          <a:noFill/>
+          <a:ln/>
+        </p:spPr>
+        <p:txBody>
+          <a:bodyPr wrap="square" rtlCol="0" anchor="ctr"/>
+          <a:lstStyle/>
+          <a:p>
+            <a:pPr indent="0" marL="0">
+              <a:buNone/>
+            </a:pPr>
+            <a:r>
+              <a:rPr lang="en-US" sz="1400" dirty="0">
                 <a:solidFill>
                   <a:srgbClr val="1F2937"/>
                 </a:solidFill>
@@ -2925,138 +2934,58 @@
                 <a:ea typeface="Calibri" pitchFamily="34" charset="-122"/>
                 <a:cs typeface="Calibri" pitchFamily="34" charset="-120"/>
               </a:rPr>
-              <a:t>Reemplazar el estimador de vecinos por uno menos sensible a ruido en alta dimensión, cerrando la brecha de Nivel B.</a:t>
-            </a:r>
-            <a:endParaRPr lang="en-US" sz="1250" dirty="0"/>
-          </a:p>
-        </p:txBody>
-      </p:sp>
-      <p:sp>
-        <p:nvSpPr>
-          <p:cNvPr id="8" name="Shape 6"/>
-          <p:cNvSpPr/>
-          <p:nvPr/>
-        </p:nvSpPr>
-        <p:spPr>
-          <a:xfrm>
-            <a:off x="4297680" y="2011680"/>
-            <a:ext cx="3429000" cy="3383280"/>
-          </a:xfrm>
-          <a:prstGeom prst="roundRect">
-            <a:avLst>
-              <a:gd name="adj" fmla="val 3243"/>
-            </a:avLst>
+              <a:t>Datos sintéticos: mide recuperar una estructura que nosotros diseñamos, no el riesgo real de crédito en Ecuador.</a:t>
+            </a:r>
+            <a:endParaRPr lang="en-US" sz="1400" dirty="0"/>
+          </a:p>
+        </p:txBody>
+      </p:sp>
+      <p:sp>
+        <p:nvSpPr>
+          <p:cNvPr id="6" name="Shape 4"/>
+          <p:cNvSpPr/>
+          <p:nvPr/>
+        </p:nvSpPr>
+        <p:spPr>
+          <a:xfrm>
+            <a:off x="640080" y="2953512"/>
+            <a:ext cx="128016" cy="128016"/>
+          </a:xfrm>
+          <a:prstGeom prst="rect">
+            <a:avLst/>
           </a:prstGeom>
           <a:solidFill>
-            <a:srgbClr val="F3F5FC"/>
+            <a:srgbClr val="B23A48"/>
           </a:solidFill>
           <a:ln/>
         </p:spPr>
       </p:sp>
       <p:sp>
         <p:nvSpPr>
-          <p:cNvPr id="9" name="Text 7"/>
-          <p:cNvSpPr/>
-          <p:nvPr/>
-        </p:nvSpPr>
-        <p:spPr>
-          <a:xfrm>
-            <a:off x="4526280" y="2240280"/>
-            <a:ext cx="2971800" cy="411480"/>
-          </a:xfrm>
-          <a:prstGeom prst="rect">
-            <a:avLst/>
-          </a:prstGeom>
-          <a:noFill/>
-          <a:ln/>
-        </p:spPr>
-        <p:txBody>
-          <a:bodyPr wrap="square" rtlCol="0" anchor="ctr"/>
-          <a:lstStyle/>
-          <a:p>
-            <a:pPr indent="0" marL="0">
-              <a:buNone/>
-            </a:pPr>
-            <a:r>
-              <a:rPr lang="en-US" sz="2000" b="1" dirty="0">
-                <a:solidFill>
-                  <a:srgbClr val="B23A48"/>
-                </a:solidFill>
-                <a:latin typeface="Cambria" pitchFamily="34" charset="0"/>
-                <a:ea typeface="Cambria" pitchFamily="34" charset="-122"/>
-                <a:cs typeface="Cambria" pitchFamily="34" charset="-120"/>
-              </a:rPr>
-              <a:t>v1.2</a:t>
-            </a:r>
-            <a:endParaRPr lang="en-US" sz="2000" dirty="0"/>
-          </a:p>
-        </p:txBody>
-      </p:sp>
-      <p:sp>
-        <p:nvSpPr>
-          <p:cNvPr id="10" name="Text 8"/>
-          <p:cNvSpPr/>
-          <p:nvPr/>
-        </p:nvSpPr>
-        <p:spPr>
-          <a:xfrm>
-            <a:off x="4526280" y="2788920"/>
-            <a:ext cx="2971800" cy="777240"/>
-          </a:xfrm>
-          <a:prstGeom prst="rect">
-            <a:avLst/>
-          </a:prstGeom>
-          <a:noFill/>
-          <a:ln/>
-        </p:spPr>
-        <p:txBody>
-          <a:bodyPr wrap="square" rtlCol="0" anchor="ctr"/>
-          <a:lstStyle/>
-          <a:p>
-            <a:pPr indent="0" marL="0">
-              <a:buNone/>
-            </a:pPr>
-            <a:r>
-              <a:rPr lang="en-US" sz="1500" b="1" dirty="0">
-                <a:solidFill>
-                  <a:srgbClr val="1E2761"/>
-                </a:solidFill>
-                <a:latin typeface="Cambria" pitchFamily="34" charset="0"/>
-                <a:ea typeface="Cambria" pitchFamily="34" charset="-122"/>
-                <a:cs typeface="Cambria" pitchFamily="34" charset="-120"/>
-              </a:rPr>
-              <a:t>Piloto con datos reales anonimizados</a:t>
-            </a:r>
-            <a:endParaRPr lang="en-US" sz="1500" dirty="0"/>
-          </a:p>
-        </p:txBody>
-      </p:sp>
-      <p:sp>
-        <p:nvSpPr>
-          <p:cNvPr id="11" name="Text 9"/>
-          <p:cNvSpPr/>
-          <p:nvPr/>
-        </p:nvSpPr>
-        <p:spPr>
-          <a:xfrm>
-            <a:off x="4526280" y="3611880"/>
-            <a:ext cx="2971800" cy="1645920"/>
-          </a:xfrm>
-          <a:prstGeom prst="rect">
-            <a:avLst/>
-          </a:prstGeom>
-          <a:noFill/>
-          <a:ln/>
-        </p:spPr>
-        <p:txBody>
-          <a:bodyPr wrap="square" rtlCol="0" anchor="ctr"/>
-          <a:lstStyle/>
-          <a:p>
-            <a:pPr indent="0" marL="0">
-              <a:buNone/>
-            </a:pPr>
-            <a:r>
-              <a:rPr lang="en-US" sz="1250" dirty="0">
+          <p:cNvPr id="7" name="Text 5"/>
+          <p:cNvSpPr/>
+          <p:nvPr/>
+        </p:nvSpPr>
+        <p:spPr>
+          <a:xfrm>
+            <a:off x="960120" y="2880360"/>
+            <a:ext cx="10332720" cy="685800"/>
+          </a:xfrm>
+          <a:prstGeom prst="rect">
+            <a:avLst/>
+          </a:prstGeom>
+          <a:noFill/>
+          <a:ln/>
+        </p:spPr>
+        <p:txBody>
+          <a:bodyPr wrap="square" rtlCol="0" anchor="ctr"/>
+          <a:lstStyle/>
+          <a:p>
+            <a:pPr indent="0" marL="0">
+              <a:buNone/>
+            </a:pPr>
+            <a:r>
+              <a:rPr lang="en-US" sz="1400" dirty="0">
                 <a:solidFill>
                   <a:srgbClr val="1F2937"/>
                 </a:solidFill>
@@ -3064,154 +2993,172 @@
                 <a:ea typeface="Calibri" pitchFamily="34" charset="-122"/>
                 <a:cs typeface="Calibri" pitchFamily="34" charset="-120"/>
               </a:rPr>
-              <a:t>Convenio con una cooperativa SEPS para validar sobre cartera real, con el mismo framework de auditoría.</a:t>
-            </a:r>
-            <a:endParaRPr lang="en-US" sz="1250" dirty="0"/>
-          </a:p>
-        </p:txBody>
-      </p:sp>
-      <p:sp>
-        <p:nvSpPr>
-          <p:cNvPr id="12" name="Shape 10"/>
-          <p:cNvSpPr/>
-          <p:nvPr/>
-        </p:nvSpPr>
-        <p:spPr>
-          <a:xfrm>
-            <a:off x="8046720" y="2011680"/>
-            <a:ext cx="3429000" cy="3383280"/>
-          </a:xfrm>
-          <a:prstGeom prst="roundRect">
-            <a:avLst>
-              <a:gd name="adj" fmla="val 3243"/>
-            </a:avLst>
+              <a:t>El criterio de selección tiene una vulnerabilidad diagnosticada en 45 variables (trampa de ruido) — con causa conocida, sin parche rápido validado todavía.</a:t>
+            </a:r>
+            <a:endParaRPr lang="en-US" sz="1400" dirty="0"/>
+          </a:p>
+        </p:txBody>
+      </p:sp>
+      <p:sp>
+        <p:nvSpPr>
+          <p:cNvPr id="8" name="Shape 6"/>
+          <p:cNvSpPr/>
+          <p:nvPr/>
+        </p:nvSpPr>
+        <p:spPr>
+          <a:xfrm>
+            <a:off x="640080" y="4005072"/>
+            <a:ext cx="128016" cy="128016"/>
+          </a:xfrm>
+          <a:prstGeom prst="rect">
+            <a:avLst/>
           </a:prstGeom>
           <a:solidFill>
-            <a:srgbClr val="1E2761"/>
+            <a:srgbClr val="B23A48"/>
           </a:solidFill>
           <a:ln/>
         </p:spPr>
       </p:sp>
       <p:sp>
         <p:nvSpPr>
-          <p:cNvPr id="13" name="Text 11"/>
-          <p:cNvSpPr/>
-          <p:nvPr/>
-        </p:nvSpPr>
-        <p:spPr>
-          <a:xfrm>
-            <a:off x="8275320" y="2240280"/>
-            <a:ext cx="2971800" cy="411480"/>
-          </a:xfrm>
-          <a:prstGeom prst="rect">
-            <a:avLst/>
-          </a:prstGeom>
-          <a:noFill/>
-          <a:ln/>
-        </p:spPr>
-        <p:txBody>
-          <a:bodyPr wrap="square" rtlCol="0" anchor="ctr"/>
-          <a:lstStyle/>
-          <a:p>
-            <a:pPr indent="0" marL="0">
-              <a:buNone/>
-            </a:pPr>
-            <a:r>
-              <a:rPr lang="en-US" sz="2000" b="1" dirty="0">
-                <a:solidFill>
-                  <a:srgbClr val="B23A48"/>
-                </a:solidFill>
-                <a:latin typeface="Cambria" pitchFamily="34" charset="0"/>
-                <a:ea typeface="Cambria" pitchFamily="34" charset="-122"/>
-                <a:cs typeface="Cambria" pitchFamily="34" charset="-120"/>
-              </a:rPr>
-              <a:t>v2.0</a:t>
-            </a:r>
-            <a:endParaRPr lang="en-US" sz="2000" dirty="0"/>
-          </a:p>
-        </p:txBody>
-      </p:sp>
-      <p:sp>
-        <p:nvSpPr>
-          <p:cNvPr id="14" name="Text 12"/>
-          <p:cNvSpPr/>
-          <p:nvPr/>
-        </p:nvSpPr>
-        <p:spPr>
-          <a:xfrm>
-            <a:off x="8275320" y="2788920"/>
-            <a:ext cx="2971800" cy="777240"/>
-          </a:xfrm>
-          <a:prstGeom prst="rect">
-            <a:avLst/>
-          </a:prstGeom>
-          <a:noFill/>
-          <a:ln/>
-        </p:spPr>
-        <p:txBody>
-          <a:bodyPr wrap="square" rtlCol="0" anchor="ctr"/>
-          <a:lstStyle/>
-          <a:p>
-            <a:pPr indent="0" marL="0">
-              <a:buNone/>
-            </a:pPr>
-            <a:r>
-              <a:rPr lang="en-US" sz="1500" b="1" dirty="0">
-                <a:solidFill>
-                  <a:srgbClr val="FFFFFF"/>
-                </a:solidFill>
-                <a:latin typeface="Cambria" pitchFamily="34" charset="0"/>
-                <a:ea typeface="Cambria" pitchFamily="34" charset="-122"/>
-                <a:cs typeface="Cambria" pitchFamily="34" charset="-120"/>
-              </a:rPr>
-              <a:t>Mitigación, no solo medición</a:t>
-            </a:r>
-            <a:endParaRPr lang="en-US" sz="1500" dirty="0"/>
-          </a:p>
-        </p:txBody>
-      </p:sp>
-      <p:sp>
-        <p:nvSpPr>
-          <p:cNvPr id="15" name="Text 13"/>
-          <p:cNvSpPr/>
-          <p:nvPr/>
-        </p:nvSpPr>
-        <p:spPr>
-          <a:xfrm>
-            <a:off x="8275320" y="3611880"/>
-            <a:ext cx="2971800" cy="1645920"/>
-          </a:xfrm>
-          <a:prstGeom prst="rect">
-            <a:avLst/>
-          </a:prstGeom>
-          <a:noFill/>
-          <a:ln/>
-        </p:spPr>
-        <p:txBody>
-          <a:bodyPr wrap="square" rtlCol="0" anchor="ctr"/>
-          <a:lstStyle/>
-          <a:p>
-            <a:pPr indent="0" marL="0">
-              <a:buNone/>
-            </a:pPr>
-            <a:r>
-              <a:rPr lang="en-US" sz="1250" dirty="0">
-                <a:solidFill>
-                  <a:srgbClr val="CADCFC"/>
+          <p:cNvPr id="9" name="Text 7"/>
+          <p:cNvSpPr/>
+          <p:nvPr/>
+        </p:nvSpPr>
+        <p:spPr>
+          <a:xfrm>
+            <a:off x="960120" y="3931920"/>
+            <a:ext cx="10332720" cy="685800"/>
+          </a:xfrm>
+          <a:prstGeom prst="rect">
+            <a:avLst/>
+          </a:prstGeom>
+          <a:noFill/>
+          <a:ln/>
+        </p:spPr>
+        <p:txBody>
+          <a:bodyPr wrap="square" rtlCol="0" anchor="ctr"/>
+          <a:lstStyle/>
+          <a:p>
+            <a:pPr indent="0" marL="0">
+              <a:buNone/>
+            </a:pPr>
+            <a:r>
+              <a:rPr lang="en-US" sz="1400" dirty="0">
+                <a:solidFill>
+                  <a:srgbClr val="1F2937"/>
                 </a:solidFill>
                 <a:latin typeface="Calibri" pitchFamily="34" charset="0"/>
                 <a:ea typeface="Calibri" pitchFamily="34" charset="-122"/>
                 <a:cs typeface="Calibri" pitchFamily="34" charset="-120"/>
               </a:rPr>
-              <a:t>Añadir la restricción de equidad ya documentada en el diseño del QUBO: penalizar explícitamente la selección conjunta de proxies.</a:t>
-            </a:r>
-            <a:endParaRPr lang="en-US" sz="1250" dirty="0"/>
-          </a:p>
-        </p:txBody>
-      </p:sp>
-      <p:sp>
-        <p:nvSpPr>
-          <p:cNvPr id="16" name="Text 14"/>
+              <a:t>El circuito cuántico simulado no aporta ninguna ventaja de tiempo ni de calidad en este problema — y es físicamente imposible de simular en la escala de 45 variables.</a:t>
+            </a:r>
+            <a:endParaRPr lang="en-US" sz="1400" dirty="0"/>
+          </a:p>
+        </p:txBody>
+      </p:sp>
+      <p:sp>
+        <p:nvSpPr>
+          <p:cNvPr id="10" name="Shape 8"/>
+          <p:cNvSpPr/>
+          <p:nvPr/>
+        </p:nvSpPr>
+        <p:spPr>
+          <a:xfrm>
+            <a:off x="640080" y="5056632"/>
+            <a:ext cx="128016" cy="128016"/>
+          </a:xfrm>
+          <a:prstGeom prst="rect">
+            <a:avLst/>
+          </a:prstGeom>
+          <a:solidFill>
+            <a:srgbClr val="B23A48"/>
+          </a:solidFill>
+          <a:ln/>
+        </p:spPr>
+      </p:sp>
+      <p:sp>
+        <p:nvSpPr>
+          <p:cNvPr id="11" name="Text 9"/>
+          <p:cNvSpPr/>
+          <p:nvPr/>
+        </p:nvSpPr>
+        <p:spPr>
+          <a:xfrm>
+            <a:off x="960120" y="4983480"/>
+            <a:ext cx="10332720" cy="685800"/>
+          </a:xfrm>
+          <a:prstGeom prst="rect">
+            <a:avLst/>
+          </a:prstGeom>
+          <a:noFill/>
+          <a:ln/>
+        </p:spPr>
+        <p:txBody>
+          <a:bodyPr wrap="square" rtlCol="0" anchor="ctr"/>
+          <a:lstStyle/>
+          <a:p>
+            <a:pPr indent="0" marL="0">
+              <a:buNone/>
+            </a:pPr>
+            <a:r>
+              <a:rPr lang="en-US" sz="1400" dirty="0">
+                <a:solidFill>
+                  <a:srgbClr val="1F2937"/>
+                </a:solidFill>
+                <a:latin typeface="Calibri" pitchFamily="34" charset="0"/>
+                <a:ea typeface="Calibri" pitchFamily="34" charset="-122"/>
+                <a:cs typeface="Calibri" pitchFamily="34" charset="-120"/>
+              </a:rPr>
+              <a:t>La auditoría de equidad mide propagación de sesgo sobre datos sintéticos con sesgo inyectado por diseño, no el sesgo real del crédito ecuatoriano.</a:t>
+            </a:r>
+            <a:endParaRPr lang="en-US" sz="1400" dirty="0"/>
+          </a:p>
+        </p:txBody>
+      </p:sp>
+      <p:sp>
+        <p:nvSpPr>
+          <p:cNvPr id="12" name="Text 10"/>
+          <p:cNvSpPr/>
+          <p:nvPr/>
+        </p:nvSpPr>
+        <p:spPr>
+          <a:xfrm>
+            <a:off x="640080" y="5989320"/>
+            <a:ext cx="10332720" cy="457200"/>
+          </a:xfrm>
+          <a:prstGeom prst="rect">
+            <a:avLst/>
+          </a:prstGeom>
+          <a:noFill/>
+          <a:ln/>
+        </p:spPr>
+        <p:txBody>
+          <a:bodyPr wrap="square" rtlCol="0" anchor="ctr"/>
+          <a:lstStyle/>
+          <a:p>
+            <a:pPr indent="0" marL="0">
+              <a:buNone/>
+            </a:pPr>
+            <a:r>
+              <a:rPr lang="en-US" sz="1300" i="1" dirty="0">
+                <a:solidFill>
+                  <a:srgbClr val="6B7280"/>
+                </a:solidFill>
+                <a:latin typeface="Calibri" pitchFamily="34" charset="0"/>
+                <a:ea typeface="Calibri" pitchFamily="34" charset="-122"/>
+                <a:cs typeface="Calibri" pitchFamily="34" charset="-120"/>
+              </a:rPr>
+              <a:t>Un prototipo que declara sus límites con la misma precisión que sus resultados es más creíble, no menos.</a:t>
+            </a:r>
+            <a:endParaRPr lang="en-US" sz="1300" dirty="0"/>
+          </a:p>
+        </p:txBody>
+      </p:sp>
+      <p:sp>
+        <p:nvSpPr>
+          <p:cNvPr id="13" name="Text 11"/>
           <p:cNvSpPr/>
           <p:nvPr/>
         </p:nvSpPr>
@@ -3259,6 +3206,572 @@
 <file path=ppt/slides/slide11.xml><?xml version="1.0" encoding="utf-8"?>
 <p:sld xmlns:a="http://schemas.openxmlformats.org/drawingml/2006/main" xmlns:r="http://schemas.openxmlformats.org/officeDocument/2006/relationships" xmlns:p="http://schemas.openxmlformats.org/presentationml/2006/main">
   <p:cSld name="Slide 11">
+    <p:bg>
+      <p:bgPr>
+        <a:solidFill>
+          <a:srgbClr val="FFFFFF"/>
+        </a:solidFill>
+      </p:bgPr>
+    </p:bg>
+    <p:spTree>
+      <p:nvGrpSpPr>
+        <p:cNvPr id="1" name=""/>
+        <p:cNvGrpSpPr/>
+        <p:nvPr/>
+      </p:nvGrpSpPr>
+      <p:grpSpPr>
+        <a:xfrm>
+          <a:off x="0" y="0"/>
+          <a:ext cx="0" cy="0"/>
+          <a:chOff x="0" y="0"/>
+          <a:chExt cx="0" cy="0"/>
+        </a:xfrm>
+      </p:grpSpPr>
+      <p:sp>
+        <p:nvSpPr>
+          <p:cNvPr id="2" name="Text 0"/>
+          <p:cNvSpPr/>
+          <p:nvPr/>
+        </p:nvSpPr>
+        <p:spPr>
+          <a:xfrm>
+            <a:off x="548640" y="411480"/>
+            <a:ext cx="7315200" cy="320040"/>
+          </a:xfrm>
+          <a:prstGeom prst="rect">
+            <a:avLst/>
+          </a:prstGeom>
+          <a:noFill/>
+          <a:ln/>
+        </p:spPr>
+        <p:txBody>
+          <a:bodyPr wrap="square" rtlCol="0" anchor="ctr"/>
+          <a:lstStyle/>
+          <a:p>
+            <a:pPr indent="0" marL="0">
+              <a:buNone/>
+            </a:pPr>
+            <a:r>
+              <a:rPr lang="en-US" sz="1200" b="1" spc="200" kern="0" dirty="0">
+                <a:solidFill>
+                  <a:srgbClr val="B23A48"/>
+                </a:solidFill>
+                <a:latin typeface="Calibri" pitchFamily="34" charset="0"/>
+                <a:ea typeface="Calibri" pitchFamily="34" charset="-122"/>
+                <a:cs typeface="Calibri" pitchFamily="34" charset="-120"/>
+              </a:rPr>
+              <a:t>PRÓXIMOS PASOS</a:t>
+            </a:r>
+            <a:endParaRPr lang="en-US" sz="1200" dirty="0"/>
+          </a:p>
+        </p:txBody>
+      </p:sp>
+      <p:sp>
+        <p:nvSpPr>
+          <p:cNvPr id="3" name="Text 1"/>
+          <p:cNvSpPr/>
+          <p:nvPr/>
+        </p:nvSpPr>
+        <p:spPr>
+          <a:xfrm>
+            <a:off x="548640" y="685800"/>
+            <a:ext cx="11064240" cy="822960"/>
+          </a:xfrm>
+          <a:prstGeom prst="rect">
+            <a:avLst/>
+          </a:prstGeom>
+          <a:noFill/>
+          <a:ln/>
+        </p:spPr>
+        <p:txBody>
+          <a:bodyPr wrap="square" rtlCol="0" anchor="ctr"/>
+          <a:lstStyle/>
+          <a:p>
+            <a:pPr indent="0" marL="0">
+              <a:buNone/>
+            </a:pPr>
+            <a:r>
+              <a:rPr lang="en-US" sz="3000" b="1" dirty="0">
+                <a:solidFill>
+                  <a:srgbClr val="1E2761"/>
+                </a:solidFill>
+                <a:latin typeface="Cambria" pitchFamily="34" charset="0"/>
+                <a:ea typeface="Cambria" pitchFamily="34" charset="-122"/>
+                <a:cs typeface="Cambria" pitchFamily="34" charset="-120"/>
+              </a:rPr>
+              <a:t>De prototipo académico a herramienta piloteable</a:t>
+            </a:r>
+            <a:endParaRPr lang="en-US" sz="3000" dirty="0"/>
+          </a:p>
+        </p:txBody>
+      </p:sp>
+      <p:sp>
+        <p:nvSpPr>
+          <p:cNvPr id="4" name="Shape 2"/>
+          <p:cNvSpPr/>
+          <p:nvPr/>
+        </p:nvSpPr>
+        <p:spPr>
+          <a:xfrm>
+            <a:off x="548640" y="2011680"/>
+            <a:ext cx="3429000" cy="3383280"/>
+          </a:xfrm>
+          <a:prstGeom prst="roundRect">
+            <a:avLst>
+              <a:gd name="adj" fmla="val 3243"/>
+            </a:avLst>
+          </a:prstGeom>
+          <a:solidFill>
+            <a:srgbClr val="F3F5FC"/>
+          </a:solidFill>
+          <a:ln/>
+        </p:spPr>
+      </p:sp>
+      <p:sp>
+        <p:nvSpPr>
+          <p:cNvPr id="5" name="Text 3"/>
+          <p:cNvSpPr/>
+          <p:nvPr/>
+        </p:nvSpPr>
+        <p:spPr>
+          <a:xfrm>
+            <a:off x="777240" y="2240280"/>
+            <a:ext cx="2971800" cy="411480"/>
+          </a:xfrm>
+          <a:prstGeom prst="rect">
+            <a:avLst/>
+          </a:prstGeom>
+          <a:noFill/>
+          <a:ln/>
+        </p:spPr>
+        <p:txBody>
+          <a:bodyPr wrap="square" rtlCol="0" anchor="ctr"/>
+          <a:lstStyle/>
+          <a:p>
+            <a:pPr indent="0" marL="0">
+              <a:buNone/>
+            </a:pPr>
+            <a:r>
+              <a:rPr lang="en-US" sz="2000" b="1" dirty="0">
+                <a:solidFill>
+                  <a:srgbClr val="B23A48"/>
+                </a:solidFill>
+                <a:latin typeface="Cambria" pitchFamily="34" charset="0"/>
+                <a:ea typeface="Cambria" pitchFamily="34" charset="-122"/>
+                <a:cs typeface="Cambria" pitchFamily="34" charset="-120"/>
+              </a:rPr>
+              <a:t>v1.1</a:t>
+            </a:r>
+            <a:endParaRPr lang="en-US" sz="2000" dirty="0"/>
+          </a:p>
+        </p:txBody>
+      </p:sp>
+      <p:sp>
+        <p:nvSpPr>
+          <p:cNvPr id="6" name="Text 4"/>
+          <p:cNvSpPr/>
+          <p:nvPr/>
+        </p:nvSpPr>
+        <p:spPr>
+          <a:xfrm>
+            <a:off x="777240" y="2788920"/>
+            <a:ext cx="2971800" cy="777240"/>
+          </a:xfrm>
+          <a:prstGeom prst="rect">
+            <a:avLst/>
+          </a:prstGeom>
+          <a:noFill/>
+          <a:ln/>
+        </p:spPr>
+        <p:txBody>
+          <a:bodyPr wrap="square" rtlCol="0" anchor="ctr"/>
+          <a:lstStyle/>
+          <a:p>
+            <a:pPr indent="0" marL="0">
+              <a:buNone/>
+            </a:pPr>
+            <a:r>
+              <a:rPr lang="en-US" sz="1500" b="1" dirty="0">
+                <a:solidFill>
+                  <a:srgbClr val="1E2761"/>
+                </a:solidFill>
+                <a:latin typeface="Cambria" pitchFamily="34" charset="0"/>
+                <a:ea typeface="Cambria" pitchFamily="34" charset="-122"/>
+                <a:cs typeface="Cambria" pitchFamily="34" charset="-120"/>
+              </a:rPr>
+              <a:t>Estimador de relevancia robusto</a:t>
+            </a:r>
+            <a:endParaRPr lang="en-US" sz="1500" dirty="0"/>
+          </a:p>
+        </p:txBody>
+      </p:sp>
+      <p:sp>
+        <p:nvSpPr>
+          <p:cNvPr id="7" name="Text 5"/>
+          <p:cNvSpPr/>
+          <p:nvPr/>
+        </p:nvSpPr>
+        <p:spPr>
+          <a:xfrm>
+            <a:off x="777240" y="3611880"/>
+            <a:ext cx="2971800" cy="1645920"/>
+          </a:xfrm>
+          <a:prstGeom prst="rect">
+            <a:avLst/>
+          </a:prstGeom>
+          <a:noFill/>
+          <a:ln/>
+        </p:spPr>
+        <p:txBody>
+          <a:bodyPr wrap="square" rtlCol="0" anchor="ctr"/>
+          <a:lstStyle/>
+          <a:p>
+            <a:pPr indent="0" marL="0">
+              <a:buNone/>
+            </a:pPr>
+            <a:r>
+              <a:rPr lang="en-US" sz="1250" dirty="0">
+                <a:solidFill>
+                  <a:srgbClr val="1F2937"/>
+                </a:solidFill>
+                <a:latin typeface="Calibri" pitchFamily="34" charset="0"/>
+                <a:ea typeface="Calibri" pitchFamily="34" charset="-122"/>
+                <a:cs typeface="Calibri" pitchFamily="34" charset="-120"/>
+              </a:rPr>
+              <a:t>Reemplazar el estimador de vecinos por uno menos sensible a ruido en alta dimensión, cerrando la brecha de Nivel B.</a:t>
+            </a:r>
+            <a:endParaRPr lang="en-US" sz="1250" dirty="0"/>
+          </a:p>
+        </p:txBody>
+      </p:sp>
+      <p:sp>
+        <p:nvSpPr>
+          <p:cNvPr id="8" name="Shape 6"/>
+          <p:cNvSpPr/>
+          <p:nvPr/>
+        </p:nvSpPr>
+        <p:spPr>
+          <a:xfrm>
+            <a:off x="4297680" y="2011680"/>
+            <a:ext cx="3429000" cy="3383280"/>
+          </a:xfrm>
+          <a:prstGeom prst="roundRect">
+            <a:avLst>
+              <a:gd name="adj" fmla="val 3243"/>
+            </a:avLst>
+          </a:prstGeom>
+          <a:solidFill>
+            <a:srgbClr val="F3F5FC"/>
+          </a:solidFill>
+          <a:ln/>
+        </p:spPr>
+      </p:sp>
+      <p:sp>
+        <p:nvSpPr>
+          <p:cNvPr id="9" name="Text 7"/>
+          <p:cNvSpPr/>
+          <p:nvPr/>
+        </p:nvSpPr>
+        <p:spPr>
+          <a:xfrm>
+            <a:off x="4526280" y="2240280"/>
+            <a:ext cx="2971800" cy="411480"/>
+          </a:xfrm>
+          <a:prstGeom prst="rect">
+            <a:avLst/>
+          </a:prstGeom>
+          <a:noFill/>
+          <a:ln/>
+        </p:spPr>
+        <p:txBody>
+          <a:bodyPr wrap="square" rtlCol="0" anchor="ctr"/>
+          <a:lstStyle/>
+          <a:p>
+            <a:pPr indent="0" marL="0">
+              <a:buNone/>
+            </a:pPr>
+            <a:r>
+              <a:rPr lang="en-US" sz="2000" b="1" dirty="0">
+                <a:solidFill>
+                  <a:srgbClr val="B23A48"/>
+                </a:solidFill>
+                <a:latin typeface="Cambria" pitchFamily="34" charset="0"/>
+                <a:ea typeface="Cambria" pitchFamily="34" charset="-122"/>
+                <a:cs typeface="Cambria" pitchFamily="34" charset="-120"/>
+              </a:rPr>
+              <a:t>v1.2</a:t>
+            </a:r>
+            <a:endParaRPr lang="en-US" sz="2000" dirty="0"/>
+          </a:p>
+        </p:txBody>
+      </p:sp>
+      <p:sp>
+        <p:nvSpPr>
+          <p:cNvPr id="10" name="Text 8"/>
+          <p:cNvSpPr/>
+          <p:nvPr/>
+        </p:nvSpPr>
+        <p:spPr>
+          <a:xfrm>
+            <a:off x="4526280" y="2788920"/>
+            <a:ext cx="2971800" cy="777240"/>
+          </a:xfrm>
+          <a:prstGeom prst="rect">
+            <a:avLst/>
+          </a:prstGeom>
+          <a:noFill/>
+          <a:ln/>
+        </p:spPr>
+        <p:txBody>
+          <a:bodyPr wrap="square" rtlCol="0" anchor="ctr"/>
+          <a:lstStyle/>
+          <a:p>
+            <a:pPr indent="0" marL="0">
+              <a:buNone/>
+            </a:pPr>
+            <a:r>
+              <a:rPr lang="en-US" sz="1500" b="1" dirty="0">
+                <a:solidFill>
+                  <a:srgbClr val="1E2761"/>
+                </a:solidFill>
+                <a:latin typeface="Cambria" pitchFamily="34" charset="0"/>
+                <a:ea typeface="Cambria" pitchFamily="34" charset="-122"/>
+                <a:cs typeface="Cambria" pitchFamily="34" charset="-120"/>
+              </a:rPr>
+              <a:t>Piloto con datos reales anonimizados</a:t>
+            </a:r>
+            <a:endParaRPr lang="en-US" sz="1500" dirty="0"/>
+          </a:p>
+        </p:txBody>
+      </p:sp>
+      <p:sp>
+        <p:nvSpPr>
+          <p:cNvPr id="11" name="Text 9"/>
+          <p:cNvSpPr/>
+          <p:nvPr/>
+        </p:nvSpPr>
+        <p:spPr>
+          <a:xfrm>
+            <a:off x="4526280" y="3611880"/>
+            <a:ext cx="2971800" cy="1645920"/>
+          </a:xfrm>
+          <a:prstGeom prst="rect">
+            <a:avLst/>
+          </a:prstGeom>
+          <a:noFill/>
+          <a:ln/>
+        </p:spPr>
+        <p:txBody>
+          <a:bodyPr wrap="square" rtlCol="0" anchor="ctr"/>
+          <a:lstStyle/>
+          <a:p>
+            <a:pPr indent="0" marL="0">
+              <a:buNone/>
+            </a:pPr>
+            <a:r>
+              <a:rPr lang="en-US" sz="1250" dirty="0">
+                <a:solidFill>
+                  <a:srgbClr val="1F2937"/>
+                </a:solidFill>
+                <a:latin typeface="Calibri" pitchFamily="34" charset="0"/>
+                <a:ea typeface="Calibri" pitchFamily="34" charset="-122"/>
+                <a:cs typeface="Calibri" pitchFamily="34" charset="-120"/>
+              </a:rPr>
+              <a:t>Convenio con una cooperativa SEPS para validar sobre cartera real, con el mismo framework de auditoría.</a:t>
+            </a:r>
+            <a:endParaRPr lang="en-US" sz="1250" dirty="0"/>
+          </a:p>
+        </p:txBody>
+      </p:sp>
+      <p:sp>
+        <p:nvSpPr>
+          <p:cNvPr id="12" name="Shape 10"/>
+          <p:cNvSpPr/>
+          <p:nvPr/>
+        </p:nvSpPr>
+        <p:spPr>
+          <a:xfrm>
+            <a:off x="8046720" y="2011680"/>
+            <a:ext cx="3429000" cy="3383280"/>
+          </a:xfrm>
+          <a:prstGeom prst="roundRect">
+            <a:avLst>
+              <a:gd name="adj" fmla="val 3243"/>
+            </a:avLst>
+          </a:prstGeom>
+          <a:solidFill>
+            <a:srgbClr val="1E2761"/>
+          </a:solidFill>
+          <a:ln/>
+        </p:spPr>
+      </p:sp>
+      <p:sp>
+        <p:nvSpPr>
+          <p:cNvPr id="13" name="Text 11"/>
+          <p:cNvSpPr/>
+          <p:nvPr/>
+        </p:nvSpPr>
+        <p:spPr>
+          <a:xfrm>
+            <a:off x="8275320" y="2240280"/>
+            <a:ext cx="2971800" cy="411480"/>
+          </a:xfrm>
+          <a:prstGeom prst="rect">
+            <a:avLst/>
+          </a:prstGeom>
+          <a:noFill/>
+          <a:ln/>
+        </p:spPr>
+        <p:txBody>
+          <a:bodyPr wrap="square" rtlCol="0" anchor="ctr"/>
+          <a:lstStyle/>
+          <a:p>
+            <a:pPr indent="0" marL="0">
+              <a:buNone/>
+            </a:pPr>
+            <a:r>
+              <a:rPr lang="en-US" sz="2000" b="1" dirty="0">
+                <a:solidFill>
+                  <a:srgbClr val="B23A48"/>
+                </a:solidFill>
+                <a:latin typeface="Cambria" pitchFamily="34" charset="0"/>
+                <a:ea typeface="Cambria" pitchFamily="34" charset="-122"/>
+                <a:cs typeface="Cambria" pitchFamily="34" charset="-120"/>
+              </a:rPr>
+              <a:t>v2.0</a:t>
+            </a:r>
+            <a:endParaRPr lang="en-US" sz="2000" dirty="0"/>
+          </a:p>
+        </p:txBody>
+      </p:sp>
+      <p:sp>
+        <p:nvSpPr>
+          <p:cNvPr id="14" name="Text 12"/>
+          <p:cNvSpPr/>
+          <p:nvPr/>
+        </p:nvSpPr>
+        <p:spPr>
+          <a:xfrm>
+            <a:off x="8275320" y="2788920"/>
+            <a:ext cx="2971800" cy="777240"/>
+          </a:xfrm>
+          <a:prstGeom prst="rect">
+            <a:avLst/>
+          </a:prstGeom>
+          <a:noFill/>
+          <a:ln/>
+        </p:spPr>
+        <p:txBody>
+          <a:bodyPr wrap="square" rtlCol="0" anchor="ctr"/>
+          <a:lstStyle/>
+          <a:p>
+            <a:pPr indent="0" marL="0">
+              <a:buNone/>
+            </a:pPr>
+            <a:r>
+              <a:rPr lang="en-US" sz="1500" b="1" dirty="0">
+                <a:solidFill>
+                  <a:srgbClr val="FFFFFF"/>
+                </a:solidFill>
+                <a:latin typeface="Cambria" pitchFamily="34" charset="0"/>
+                <a:ea typeface="Cambria" pitchFamily="34" charset="-122"/>
+                <a:cs typeface="Cambria" pitchFamily="34" charset="-120"/>
+              </a:rPr>
+              <a:t>Mitigación, no solo medición</a:t>
+            </a:r>
+            <a:endParaRPr lang="en-US" sz="1500" dirty="0"/>
+          </a:p>
+        </p:txBody>
+      </p:sp>
+      <p:sp>
+        <p:nvSpPr>
+          <p:cNvPr id="15" name="Text 13"/>
+          <p:cNvSpPr/>
+          <p:nvPr/>
+        </p:nvSpPr>
+        <p:spPr>
+          <a:xfrm>
+            <a:off x="8275320" y="3611880"/>
+            <a:ext cx="2971800" cy="1645920"/>
+          </a:xfrm>
+          <a:prstGeom prst="rect">
+            <a:avLst/>
+          </a:prstGeom>
+          <a:noFill/>
+          <a:ln/>
+        </p:spPr>
+        <p:txBody>
+          <a:bodyPr wrap="square" rtlCol="0" anchor="ctr"/>
+          <a:lstStyle/>
+          <a:p>
+            <a:pPr indent="0" marL="0">
+              <a:buNone/>
+            </a:pPr>
+            <a:r>
+              <a:rPr lang="en-US" sz="1250" dirty="0">
+                <a:solidFill>
+                  <a:srgbClr val="CADCFC"/>
+                </a:solidFill>
+                <a:latin typeface="Calibri" pitchFamily="34" charset="0"/>
+                <a:ea typeface="Calibri" pitchFamily="34" charset="-122"/>
+                <a:cs typeface="Calibri" pitchFamily="34" charset="-120"/>
+              </a:rPr>
+              <a:t>Añadir la restricción de equidad ya documentada en el diseño del QUBO: penalizar explícitamente la selección conjunta de proxies.</a:t>
+            </a:r>
+            <a:endParaRPr lang="en-US" sz="1250" dirty="0"/>
+          </a:p>
+        </p:txBody>
+      </p:sp>
+      <p:sp>
+        <p:nvSpPr>
+          <p:cNvPr id="16" name="Text 14"/>
+          <p:cNvSpPr/>
+          <p:nvPr/>
+        </p:nvSpPr>
+        <p:spPr>
+          <a:xfrm>
+            <a:off x="11521440" y="6446520"/>
+            <a:ext cx="548640" cy="274320"/>
+          </a:xfrm>
+          <a:prstGeom prst="rect">
+            <a:avLst/>
+          </a:prstGeom>
+          <a:noFill/>
+          <a:ln/>
+        </p:spPr>
+        <p:txBody>
+          <a:bodyPr wrap="square" rtlCol="0" anchor="ctr"/>
+          <a:lstStyle/>
+          <a:p>
+            <a:pPr algn="r" indent="0" marL="0">
+              <a:buNone/>
+            </a:pPr>
+            <a:r>
+              <a:rPr lang="en-US" sz="1000" dirty="0">
+                <a:solidFill>
+                  <a:srgbClr val="6B7280"/>
+                </a:solidFill>
+                <a:latin typeface="Calibri" pitchFamily="34" charset="0"/>
+                <a:ea typeface="Calibri" pitchFamily="34" charset="-122"/>
+                <a:cs typeface="Calibri" pitchFamily="34" charset="-120"/>
+              </a:rPr>
+              <a:t>11</a:t>
+            </a:r>
+            <a:endParaRPr lang="en-US" sz="1000" dirty="0"/>
+          </a:p>
+        </p:txBody>
+      </p:sp>
+    </p:spTree>
+  </p:cSld>
+  <p:clrMapOvr>
+    <a:masterClrMapping/>
+  </p:clrMapOvr>
+</p:sld>
+</file>
+
+<file path=ppt/slides/slide12.xml><?xml version="1.0" encoding="utf-8"?>
+<p:sld xmlns:a="http://schemas.openxmlformats.org/drawingml/2006/main" xmlns:r="http://schemas.openxmlformats.org/officeDocument/2006/relationships" xmlns:p="http://schemas.openxmlformats.org/presentationml/2006/main">
+  <p:cSld name="Slide 12">
     <p:bg>
       <p:bgPr>
         <a:solidFill>
@@ -3555,7 +4068,7 @@
                 <a:ea typeface="Calibri" pitchFamily="34" charset="-122"/>
                 <a:cs typeface="Calibri" pitchFamily="34" charset="-120"/>
               </a:rPr>
-              <a:t>EL PROBLEMA</a:t>
+              <a:t>PRUÉBALO TÚ MISMO</a:t>
             </a:r>
             <a:endParaRPr lang="en-US" sz="1200" dirty="0"/>
           </a:p>
@@ -3594,7 +4107,7 @@
                 <a:ea typeface="Cambria" pitchFamily="34" charset="-122"/>
                 <a:cs typeface="Cambria" pitchFamily="34" charset="-120"/>
               </a:rPr>
-              <a:t>Menos variables no basta — hay que poder probarlo</a:t>
+              <a:t>La app está corriendo en vivo, ahora mismo</a:t>
             </a:r>
             <a:endParaRPr lang="en-US" sz="3000" dirty="0"/>
           </a:p>
@@ -3608,14 +4121,16 @@
         </p:nvSpPr>
         <p:spPr>
           <a:xfrm>
-            <a:off x="640080" y="1920240"/>
-            <a:ext cx="502920" cy="502920"/>
-          </a:xfrm>
-          <a:prstGeom prst="ellipse">
-            <a:avLst/>
+            <a:off x="640080" y="1828800"/>
+            <a:ext cx="6949440" cy="3566160"/>
+          </a:xfrm>
+          <a:prstGeom prst="roundRect">
+            <a:avLst>
+              <a:gd name="adj" fmla="val 3077"/>
+            </a:avLst>
           </a:prstGeom>
           <a:solidFill>
-            <a:srgbClr val="1E2761"/>
+            <a:srgbClr val="F3F5FC"/>
           </a:solidFill>
           <a:ln/>
         </p:spPr>
@@ -3628,32 +4143,32 @@
         </p:nvSpPr>
         <p:spPr>
           <a:xfrm>
-            <a:off x="640080" y="1920240"/>
-            <a:ext cx="502920" cy="502920"/>
-          </a:xfrm>
-          <a:prstGeom prst="rect">
-            <a:avLst/>
-          </a:prstGeom>
-          <a:noFill/>
-          <a:ln/>
-        </p:spPr>
-        <p:txBody>
-          <a:bodyPr wrap="square" rtlCol="0" anchor="ctr"/>
-          <a:lstStyle/>
-          <a:p>
-            <a:pPr algn="ctr" indent="0" marL="0">
+            <a:off x="914400" y="2103120"/>
+            <a:ext cx="6400800" cy="548640"/>
+          </a:xfrm>
+          <a:prstGeom prst="rect">
+            <a:avLst/>
+          </a:prstGeom>
+          <a:noFill/>
+          <a:ln/>
+        </p:spPr>
+        <p:txBody>
+          <a:bodyPr wrap="square" rtlCol="0" anchor="ctr"/>
+          <a:lstStyle/>
+          <a:p>
+            <a:pPr indent="0" marL="0">
               <a:buNone/>
             </a:pPr>
             <a:r>
               <a:rPr lang="en-US" sz="2000" b="1" dirty="0">
                 <a:solidFill>
-                  <a:srgbClr val="FFFFFF"/>
+                  <a:srgbClr val="1E2761"/>
                 </a:solidFill>
                 <a:latin typeface="Cambria" pitchFamily="34" charset="0"/>
                 <a:ea typeface="Cambria" pitchFamily="34" charset="-122"/>
                 <a:cs typeface="Cambria" pitchFamily="34" charset="-120"/>
               </a:rPr>
-              <a:t>1</a:t>
+              <a:t>web-production-e797c.up.railway.app</a:t>
             </a:r>
             <a:endParaRPr lang="en-US" sz="2000" dirty="0"/>
           </a:p>
@@ -3667,195 +4182,33 @@
         </p:nvSpPr>
         <p:spPr>
           <a:xfrm>
-            <a:off x="1417320" y="1874520"/>
-            <a:ext cx="9875520" cy="365760"/>
-          </a:xfrm>
-          <a:prstGeom prst="rect">
-            <a:avLst/>
-          </a:prstGeom>
-          <a:noFill/>
-          <a:ln/>
-        </p:spPr>
-        <p:txBody>
-          <a:bodyPr wrap="square" rtlCol="0" anchor="ctr"/>
-          <a:lstStyle/>
-          <a:p>
-            <a:pPr indent="0" marL="0">
-              <a:buNone/>
-            </a:pPr>
-            <a:r>
-              <a:rPr lang="en-US" sz="1700" b="1" dirty="0">
+            <a:off x="914400" y="2834640"/>
+            <a:ext cx="6400800" cy="384048"/>
+          </a:xfrm>
+          <a:prstGeom prst="rect">
+            <a:avLst/>
+          </a:prstGeom>
+          <a:noFill/>
+          <a:ln/>
+        </p:spPr>
+        <p:txBody>
+          <a:bodyPr wrap="square" rtlCol="0" anchor="ctr"/>
+          <a:lstStyle/>
+          <a:p>
+            <a:pPr indent="0" marL="0">
+              <a:buNone/>
+            </a:pPr>
+            <a:r>
+              <a:rPr lang="en-US" sz="1350" b="1" dirty="0">
                 <a:solidFill>
                   <a:srgbClr val="1E2761"/>
-                </a:solidFill>
-                <a:latin typeface="Cambria" pitchFamily="34" charset="0"/>
-                <a:ea typeface="Cambria" pitchFamily="34" charset="-122"/>
-                <a:cs typeface="Cambria" pitchFamily="34" charset="-120"/>
-              </a:rPr>
-              <a:t>Obligación regulatoria</a:t>
-            </a:r>
-            <a:endParaRPr lang="en-US" sz="1700" dirty="0"/>
-          </a:p>
-        </p:txBody>
-      </p:sp>
-      <p:sp>
-        <p:nvSpPr>
-          <p:cNvPr id="7" name="Text 5"/>
-          <p:cNvSpPr/>
-          <p:nvPr/>
-        </p:nvSpPr>
-        <p:spPr>
-          <a:xfrm>
-            <a:off x="1417320" y="2258568"/>
-            <a:ext cx="9875520" cy="548640"/>
-          </a:xfrm>
-          <a:prstGeom prst="rect">
-            <a:avLst/>
-          </a:prstGeom>
-          <a:noFill/>
-          <a:ln/>
-        </p:spPr>
-        <p:txBody>
-          <a:bodyPr wrap="square" rtlCol="0" anchor="ctr"/>
-          <a:lstStyle/>
-          <a:p>
-            <a:pPr indent="0" marL="0">
-              <a:buNone/>
-            </a:pPr>
-            <a:r>
-              <a:rPr lang="en-US" sz="1350" dirty="0">
-                <a:solidFill>
-                  <a:srgbClr val="1F2937"/>
                 </a:solidFill>
                 <a:latin typeface="Calibri" pitchFamily="34" charset="0"/>
                 <a:ea typeface="Calibri" pitchFamily="34" charset="-122"/>
                 <a:cs typeface="Calibri" pitchFamily="34" charset="-120"/>
               </a:rPr>
-              <a:t>Una cooperativa SEPS debe poder sustentar ante el socio y el supervisor por qué se negó un crédito.</a:t>
-            </a:r>
-            <a:endParaRPr lang="en-US" sz="1350" dirty="0"/>
-          </a:p>
-        </p:txBody>
-      </p:sp>
-      <p:sp>
-        <p:nvSpPr>
-          <p:cNvPr id="8" name="Shape 6"/>
-          <p:cNvSpPr/>
-          <p:nvPr/>
-        </p:nvSpPr>
-        <p:spPr>
-          <a:xfrm>
-            <a:off x="640080" y="3291840"/>
-            <a:ext cx="502920" cy="502920"/>
-          </a:xfrm>
-          <a:prstGeom prst="ellipse">
-            <a:avLst/>
-          </a:prstGeom>
-          <a:solidFill>
-            <a:srgbClr val="1E2761"/>
-          </a:solidFill>
-          <a:ln/>
-        </p:spPr>
-      </p:sp>
-      <p:sp>
-        <p:nvSpPr>
-          <p:cNvPr id="9" name="Text 7"/>
-          <p:cNvSpPr/>
-          <p:nvPr/>
-        </p:nvSpPr>
-        <p:spPr>
-          <a:xfrm>
-            <a:off x="640080" y="3291840"/>
-            <a:ext cx="502920" cy="502920"/>
-          </a:xfrm>
-          <a:prstGeom prst="rect">
-            <a:avLst/>
-          </a:prstGeom>
-          <a:noFill/>
-          <a:ln/>
-        </p:spPr>
-        <p:txBody>
-          <a:bodyPr wrap="square" rtlCol="0" anchor="ctr"/>
-          <a:lstStyle/>
-          <a:p>
-            <a:pPr algn="ctr" indent="0" marL="0">
-              <a:buNone/>
-            </a:pPr>
-            <a:r>
-              <a:rPr lang="en-US" sz="2000" b="1" dirty="0">
-                <a:solidFill>
-                  <a:srgbClr val="FFFFFF"/>
-                </a:solidFill>
-                <a:latin typeface="Cambria" pitchFamily="34" charset="0"/>
-                <a:ea typeface="Cambria" pitchFamily="34" charset="-122"/>
-                <a:cs typeface="Cambria" pitchFamily="34" charset="-120"/>
-              </a:rPr>
-              <a:t>2</a:t>
-            </a:r>
-            <a:endParaRPr lang="en-US" sz="2000" dirty="0"/>
-          </a:p>
-        </p:txBody>
-      </p:sp>
-      <p:sp>
-        <p:nvSpPr>
-          <p:cNvPr id="10" name="Text 8"/>
-          <p:cNvSpPr/>
-          <p:nvPr/>
-        </p:nvSpPr>
-        <p:spPr>
-          <a:xfrm>
-            <a:off x="1417320" y="3246120"/>
-            <a:ext cx="9875520" cy="365760"/>
-          </a:xfrm>
-          <a:prstGeom prst="rect">
-            <a:avLst/>
-          </a:prstGeom>
-          <a:noFill/>
-          <a:ln/>
-        </p:spPr>
-        <p:txBody>
-          <a:bodyPr wrap="square" rtlCol="0" anchor="ctr"/>
-          <a:lstStyle/>
-          <a:p>
-            <a:pPr indent="0" marL="0">
-              <a:buNone/>
-            </a:pPr>
-            <a:r>
-              <a:rPr lang="en-US" sz="1700" b="1" dirty="0">
-                <a:solidFill>
-                  <a:srgbClr val="1E2761"/>
-                </a:solidFill>
-                <a:latin typeface="Cambria" pitchFamily="34" charset="0"/>
-                <a:ea typeface="Cambria" pitchFamily="34" charset="-122"/>
-                <a:cs typeface="Cambria" pitchFamily="34" charset="-120"/>
-              </a:rPr>
-              <a:t>El punto ciego de hoy</a:t>
-            </a:r>
-            <a:endParaRPr lang="en-US" sz="1700" dirty="0"/>
-          </a:p>
-        </p:txBody>
-      </p:sp>
-      <p:sp>
-        <p:nvSpPr>
-          <p:cNvPr id="11" name="Text 9"/>
-          <p:cNvSpPr/>
-          <p:nvPr/>
-        </p:nvSpPr>
-        <p:spPr>
-          <a:xfrm>
-            <a:off x="1417320" y="3630168"/>
-            <a:ext cx="9875520" cy="548640"/>
-          </a:xfrm>
-          <a:prstGeom prst="rect">
-            <a:avLst/>
-          </a:prstGeom>
-          <a:noFill/>
-          <a:ln/>
-        </p:spPr>
-        <p:txBody>
-          <a:bodyPr wrap="square" rtlCol="0" anchor="ctr"/>
-          <a:lstStyle/>
-          <a:p>
+              <a:t>1 · Datos  </a:t>
+            </a:r>
             <a:pPr indent="0" marL="0">
               <a:buNone/>
             </a:pPr>
@@ -3868,7 +4221,7 @@
                 <a:ea typeface="Calibri" pitchFamily="34" charset="-122"/>
                 <a:cs typeface="Calibri" pitchFamily="34" charset="-120"/>
               </a:rPr>
-              <a:t>LASSO y stepwise seleccionan variables, pero ninguno mide cuánto sesgo indirecto hacia sexo, zona o provincia sobrevive en el modelo final.</a:t>
+              <a:t>esquema, correlaciones, fidelidad sintética</a:t>
             </a:r>
             <a:endParaRPr lang="en-US" sz="1350" dirty="0"/>
           </a:p>
@@ -3876,136 +4229,52 @@
       </p:sp>
       <p:sp>
         <p:nvSpPr>
-          <p:cNvPr id="12" name="Shape 10"/>
-          <p:cNvSpPr/>
-          <p:nvPr/>
-        </p:nvSpPr>
-        <p:spPr>
-          <a:xfrm>
-            <a:off x="640080" y="4663440"/>
-            <a:ext cx="502920" cy="502920"/>
-          </a:xfrm>
-          <a:prstGeom prst="ellipse">
-            <a:avLst/>
-          </a:prstGeom>
-          <a:solidFill>
-            <a:srgbClr val="1E2761"/>
-          </a:solidFill>
-          <a:ln/>
-        </p:spPr>
-      </p:sp>
-      <p:sp>
-        <p:nvSpPr>
-          <p:cNvPr id="13" name="Text 11"/>
-          <p:cNvSpPr/>
-          <p:nvPr/>
-        </p:nvSpPr>
-        <p:spPr>
-          <a:xfrm>
-            <a:off x="640080" y="4663440"/>
-            <a:ext cx="502920" cy="502920"/>
-          </a:xfrm>
-          <a:prstGeom prst="rect">
-            <a:avLst/>
-          </a:prstGeom>
-          <a:noFill/>
-          <a:ln/>
-        </p:spPr>
-        <p:txBody>
-          <a:bodyPr wrap="square" rtlCol="0" anchor="ctr"/>
-          <a:lstStyle/>
-          <a:p>
-            <a:pPr algn="ctr" indent="0" marL="0">
-              <a:buNone/>
-            </a:pPr>
-            <a:r>
-              <a:rPr lang="en-US" sz="2000" b="1" dirty="0">
-                <a:solidFill>
-                  <a:srgbClr val="FFFFFF"/>
-                </a:solidFill>
-                <a:latin typeface="Cambria" pitchFamily="34" charset="0"/>
-                <a:ea typeface="Cambria" pitchFamily="34" charset="-122"/>
-                <a:cs typeface="Cambria" pitchFamily="34" charset="-120"/>
-              </a:rPr>
-              <a:t>3</a:t>
-            </a:r>
-            <a:endParaRPr lang="en-US" sz="2000" dirty="0"/>
-          </a:p>
-        </p:txBody>
-      </p:sp>
-      <p:sp>
-        <p:nvSpPr>
-          <p:cNvPr id="14" name="Text 12"/>
-          <p:cNvSpPr/>
-          <p:nvPr/>
-        </p:nvSpPr>
-        <p:spPr>
-          <a:xfrm>
-            <a:off x="1417320" y="4617720"/>
-            <a:ext cx="9875520" cy="365760"/>
-          </a:xfrm>
-          <a:prstGeom prst="rect">
-            <a:avLst/>
-          </a:prstGeom>
-          <a:noFill/>
-          <a:ln/>
-        </p:spPr>
-        <p:txBody>
-          <a:bodyPr wrap="square" rtlCol="0" anchor="ctr"/>
-          <a:lstStyle/>
-          <a:p>
-            <a:pPr indent="0" marL="0">
-              <a:buNone/>
-            </a:pPr>
-            <a:r>
-              <a:rPr lang="en-US" sz="1700" b="1" dirty="0">
+          <p:cNvPr id="7" name="Text 5"/>
+          <p:cNvSpPr/>
+          <p:nvPr/>
+        </p:nvSpPr>
+        <p:spPr>
+          <a:xfrm>
+            <a:off x="914400" y="3291840"/>
+            <a:ext cx="6400800" cy="384048"/>
+          </a:xfrm>
+          <a:prstGeom prst="rect">
+            <a:avLst/>
+          </a:prstGeom>
+          <a:noFill/>
+          <a:ln/>
+        </p:spPr>
+        <p:txBody>
+          <a:bodyPr wrap="square" rtlCol="0" anchor="ctr"/>
+          <a:lstStyle/>
+          <a:p>
+            <a:pPr indent="0" marL="0">
+              <a:buNone/>
+            </a:pPr>
+            <a:r>
+              <a:rPr lang="en-US" sz="1350" b="1" dirty="0">
                 <a:solidFill>
                   <a:srgbClr val="1E2761"/>
-                </a:solidFill>
-                <a:latin typeface="Cambria" pitchFamily="34" charset="0"/>
-                <a:ea typeface="Cambria" pitchFamily="34" charset="-122"/>
-                <a:cs typeface="Cambria" pitchFamily="34" charset="-120"/>
-              </a:rPr>
-              <a:t>La promesa a probar</a:t>
-            </a:r>
-            <a:endParaRPr lang="en-US" sz="1700" dirty="0"/>
-          </a:p>
-        </p:txBody>
-      </p:sp>
-      <p:sp>
-        <p:nvSpPr>
-          <p:cNvPr id="15" name="Text 13"/>
-          <p:cNvSpPr/>
-          <p:nvPr/>
-        </p:nvSpPr>
-        <p:spPr>
-          <a:xfrm>
-            <a:off x="1417320" y="5001768"/>
-            <a:ext cx="9875520" cy="548640"/>
-          </a:xfrm>
-          <a:prstGeom prst="rect">
-            <a:avLst/>
-          </a:prstGeom>
-          <a:noFill/>
-          <a:ln/>
-        </p:spPr>
-        <p:txBody>
-          <a:bodyPr wrap="square" rtlCol="0" anchor="ctr"/>
-          <a:lstStyle/>
-          <a:p>
-            <a:pPr indent="0" marL="0">
-              <a:buNone/>
-            </a:pPr>
-            <a:r>
-              <a:rPr lang="en-US" sz="1350" dirty="0">
-                <a:solidFill>
-                  <a:srgbClr val="1F2937"/>
                 </a:solidFill>
                 <a:latin typeface="Calibri" pitchFamily="34" charset="0"/>
                 <a:ea typeface="Calibri" pitchFamily="34" charset="-122"/>
                 <a:cs typeface="Calibri" pitchFamily="34" charset="-120"/>
               </a:rPr>
-              <a:t>Un optimizador combinatorio (QUBO) sobre relevancia-redundancia promete modelos más chicos. ¿Es solo una caja negra más opaca, o de verdad ayuda?</a:t>
+              <a:t>2 · Selección  </a:t>
+            </a:r>
+            <a:pPr indent="0" marL="0">
+              <a:buNone/>
+            </a:pPr>
+            <a:r>
+              <a:rPr lang="en-US" sz="1350" dirty="0">
+                <a:solidFill>
+                  <a:srgbClr val="1F2937"/>
+                </a:solidFill>
+                <a:latin typeface="Calibri" pitchFamily="34" charset="0"/>
+                <a:ea typeface="Calibri" pitchFamily="34" charset="-122"/>
+                <a:cs typeface="Calibri" pitchFamily="34" charset="-120"/>
+              </a:rPr>
+              <a:t>qué eligió cada método, matriz Q, curva QAOA</a:t>
             </a:r>
             <a:endParaRPr lang="en-US" sz="1350" dirty="0"/>
           </a:p>
@@ -4013,7 +4282,268 @@
       </p:sp>
       <p:sp>
         <p:nvSpPr>
-          <p:cNvPr id="16" name="Text 14"/>
+          <p:cNvPr id="8" name="Text 6"/>
+          <p:cNvSpPr/>
+          <p:nvPr/>
+        </p:nvSpPr>
+        <p:spPr>
+          <a:xfrm>
+            <a:off x="914400" y="3749040"/>
+            <a:ext cx="6400800" cy="384048"/>
+          </a:xfrm>
+          <a:prstGeom prst="rect">
+            <a:avLst/>
+          </a:prstGeom>
+          <a:noFill/>
+          <a:ln/>
+        </p:spPr>
+        <p:txBody>
+          <a:bodyPr wrap="square" rtlCol="0" anchor="ctr"/>
+          <a:lstStyle/>
+          <a:p>
+            <a:pPr indent="0" marL="0">
+              <a:buNone/>
+            </a:pPr>
+            <a:r>
+              <a:rPr lang="en-US" sz="1350" b="1" dirty="0">
+                <a:solidFill>
+                  <a:srgbClr val="1E2761"/>
+                </a:solidFill>
+                <a:latin typeface="Calibri" pitchFamily="34" charset="0"/>
+                <a:ea typeface="Calibri" pitchFamily="34" charset="-122"/>
+                <a:cs typeface="Calibri" pitchFamily="34" charset="-120"/>
+              </a:rPr>
+              <a:t>3 · Comparación  </a:t>
+            </a:r>
+            <a:pPr indent="0" marL="0">
+              <a:buNone/>
+            </a:pPr>
+            <a:r>
+              <a:rPr lang="en-US" sz="1350" dirty="0">
+                <a:solidFill>
+                  <a:srgbClr val="1F2937"/>
+                </a:solidFill>
+                <a:latin typeface="Calibri" pitchFamily="34" charset="0"/>
+                <a:ea typeface="Calibri" pitchFamily="34" charset="-122"/>
+                <a:cs typeface="Calibri" pitchFamily="34" charset="-120"/>
+              </a:rPr>
+              <a:t>ROC, KS, matrices de confusión</a:t>
+            </a:r>
+            <a:endParaRPr lang="en-US" sz="1350" dirty="0"/>
+          </a:p>
+        </p:txBody>
+      </p:sp>
+      <p:sp>
+        <p:nvSpPr>
+          <p:cNvPr id="9" name="Text 7"/>
+          <p:cNvSpPr/>
+          <p:nvPr/>
+        </p:nvSpPr>
+        <p:spPr>
+          <a:xfrm>
+            <a:off x="914400" y="4206240"/>
+            <a:ext cx="6400800" cy="384048"/>
+          </a:xfrm>
+          <a:prstGeom prst="rect">
+            <a:avLst/>
+          </a:prstGeom>
+          <a:noFill/>
+          <a:ln/>
+        </p:spPr>
+        <p:txBody>
+          <a:bodyPr wrap="square" rtlCol="0" anchor="ctr"/>
+          <a:lstStyle/>
+          <a:p>
+            <a:pPr indent="0" marL="0">
+              <a:buNone/>
+            </a:pPr>
+            <a:r>
+              <a:rPr lang="en-US" sz="1350" b="1" dirty="0">
+                <a:solidFill>
+                  <a:srgbClr val="1E2761"/>
+                </a:solidFill>
+                <a:latin typeface="Calibri" pitchFamily="34" charset="0"/>
+                <a:ea typeface="Calibri" pitchFamily="34" charset="-122"/>
+                <a:cs typeface="Calibri" pitchFamily="34" charset="-120"/>
+              </a:rPr>
+              <a:t>4 · Simulador  </a:t>
+            </a:r>
+            <a:pPr indent="0" marL="0">
+              <a:buNone/>
+            </a:pPr>
+            <a:r>
+              <a:rPr lang="en-US" sz="1350" dirty="0">
+                <a:solidFill>
+                  <a:srgbClr val="1F2937"/>
+                </a:solidFill>
+                <a:latin typeface="Calibri" pitchFamily="34" charset="0"/>
+                <a:ea typeface="Calibri" pitchFamily="34" charset="-122"/>
+                <a:cs typeface="Calibri" pitchFamily="34" charset="-120"/>
+              </a:rPr>
+              <a:t>probabilidad de crédito en vivo + 3 razones principales</a:t>
+            </a:r>
+            <a:endParaRPr lang="en-US" sz="1350" dirty="0"/>
+          </a:p>
+        </p:txBody>
+      </p:sp>
+      <p:sp>
+        <p:nvSpPr>
+          <p:cNvPr id="10" name="Text 8"/>
+          <p:cNvSpPr/>
+          <p:nvPr/>
+        </p:nvSpPr>
+        <p:spPr>
+          <a:xfrm>
+            <a:off x="914400" y="4663440"/>
+            <a:ext cx="6400800" cy="384048"/>
+          </a:xfrm>
+          <a:prstGeom prst="rect">
+            <a:avLst/>
+          </a:prstGeom>
+          <a:noFill/>
+          <a:ln/>
+        </p:spPr>
+        <p:txBody>
+          <a:bodyPr wrap="square" rtlCol="0" anchor="ctr"/>
+          <a:lstStyle/>
+          <a:p>
+            <a:pPr indent="0" marL="0">
+              <a:buNone/>
+            </a:pPr>
+            <a:r>
+              <a:rPr lang="en-US" sz="1350" b="1" dirty="0">
+                <a:solidFill>
+                  <a:srgbClr val="1E2761"/>
+                </a:solidFill>
+                <a:latin typeface="Calibri" pitchFamily="34" charset="0"/>
+                <a:ea typeface="Calibri" pitchFamily="34" charset="-122"/>
+                <a:cs typeface="Calibri" pitchFamily="34" charset="-120"/>
+              </a:rPr>
+              <a:t>5 · Estabilidad  </a:t>
+            </a:r>
+            <a:pPr indent="0" marL="0">
+              <a:buNone/>
+            </a:pPr>
+            <a:r>
+              <a:rPr lang="en-US" sz="1350" dirty="0">
+                <a:solidFill>
+                  <a:srgbClr val="1F2937"/>
+                </a:solidFill>
+                <a:latin typeface="Calibri" pitchFamily="34" charset="0"/>
+                <a:ea typeface="Calibri" pitchFamily="34" charset="-122"/>
+                <a:cs typeface="Calibri" pitchFamily="34" charset="-120"/>
+              </a:rPr>
+              <a:t>10 semillas, Friedman/Nemenyi, equidad y proxies</a:t>
+            </a:r>
+            <a:endParaRPr lang="en-US" sz="1350" dirty="0"/>
+          </a:p>
+        </p:txBody>
+      </p:sp>
+      <p:pic>
+        <p:nvPicPr>
+          <p:cNvPr id="11" name="Image 0" descr="preencoded.png">    </p:cNvPr>
+          <p:cNvPicPr>
+            <a:picLocks noChangeAspect="1"/>
+          </p:cNvPicPr>
+          <p:nvPr/>
+        </p:nvPicPr>
+        <p:blipFill>
+          <a:blip r:embed="rId1"/>
+          <a:stretch>
+            <a:fillRect/>
+          </a:stretch>
+        </p:blipFill>
+        <p:spPr>
+          <a:xfrm>
+            <a:off x="8229600" y="1920240"/>
+            <a:ext cx="2834640" cy="2834640"/>
+          </a:xfrm>
+          <a:prstGeom prst="rect">
+            <a:avLst/>
+          </a:prstGeom>
+        </p:spPr>
+      </p:pic>
+      <p:sp>
+        <p:nvSpPr>
+          <p:cNvPr id="12" name="Text 9"/>
+          <p:cNvSpPr/>
+          <p:nvPr/>
+        </p:nvSpPr>
+        <p:spPr>
+          <a:xfrm>
+            <a:off x="8229600" y="4846320"/>
+            <a:ext cx="2834640" cy="365760"/>
+          </a:xfrm>
+          <a:prstGeom prst="rect">
+            <a:avLst/>
+          </a:prstGeom>
+          <a:noFill/>
+          <a:ln/>
+        </p:spPr>
+        <p:txBody>
+          <a:bodyPr wrap="square" rtlCol="0" anchor="ctr"/>
+          <a:lstStyle/>
+          <a:p>
+            <a:pPr algn="ctr" indent="0" marL="0">
+              <a:buNone/>
+            </a:pPr>
+            <a:r>
+              <a:rPr lang="en-US" sz="1200" i="1" dirty="0">
+                <a:solidFill>
+                  <a:srgbClr val="6B7280"/>
+                </a:solidFill>
+                <a:latin typeface="Calibri" pitchFamily="34" charset="0"/>
+                <a:ea typeface="Calibri" pitchFamily="34" charset="-122"/>
+                <a:cs typeface="Calibri" pitchFamily="34" charset="-120"/>
+              </a:rPr>
+              <a:t>Escanea para abrir la app</a:t>
+            </a:r>
+            <a:endParaRPr lang="en-US" sz="1200" dirty="0"/>
+          </a:p>
+        </p:txBody>
+      </p:sp>
+      <p:sp>
+        <p:nvSpPr>
+          <p:cNvPr id="13" name="Text 10"/>
+          <p:cNvSpPr/>
+          <p:nvPr/>
+        </p:nvSpPr>
+        <p:spPr>
+          <a:xfrm>
+            <a:off x="640080" y="5806440"/>
+            <a:ext cx="7315200" cy="365760"/>
+          </a:xfrm>
+          <a:prstGeom prst="rect">
+            <a:avLst/>
+          </a:prstGeom>
+          <a:noFill/>
+          <a:ln/>
+        </p:spPr>
+        <p:txBody>
+          <a:bodyPr wrap="square" rtlCol="0" anchor="ctr"/>
+          <a:lstStyle/>
+          <a:p>
+            <a:pPr indent="0" marL="0">
+              <a:buNone/>
+            </a:pPr>
+            <a:r>
+              <a:rPr lang="en-US" sz="1200" dirty="0">
+                <a:solidFill>
+                  <a:srgbClr val="6B7280"/>
+                </a:solidFill>
+                <a:latin typeface="Calibri" pitchFamily="34" charset="0"/>
+                <a:ea typeface="Calibri" pitchFamily="34" charset="-122"/>
+                <a:cs typeface="Calibri" pitchFamily="34" charset="-120"/>
+              </a:rPr>
+              <a:t>Código fuente: github.com/0KevinB/tikee-quantum-scoring</a:t>
+            </a:r>
+            <a:endParaRPr lang="en-US" sz="1200" dirty="0"/>
+          </a:p>
+        </p:txBody>
+      </p:sp>
+      <p:sp>
+        <p:nvSpPr>
+          <p:cNvPr id="14" name="Text 11"/>
           <p:cNvSpPr/>
           <p:nvPr/>
         </p:nvSpPr>
@@ -4115,7 +4645,7 @@
                 <a:ea typeface="Calibri" pitchFamily="34" charset="-122"/>
                 <a:cs typeface="Calibri" pitchFamily="34" charset="-120"/>
               </a:rPr>
-              <a:t>EL ENFOQUE</a:t>
+              <a:t>EL PROBLEMA</a:t>
             </a:r>
             <a:endParaRPr lang="en-US" sz="1200" dirty="0"/>
           </a:p>
@@ -4154,7 +4684,7 @@
                 <a:ea typeface="Cambria" pitchFamily="34" charset="-122"/>
                 <a:cs typeface="Cambria" pitchFamily="34" charset="-120"/>
               </a:rPr>
-              <a:t>Cinco solucionadores, el mismo problema matemático</a:t>
+              <a:t>Menos variables no basta — hay que poder probarlo</a:t>
             </a:r>
             <a:endParaRPr lang="en-US" sz="3000" dirty="0"/>
           </a:p>
@@ -4162,38 +4692,136 @@
       </p:sp>
       <p:sp>
         <p:nvSpPr>
-          <p:cNvPr id="4" name="Text 2"/>
-          <p:cNvSpPr/>
-          <p:nvPr/>
-        </p:nvSpPr>
-        <p:spPr>
-          <a:xfrm>
-            <a:off x="548640" y="1508760"/>
-            <a:ext cx="10789920" cy="502920"/>
-          </a:xfrm>
-          <a:prstGeom prst="rect">
-            <a:avLst/>
-          </a:prstGeom>
-          <a:noFill/>
-          <a:ln/>
-        </p:spPr>
-        <p:txBody>
-          <a:bodyPr wrap="square" rtlCol="0" anchor="ctr"/>
-          <a:lstStyle/>
-          <a:p>
-            <a:pPr indent="0" marL="0">
-              <a:buNone/>
-            </a:pPr>
-            <a:r>
-              <a:rPr lang="en-US" sz="1350" i="1" dirty="0">
-                <a:solidFill>
-                  <a:srgbClr val="6B7280"/>
+          <p:cNvPr id="4" name="Shape 2"/>
+          <p:cNvSpPr/>
+          <p:nvPr/>
+        </p:nvSpPr>
+        <p:spPr>
+          <a:xfrm>
+            <a:off x="640080" y="1920240"/>
+            <a:ext cx="502920" cy="502920"/>
+          </a:xfrm>
+          <a:prstGeom prst="ellipse">
+            <a:avLst/>
+          </a:prstGeom>
+          <a:solidFill>
+            <a:srgbClr val="1E2761"/>
+          </a:solidFill>
+          <a:ln/>
+        </p:spPr>
+      </p:sp>
+      <p:sp>
+        <p:nvSpPr>
+          <p:cNvPr id="5" name="Text 3"/>
+          <p:cNvSpPr/>
+          <p:nvPr/>
+        </p:nvSpPr>
+        <p:spPr>
+          <a:xfrm>
+            <a:off x="640080" y="1920240"/>
+            <a:ext cx="502920" cy="502920"/>
+          </a:xfrm>
+          <a:prstGeom prst="rect">
+            <a:avLst/>
+          </a:prstGeom>
+          <a:noFill/>
+          <a:ln/>
+        </p:spPr>
+        <p:txBody>
+          <a:bodyPr wrap="square" rtlCol="0" anchor="ctr"/>
+          <a:lstStyle/>
+          <a:p>
+            <a:pPr algn="ctr" indent="0" marL="0">
+              <a:buNone/>
+            </a:pPr>
+            <a:r>
+              <a:rPr lang="en-US" sz="2000" b="1" dirty="0">
+                <a:solidFill>
+                  <a:srgbClr val="FFFFFF"/>
+                </a:solidFill>
+                <a:latin typeface="Cambria" pitchFamily="34" charset="0"/>
+                <a:ea typeface="Cambria" pitchFamily="34" charset="-122"/>
+                <a:cs typeface="Cambria" pitchFamily="34" charset="-120"/>
+              </a:rPr>
+              <a:t>1</a:t>
+            </a:r>
+            <a:endParaRPr lang="en-US" sz="2000" dirty="0"/>
+          </a:p>
+        </p:txBody>
+      </p:sp>
+      <p:sp>
+        <p:nvSpPr>
+          <p:cNvPr id="6" name="Text 4"/>
+          <p:cNvSpPr/>
+          <p:nvPr/>
+        </p:nvSpPr>
+        <p:spPr>
+          <a:xfrm>
+            <a:off x="1417320" y="1874520"/>
+            <a:ext cx="9875520" cy="365760"/>
+          </a:xfrm>
+          <a:prstGeom prst="rect">
+            <a:avLst/>
+          </a:prstGeom>
+          <a:noFill/>
+          <a:ln/>
+        </p:spPr>
+        <p:txBody>
+          <a:bodyPr wrap="square" rtlCol="0" anchor="ctr"/>
+          <a:lstStyle/>
+          <a:p>
+            <a:pPr indent="0" marL="0">
+              <a:buNone/>
+            </a:pPr>
+            <a:r>
+              <a:rPr lang="en-US" sz="1700" b="1" dirty="0">
+                <a:solidFill>
+                  <a:srgbClr val="1E2761"/>
+                </a:solidFill>
+                <a:latin typeface="Cambria" pitchFamily="34" charset="0"/>
+                <a:ea typeface="Cambria" pitchFamily="34" charset="-122"/>
+                <a:cs typeface="Cambria" pitchFamily="34" charset="-120"/>
+              </a:rPr>
+              <a:t>Obligación regulatoria</a:t>
+            </a:r>
+            <a:endParaRPr lang="en-US" sz="1700" dirty="0"/>
+          </a:p>
+        </p:txBody>
+      </p:sp>
+      <p:sp>
+        <p:nvSpPr>
+          <p:cNvPr id="7" name="Text 5"/>
+          <p:cNvSpPr/>
+          <p:nvPr/>
+        </p:nvSpPr>
+        <p:spPr>
+          <a:xfrm>
+            <a:off x="1417320" y="2258568"/>
+            <a:ext cx="9875520" cy="548640"/>
+          </a:xfrm>
+          <a:prstGeom prst="rect">
+            <a:avLst/>
+          </a:prstGeom>
+          <a:noFill/>
+          <a:ln/>
+        </p:spPr>
+        <p:txBody>
+          <a:bodyPr wrap="square" rtlCol="0" anchor="ctr"/>
+          <a:lstStyle/>
+          <a:p>
+            <a:pPr indent="0" marL="0">
+              <a:buNone/>
+            </a:pPr>
+            <a:r>
+              <a:rPr lang="en-US" sz="1350" dirty="0">
+                <a:solidFill>
+                  <a:srgbClr val="1F2937"/>
                 </a:solidFill>
                 <a:latin typeface="Calibri" pitchFamily="34" charset="0"/>
                 <a:ea typeface="Calibri" pitchFamily="34" charset="-122"/>
                 <a:cs typeface="Calibri" pitchFamily="34" charset="-120"/>
               </a:rPr>
-              <a:t>Para separar tres preguntas que la literatura suele mezclar: ¿la formulación es buena? ¿el heurístico aporta algo? ¿el paradigma cuántico aporta algo?</a:t>
+              <a:t>Una cooperativa SEPS debe poder sustentar ante el socio y el supervisor por qué se negó un crédito.</a:t>
             </a:r>
             <a:endParaRPr lang="en-US" sz="1350" dirty="0"/>
           </a:p>
@@ -4201,43 +4829,14 @@
       </p:sp>
       <p:sp>
         <p:nvSpPr>
-          <p:cNvPr id="5" name="Shape 3"/>
-          <p:cNvSpPr/>
-          <p:nvPr/>
-        </p:nvSpPr>
-        <p:spPr>
-          <a:xfrm>
-            <a:off x="640080" y="2331720"/>
-            <a:ext cx="1965960" cy="1828800"/>
-          </a:xfrm>
-          <a:prstGeom prst="roundRect">
-            <a:avLst>
-              <a:gd name="adj" fmla="val 6000"/>
-            </a:avLst>
-          </a:prstGeom>
-          <a:solidFill>
-            <a:srgbClr val="F3F5FC"/>
-          </a:solidFill>
-          <a:ln/>
-          <a:effectLst>
-            <a:outerShdw sx="100000" sy="100000" kx="0" ky="0" algn="bl" rotWithShape="0" blurRad="76200" dist="25400" dir="5400000">
-              <a:srgbClr val="8891B0">
-                <a:alpha val="25000"/>
-              </a:srgbClr>
-            </a:outerShdw>
-          </a:effectLst>
-        </p:spPr>
-      </p:sp>
-      <p:sp>
-        <p:nvSpPr>
-          <p:cNvPr id="6" name="Shape 4"/>
-          <p:cNvSpPr/>
-          <p:nvPr/>
-        </p:nvSpPr>
-        <p:spPr>
-          <a:xfrm>
-            <a:off x="1303020" y="2606040"/>
-            <a:ext cx="640080" cy="640080"/>
+          <p:cNvPr id="8" name="Shape 6"/>
+          <p:cNvSpPr/>
+          <p:nvPr/>
+        </p:nvSpPr>
+        <p:spPr>
+          <a:xfrm>
+            <a:off x="640080" y="3291840"/>
+            <a:ext cx="502920" cy="502920"/>
           </a:xfrm>
           <a:prstGeom prst="ellipse">
             <a:avLst/>
@@ -4250,14 +4849,14 @@
       </p:sp>
       <p:sp>
         <p:nvSpPr>
-          <p:cNvPr id="7" name="Text 5"/>
-          <p:cNvSpPr/>
-          <p:nvPr/>
-        </p:nvSpPr>
-        <p:spPr>
-          <a:xfrm>
-            <a:off x="1303020" y="2606040"/>
-            <a:ext cx="640080" cy="640080"/>
+          <p:cNvPr id="9" name="Text 7"/>
+          <p:cNvSpPr/>
+          <p:nvPr/>
+        </p:nvSpPr>
+        <p:spPr>
+          <a:xfrm>
+            <a:off x="640080" y="3291840"/>
+            <a:ext cx="502920" cy="502920"/>
           </a:xfrm>
           <a:prstGeom prst="rect">
             <a:avLst/>
@@ -4281,7 +4880,7 @@
                 <a:ea typeface="Cambria" pitchFamily="34" charset="-122"/>
                 <a:cs typeface="Cambria" pitchFamily="34" charset="-120"/>
               </a:rPr>
-              <a:t>1</a:t>
+              <a:t>2</a:t>
             </a:r>
             <a:endParaRPr lang="en-US" sz="2000" dirty="0"/>
           </a:p>
@@ -4289,30 +4888,30 @@
       </p:sp>
       <p:sp>
         <p:nvSpPr>
-          <p:cNvPr id="8" name="Text 6"/>
-          <p:cNvSpPr/>
-          <p:nvPr/>
-        </p:nvSpPr>
-        <p:spPr>
-          <a:xfrm>
-            <a:off x="731520" y="3291840"/>
-            <a:ext cx="1783080" cy="548640"/>
-          </a:xfrm>
-          <a:prstGeom prst="rect">
-            <a:avLst/>
-          </a:prstGeom>
-          <a:noFill/>
-          <a:ln/>
-        </p:spPr>
-        <p:txBody>
-          <a:bodyPr wrap="square" rtlCol="0" anchor="ctr"/>
-          <a:lstStyle/>
-          <a:p>
-            <a:pPr algn="ctr" indent="0" marL="0">
-              <a:buNone/>
-            </a:pPr>
-            <a:r>
-              <a:rPr lang="en-US" sz="1300" b="1" dirty="0">
+          <p:cNvPr id="10" name="Text 8"/>
+          <p:cNvSpPr/>
+          <p:nvPr/>
+        </p:nvSpPr>
+        <p:spPr>
+          <a:xfrm>
+            <a:off x="1417320" y="3246120"/>
+            <a:ext cx="9875520" cy="365760"/>
+          </a:xfrm>
+          <a:prstGeom prst="rect">
+            <a:avLst/>
+          </a:prstGeom>
+          <a:noFill/>
+          <a:ln/>
+        </p:spPr>
+        <p:txBody>
+          <a:bodyPr wrap="square" rtlCol="0" anchor="ctr"/>
+          <a:lstStyle/>
+          <a:p>
+            <a:pPr indent="0" marL="0">
+              <a:buNone/>
+            </a:pPr>
+            <a:r>
+              <a:rPr lang="en-US" sz="1700" b="1" dirty="0">
                 <a:solidFill>
                   <a:srgbClr val="1E2761"/>
                 </a:solidFill>
@@ -4320,859 +4919,191 @@
                 <a:ea typeface="Cambria" pitchFamily="34" charset="-122"/>
                 <a:cs typeface="Cambria" pitchFamily="34" charset="-120"/>
               </a:rPr>
-              <a:t>Recocido</a:t>
-            </a:r>
-            <a:endParaRPr lang="en-US" sz="1300" dirty="0"/>
-          </a:p>
+              <a:t>El punto ciego de hoy</a:t>
+            </a:r>
+            <a:endParaRPr lang="en-US" sz="1700" dirty="0"/>
+          </a:p>
+        </p:txBody>
+      </p:sp>
+      <p:sp>
+        <p:nvSpPr>
+          <p:cNvPr id="11" name="Text 9"/>
+          <p:cNvSpPr/>
+          <p:nvPr/>
+        </p:nvSpPr>
+        <p:spPr>
+          <a:xfrm>
+            <a:off x="1417320" y="3630168"/>
+            <a:ext cx="9875520" cy="548640"/>
+          </a:xfrm>
+          <a:prstGeom prst="rect">
+            <a:avLst/>
+          </a:prstGeom>
+          <a:noFill/>
+          <a:ln/>
+        </p:spPr>
+        <p:txBody>
+          <a:bodyPr wrap="square" rtlCol="0" anchor="ctr"/>
+          <a:lstStyle/>
+          <a:p>
+            <a:pPr indent="0" marL="0">
+              <a:buNone/>
+            </a:pPr>
+            <a:r>
+              <a:rPr lang="en-US" sz="1350" dirty="0">
+                <a:solidFill>
+                  <a:srgbClr val="1F2937"/>
+                </a:solidFill>
+                <a:latin typeface="Calibri" pitchFamily="34" charset="0"/>
+                <a:ea typeface="Calibri" pitchFamily="34" charset="-122"/>
+                <a:cs typeface="Calibri" pitchFamily="34" charset="-120"/>
+              </a:rPr>
+              <a:t>LASSO y stepwise seleccionan variables, pero ninguno mide cuánto sesgo indirecto hacia sexo, zona o provincia sobrevive en el modelo final.</a:t>
+            </a:r>
+            <a:endParaRPr lang="en-US" sz="1350" dirty="0"/>
+          </a:p>
+        </p:txBody>
+      </p:sp>
+      <p:sp>
+        <p:nvSpPr>
+          <p:cNvPr id="12" name="Shape 10"/>
+          <p:cNvSpPr/>
+          <p:nvPr/>
+        </p:nvSpPr>
+        <p:spPr>
+          <a:xfrm>
+            <a:off x="640080" y="4663440"/>
+            <a:ext cx="502920" cy="502920"/>
+          </a:xfrm>
+          <a:prstGeom prst="ellipse">
+            <a:avLst/>
+          </a:prstGeom>
+          <a:solidFill>
+            <a:srgbClr val="1E2761"/>
+          </a:solidFill>
+          <a:ln/>
+        </p:spPr>
+      </p:sp>
+      <p:sp>
+        <p:nvSpPr>
+          <p:cNvPr id="13" name="Text 11"/>
+          <p:cNvSpPr/>
+          <p:nvPr/>
+        </p:nvSpPr>
+        <p:spPr>
+          <a:xfrm>
+            <a:off x="640080" y="4663440"/>
+            <a:ext cx="502920" cy="502920"/>
+          </a:xfrm>
+          <a:prstGeom prst="rect">
+            <a:avLst/>
+          </a:prstGeom>
+          <a:noFill/>
+          <a:ln/>
+        </p:spPr>
+        <p:txBody>
+          <a:bodyPr wrap="square" rtlCol="0" anchor="ctr"/>
+          <a:lstStyle/>
           <a:p>
             <a:pPr algn="ctr" indent="0" marL="0">
               <a:buNone/>
             </a:pPr>
             <a:r>
-              <a:rPr lang="en-US" sz="1300" b="1" dirty="0">
-                <a:solidFill>
-                  <a:srgbClr val="1E2761"/>
+              <a:rPr lang="en-US" sz="2000" b="1" dirty="0">
+                <a:solidFill>
+                  <a:srgbClr val="FFFFFF"/>
                 </a:solidFill>
                 <a:latin typeface="Cambria" pitchFamily="34" charset="0"/>
                 <a:ea typeface="Cambria" pitchFamily="34" charset="-122"/>
                 <a:cs typeface="Cambria" pitchFamily="34" charset="-120"/>
               </a:rPr>
-              <a:t>simulado</a:t>
-            </a:r>
-            <a:endParaRPr lang="en-US" sz="1300" dirty="0"/>
-          </a:p>
-        </p:txBody>
-      </p:sp>
-      <p:sp>
-        <p:nvSpPr>
-          <p:cNvPr id="9" name="Text 7"/>
-          <p:cNvSpPr/>
-          <p:nvPr/>
-        </p:nvSpPr>
-        <p:spPr>
-          <a:xfrm>
-            <a:off x="731520" y="3794760"/>
-            <a:ext cx="1783080" cy="320040"/>
-          </a:xfrm>
-          <a:prstGeom prst="rect">
-            <a:avLst/>
-          </a:prstGeom>
-          <a:noFill/>
-          <a:ln/>
-        </p:spPr>
-        <p:txBody>
-          <a:bodyPr wrap="square" rtlCol="0" anchor="ctr"/>
-          <a:lstStyle/>
-          <a:p>
-            <a:pPr algn="ctr" indent="0" marL="0">
-              <a:buNone/>
-            </a:pPr>
-            <a:r>
-              <a:rPr lang="en-US" sz="1000" dirty="0">
-                <a:solidFill>
-                  <a:srgbClr val="6B7280"/>
+              <a:t>3</a:t>
+            </a:r>
+            <a:endParaRPr lang="en-US" sz="2000" dirty="0"/>
+          </a:p>
+        </p:txBody>
+      </p:sp>
+      <p:sp>
+        <p:nvSpPr>
+          <p:cNvPr id="14" name="Text 12"/>
+          <p:cNvSpPr/>
+          <p:nvPr/>
+        </p:nvSpPr>
+        <p:spPr>
+          <a:xfrm>
+            <a:off x="1417320" y="4617720"/>
+            <a:ext cx="9875520" cy="365760"/>
+          </a:xfrm>
+          <a:prstGeom prst="rect">
+            <a:avLst/>
+          </a:prstGeom>
+          <a:noFill/>
+          <a:ln/>
+        </p:spPr>
+        <p:txBody>
+          <a:bodyPr wrap="square" rtlCol="0" anchor="ctr"/>
+          <a:lstStyle/>
+          <a:p>
+            <a:pPr indent="0" marL="0">
+              <a:buNone/>
+            </a:pPr>
+            <a:r>
+              <a:rPr lang="en-US" sz="1700" b="1" dirty="0">
+                <a:solidFill>
+                  <a:srgbClr val="1E2761"/>
+                </a:solidFill>
+                <a:latin typeface="Cambria" pitchFamily="34" charset="0"/>
+                <a:ea typeface="Cambria" pitchFamily="34" charset="-122"/>
+                <a:cs typeface="Cambria" pitchFamily="34" charset="-120"/>
+              </a:rPr>
+              <a:t>La promesa a probar</a:t>
+            </a:r>
+            <a:endParaRPr lang="en-US" sz="1700" dirty="0"/>
+          </a:p>
+        </p:txBody>
+      </p:sp>
+      <p:sp>
+        <p:nvSpPr>
+          <p:cNvPr id="15" name="Text 13"/>
+          <p:cNvSpPr/>
+          <p:nvPr/>
+        </p:nvSpPr>
+        <p:spPr>
+          <a:xfrm>
+            <a:off x="1417320" y="5001768"/>
+            <a:ext cx="9875520" cy="548640"/>
+          </a:xfrm>
+          <a:prstGeom prst="rect">
+            <a:avLst/>
+          </a:prstGeom>
+          <a:noFill/>
+          <a:ln/>
+        </p:spPr>
+        <p:txBody>
+          <a:bodyPr wrap="square" rtlCol="0" anchor="ctr"/>
+          <a:lstStyle/>
+          <a:p>
+            <a:pPr indent="0" marL="0">
+              <a:buNone/>
+            </a:pPr>
+            <a:r>
+              <a:rPr lang="en-US" sz="1350" dirty="0">
+                <a:solidFill>
+                  <a:srgbClr val="1F2937"/>
                 </a:solidFill>
                 <a:latin typeface="Calibri" pitchFamily="34" charset="0"/>
                 <a:ea typeface="Calibri" pitchFamily="34" charset="-122"/>
                 <a:cs typeface="Calibri" pitchFamily="34" charset="-120"/>
               </a:rPr>
-              <a:t>Heurístico rápido</a:t>
-            </a:r>
-            <a:endParaRPr lang="en-US" sz="1000" dirty="0"/>
-          </a:p>
-        </p:txBody>
-      </p:sp>
-      <p:sp>
-        <p:nvSpPr>
-          <p:cNvPr id="10" name="Shape 8"/>
-          <p:cNvSpPr/>
-          <p:nvPr/>
-        </p:nvSpPr>
-        <p:spPr>
-          <a:xfrm>
-            <a:off x="2862072" y="2331720"/>
-            <a:ext cx="1965960" cy="1828800"/>
-          </a:xfrm>
-          <a:prstGeom prst="roundRect">
-            <a:avLst>
-              <a:gd name="adj" fmla="val 6000"/>
-            </a:avLst>
-          </a:prstGeom>
-          <a:solidFill>
-            <a:srgbClr val="F3F5FC"/>
-          </a:solidFill>
-          <a:ln/>
-          <a:effectLst>
-            <a:outerShdw sx="100000" sy="100000" kx="0" ky="0" algn="bl" rotWithShape="0" blurRad="76200" dist="25400" dir="5400000">
-              <a:srgbClr val="8891B0">
-                <a:alpha val="25000"/>
-              </a:srgbClr>
-            </a:outerShdw>
-          </a:effectLst>
-        </p:spPr>
-      </p:sp>
-      <p:sp>
-        <p:nvSpPr>
-          <p:cNvPr id="11" name="Shape 9"/>
-          <p:cNvSpPr/>
-          <p:nvPr/>
-        </p:nvSpPr>
-        <p:spPr>
-          <a:xfrm>
-            <a:off x="3525012" y="2606040"/>
-            <a:ext cx="640080" cy="640080"/>
-          </a:xfrm>
-          <a:prstGeom prst="ellipse">
-            <a:avLst/>
-          </a:prstGeom>
-          <a:solidFill>
-            <a:srgbClr val="1E2761"/>
-          </a:solidFill>
-          <a:ln/>
-        </p:spPr>
-      </p:sp>
-      <p:sp>
-        <p:nvSpPr>
-          <p:cNvPr id="12" name="Text 10"/>
-          <p:cNvSpPr/>
-          <p:nvPr/>
-        </p:nvSpPr>
-        <p:spPr>
-          <a:xfrm>
-            <a:off x="3525012" y="2606040"/>
-            <a:ext cx="640080" cy="640080"/>
-          </a:xfrm>
-          <a:prstGeom prst="rect">
-            <a:avLst/>
-          </a:prstGeom>
-          <a:noFill/>
-          <a:ln/>
-        </p:spPr>
-        <p:txBody>
-          <a:bodyPr wrap="square" rtlCol="0" anchor="ctr"/>
-          <a:lstStyle/>
-          <a:p>
-            <a:pPr algn="ctr" indent="0" marL="0">
-              <a:buNone/>
-            </a:pPr>
-            <a:r>
-              <a:rPr lang="en-US" sz="2000" b="1" dirty="0">
-                <a:solidFill>
-                  <a:srgbClr val="FFFFFF"/>
-                </a:solidFill>
-                <a:latin typeface="Cambria" pitchFamily="34" charset="0"/>
-                <a:ea typeface="Cambria" pitchFamily="34" charset="-122"/>
-                <a:cs typeface="Cambria" pitchFamily="34" charset="-120"/>
-              </a:rPr>
-              <a:t>2</a:t>
-            </a:r>
-            <a:endParaRPr lang="en-US" sz="2000" dirty="0"/>
-          </a:p>
-        </p:txBody>
-      </p:sp>
-      <p:sp>
-        <p:nvSpPr>
-          <p:cNvPr id="13" name="Text 11"/>
-          <p:cNvSpPr/>
-          <p:nvPr/>
-        </p:nvSpPr>
-        <p:spPr>
-          <a:xfrm>
-            <a:off x="2953512" y="3291840"/>
-            <a:ext cx="1783080" cy="548640"/>
-          </a:xfrm>
-          <a:prstGeom prst="rect">
-            <a:avLst/>
-          </a:prstGeom>
-          <a:noFill/>
-          <a:ln/>
-        </p:spPr>
-        <p:txBody>
-          <a:bodyPr wrap="square" rtlCol="0" anchor="ctr"/>
-          <a:lstStyle/>
-          <a:p>
-            <a:pPr algn="ctr" indent="0" marL="0">
-              <a:buNone/>
-            </a:pPr>
-            <a:r>
-              <a:rPr lang="en-US" sz="1300" b="1" dirty="0">
-                <a:solidFill>
-                  <a:srgbClr val="1E2761"/>
-                </a:solidFill>
-                <a:latin typeface="Cambria" pitchFamily="34" charset="0"/>
-                <a:ea typeface="Cambria" pitchFamily="34" charset="-122"/>
-                <a:cs typeface="Cambria" pitchFamily="34" charset="-120"/>
-              </a:rPr>
-              <a:t>Enumeración</a:t>
-            </a:r>
-            <a:endParaRPr lang="en-US" sz="1300" dirty="0"/>
-          </a:p>
-          <a:p>
-            <a:pPr algn="ctr" indent="0" marL="0">
-              <a:buNone/>
-            </a:pPr>
-            <a:r>
-              <a:rPr lang="en-US" sz="1300" b="1" dirty="0">
-                <a:solidFill>
-                  <a:srgbClr val="1E2761"/>
-                </a:solidFill>
-                <a:latin typeface="Cambria" pitchFamily="34" charset="0"/>
-                <a:ea typeface="Cambria" pitchFamily="34" charset="-122"/>
-                <a:cs typeface="Cambria" pitchFamily="34" charset="-120"/>
-              </a:rPr>
-              <a:t>exacta</a:t>
-            </a:r>
-            <a:endParaRPr lang="en-US" sz="1300" dirty="0"/>
-          </a:p>
-        </p:txBody>
-      </p:sp>
-      <p:sp>
-        <p:nvSpPr>
-          <p:cNvPr id="14" name="Text 12"/>
-          <p:cNvSpPr/>
-          <p:nvPr/>
-        </p:nvSpPr>
-        <p:spPr>
-          <a:xfrm>
-            <a:off x="2953512" y="3794760"/>
-            <a:ext cx="1783080" cy="320040"/>
-          </a:xfrm>
-          <a:prstGeom prst="rect">
-            <a:avLst/>
-          </a:prstGeom>
-          <a:noFill/>
-          <a:ln/>
-        </p:spPr>
-        <p:txBody>
-          <a:bodyPr wrap="square" rtlCol="0" anchor="ctr"/>
-          <a:lstStyle/>
-          <a:p>
-            <a:pPr algn="ctr" indent="0" marL="0">
-              <a:buNone/>
-            </a:pPr>
-            <a:r>
-              <a:rPr lang="en-US" sz="1000" dirty="0">
-                <a:solidFill>
-                  <a:srgbClr val="6B7280"/>
-                </a:solidFill>
-                <a:latin typeface="Calibri" pitchFamily="34" charset="0"/>
-                <a:ea typeface="Calibri" pitchFamily="34" charset="-122"/>
-                <a:cs typeface="Calibri" pitchFamily="34" charset="-120"/>
-              </a:rPr>
-              <a:t>Óptimo garantizado</a:t>
-            </a:r>
-            <a:endParaRPr lang="en-US" sz="1000" dirty="0"/>
-          </a:p>
-        </p:txBody>
-      </p:sp>
-      <p:sp>
-        <p:nvSpPr>
-          <p:cNvPr id="15" name="Shape 13"/>
-          <p:cNvSpPr/>
-          <p:nvPr/>
-        </p:nvSpPr>
-        <p:spPr>
-          <a:xfrm>
-            <a:off x="5084064" y="2331720"/>
-            <a:ext cx="1965960" cy="1828800"/>
-          </a:xfrm>
-          <a:prstGeom prst="roundRect">
-            <a:avLst>
-              <a:gd name="adj" fmla="val 6000"/>
-            </a:avLst>
-          </a:prstGeom>
-          <a:solidFill>
-            <a:srgbClr val="F3F5FC"/>
-          </a:solidFill>
-          <a:ln/>
-          <a:effectLst>
-            <a:outerShdw sx="100000" sy="100000" kx="0" ky="0" algn="bl" rotWithShape="0" blurRad="76200" dist="25400" dir="5400000">
-              <a:srgbClr val="8891B0">
-                <a:alpha val="25000"/>
-              </a:srgbClr>
-            </a:outerShdw>
-          </a:effectLst>
-        </p:spPr>
-      </p:sp>
-      <p:sp>
-        <p:nvSpPr>
-          <p:cNvPr id="16" name="Shape 14"/>
-          <p:cNvSpPr/>
-          <p:nvPr/>
-        </p:nvSpPr>
-        <p:spPr>
-          <a:xfrm>
-            <a:off x="5747004" y="2606040"/>
-            <a:ext cx="640080" cy="640080"/>
-          </a:xfrm>
-          <a:prstGeom prst="ellipse">
-            <a:avLst/>
-          </a:prstGeom>
-          <a:solidFill>
-            <a:srgbClr val="B23A48"/>
-          </a:solidFill>
-          <a:ln/>
-        </p:spPr>
-      </p:sp>
-      <p:sp>
-        <p:nvSpPr>
-          <p:cNvPr id="17" name="Text 15"/>
-          <p:cNvSpPr/>
-          <p:nvPr/>
-        </p:nvSpPr>
-        <p:spPr>
-          <a:xfrm>
-            <a:off x="5747004" y="2606040"/>
-            <a:ext cx="640080" cy="640080"/>
-          </a:xfrm>
-          <a:prstGeom prst="rect">
-            <a:avLst/>
-          </a:prstGeom>
-          <a:noFill/>
-          <a:ln/>
-        </p:spPr>
-        <p:txBody>
-          <a:bodyPr wrap="square" rtlCol="0" anchor="ctr"/>
-          <a:lstStyle/>
-          <a:p>
-            <a:pPr algn="ctr" indent="0" marL="0">
-              <a:buNone/>
-            </a:pPr>
-            <a:r>
-              <a:rPr lang="en-US" sz="2000" b="1" dirty="0">
-                <a:solidFill>
-                  <a:srgbClr val="FFFFFF"/>
-                </a:solidFill>
-                <a:latin typeface="Cambria" pitchFamily="34" charset="0"/>
-                <a:ea typeface="Cambria" pitchFamily="34" charset="-122"/>
-                <a:cs typeface="Cambria" pitchFamily="34" charset="-120"/>
-              </a:rPr>
-              <a:t>3</a:t>
-            </a:r>
-            <a:endParaRPr lang="en-US" sz="2000" dirty="0"/>
-          </a:p>
-        </p:txBody>
-      </p:sp>
-      <p:sp>
-        <p:nvSpPr>
-          <p:cNvPr id="18" name="Text 16"/>
-          <p:cNvSpPr/>
-          <p:nvPr/>
-        </p:nvSpPr>
-        <p:spPr>
-          <a:xfrm>
-            <a:off x="5175504" y="3291840"/>
-            <a:ext cx="1783080" cy="548640"/>
-          </a:xfrm>
-          <a:prstGeom prst="rect">
-            <a:avLst/>
-          </a:prstGeom>
-          <a:noFill/>
-          <a:ln/>
-        </p:spPr>
-        <p:txBody>
-          <a:bodyPr wrap="square" rtlCol="0" anchor="ctr"/>
-          <a:lstStyle/>
-          <a:p>
-            <a:pPr algn="ctr" indent="0" marL="0">
-              <a:buNone/>
-            </a:pPr>
-            <a:r>
-              <a:rPr lang="en-US" sz="1300" b="1" dirty="0">
-                <a:solidFill>
-                  <a:srgbClr val="1E2761"/>
-                </a:solidFill>
-                <a:latin typeface="Cambria" pitchFamily="34" charset="0"/>
-                <a:ea typeface="Cambria" pitchFamily="34" charset="-122"/>
-                <a:cs typeface="Cambria" pitchFamily="34" charset="-120"/>
-              </a:rPr>
-              <a:t>MILP +</a:t>
-            </a:r>
-            <a:endParaRPr lang="en-US" sz="1300" dirty="0"/>
-          </a:p>
-          <a:p>
-            <a:pPr algn="ctr" indent="0" marL="0">
-              <a:buNone/>
-            </a:pPr>
-            <a:r>
-              <a:rPr lang="en-US" sz="1300" b="1" dirty="0">
-                <a:solidFill>
-                  <a:srgbClr val="1E2761"/>
-                </a:solidFill>
-                <a:latin typeface="Cambria" pitchFamily="34" charset="0"/>
-                <a:ea typeface="Cambria" pitchFamily="34" charset="-122"/>
-                <a:cs typeface="Cambria" pitchFamily="34" charset="-120"/>
-              </a:rPr>
-              <a:t>Glover</a:t>
-            </a:r>
-            <a:endParaRPr lang="en-US" sz="1300" dirty="0"/>
-          </a:p>
-        </p:txBody>
-      </p:sp>
-      <p:sp>
-        <p:nvSpPr>
-          <p:cNvPr id="19" name="Text 17"/>
-          <p:cNvSpPr/>
-          <p:nvPr/>
-        </p:nvSpPr>
-        <p:spPr>
-          <a:xfrm>
-            <a:off x="5175504" y="3794760"/>
-            <a:ext cx="1783080" cy="320040"/>
-          </a:xfrm>
-          <a:prstGeom prst="rect">
-            <a:avLst/>
-          </a:prstGeom>
-          <a:noFill/>
-          <a:ln/>
-        </p:spPr>
-        <p:txBody>
-          <a:bodyPr wrap="square" rtlCol="0" anchor="ctr"/>
-          <a:lstStyle/>
-          <a:p>
-            <a:pPr algn="ctr" indent="0" marL="0">
-              <a:buNone/>
-            </a:pPr>
-            <a:r>
-              <a:rPr lang="en-US" sz="1000" dirty="0">
-                <a:solidFill>
-                  <a:srgbClr val="6B7280"/>
-                </a:solidFill>
-                <a:latin typeface="Calibri" pitchFamily="34" charset="0"/>
-                <a:ea typeface="Calibri" pitchFamily="34" charset="-122"/>
-                <a:cs typeface="Calibri" pitchFamily="34" charset="-120"/>
-              </a:rPr>
-              <a:t>Óptimo certificado</a:t>
-            </a:r>
-            <a:endParaRPr lang="en-US" sz="1000" dirty="0"/>
-          </a:p>
-        </p:txBody>
-      </p:sp>
-      <p:sp>
-        <p:nvSpPr>
-          <p:cNvPr id="20" name="Shape 18"/>
-          <p:cNvSpPr/>
-          <p:nvPr/>
-        </p:nvSpPr>
-        <p:spPr>
-          <a:xfrm>
-            <a:off x="7306056" y="2331720"/>
-            <a:ext cx="1965960" cy="1828800"/>
-          </a:xfrm>
-          <a:prstGeom prst="roundRect">
-            <a:avLst>
-              <a:gd name="adj" fmla="val 6000"/>
-            </a:avLst>
-          </a:prstGeom>
-          <a:solidFill>
-            <a:srgbClr val="F3F5FC"/>
-          </a:solidFill>
-          <a:ln/>
-          <a:effectLst>
-            <a:outerShdw sx="100000" sy="100000" kx="0" ky="0" algn="bl" rotWithShape="0" blurRad="76200" dist="25400" dir="5400000">
-              <a:srgbClr val="8891B0">
-                <a:alpha val="25000"/>
-              </a:srgbClr>
-            </a:outerShdw>
-          </a:effectLst>
-        </p:spPr>
-      </p:sp>
-      <p:sp>
-        <p:nvSpPr>
-          <p:cNvPr id="21" name="Shape 19"/>
-          <p:cNvSpPr/>
-          <p:nvPr/>
-        </p:nvSpPr>
-        <p:spPr>
-          <a:xfrm>
-            <a:off x="7968996" y="2606040"/>
-            <a:ext cx="640080" cy="640080"/>
-          </a:xfrm>
-          <a:prstGeom prst="ellipse">
-            <a:avLst/>
-          </a:prstGeom>
-          <a:solidFill>
-            <a:srgbClr val="1E2761"/>
-          </a:solidFill>
-          <a:ln/>
-        </p:spPr>
-      </p:sp>
-      <p:sp>
-        <p:nvSpPr>
-          <p:cNvPr id="22" name="Text 20"/>
-          <p:cNvSpPr/>
-          <p:nvPr/>
-        </p:nvSpPr>
-        <p:spPr>
-          <a:xfrm>
-            <a:off x="7968996" y="2606040"/>
-            <a:ext cx="640080" cy="640080"/>
-          </a:xfrm>
-          <a:prstGeom prst="rect">
-            <a:avLst/>
-          </a:prstGeom>
-          <a:noFill/>
-          <a:ln/>
-        </p:spPr>
-        <p:txBody>
-          <a:bodyPr wrap="square" rtlCol="0" anchor="ctr"/>
-          <a:lstStyle/>
-          <a:p>
-            <a:pPr algn="ctr" indent="0" marL="0">
-              <a:buNone/>
-            </a:pPr>
-            <a:r>
-              <a:rPr lang="en-US" sz="2000" b="1" dirty="0">
-                <a:solidFill>
-                  <a:srgbClr val="FFFFFF"/>
-                </a:solidFill>
-                <a:latin typeface="Cambria" pitchFamily="34" charset="0"/>
-                <a:ea typeface="Cambria" pitchFamily="34" charset="-122"/>
-                <a:cs typeface="Cambria" pitchFamily="34" charset="-120"/>
-              </a:rPr>
-              <a:t>4</a:t>
-            </a:r>
-            <a:endParaRPr lang="en-US" sz="2000" dirty="0"/>
-          </a:p>
-        </p:txBody>
-      </p:sp>
-      <p:sp>
-        <p:nvSpPr>
-          <p:cNvPr id="23" name="Text 21"/>
-          <p:cNvSpPr/>
-          <p:nvPr/>
-        </p:nvSpPr>
-        <p:spPr>
-          <a:xfrm>
-            <a:off x="7397496" y="3291840"/>
-            <a:ext cx="1783080" cy="548640"/>
-          </a:xfrm>
-          <a:prstGeom prst="rect">
-            <a:avLst/>
-          </a:prstGeom>
-          <a:noFill/>
-          <a:ln/>
-        </p:spPr>
-        <p:txBody>
-          <a:bodyPr wrap="square" rtlCol="0" anchor="ctr"/>
-          <a:lstStyle/>
-          <a:p>
-            <a:pPr algn="ctr" indent="0" marL="0">
-              <a:buNone/>
-            </a:pPr>
-            <a:r>
-              <a:rPr lang="en-US" sz="1300" b="1" dirty="0">
-                <a:solidFill>
-                  <a:srgbClr val="1E2761"/>
-                </a:solidFill>
-                <a:latin typeface="Cambria" pitchFamily="34" charset="0"/>
-                <a:ea typeface="Cambria" pitchFamily="34" charset="-122"/>
-                <a:cs typeface="Cambria" pitchFamily="34" charset="-120"/>
-              </a:rPr>
-              <a:t>Búsqueda</a:t>
-            </a:r>
-            <a:endParaRPr lang="en-US" sz="1300" dirty="0"/>
-          </a:p>
-          <a:p>
-            <a:pPr algn="ctr" indent="0" marL="0">
-              <a:buNone/>
-            </a:pPr>
-            <a:r>
-              <a:rPr lang="en-US" sz="1300" b="1" dirty="0">
-                <a:solidFill>
-                  <a:srgbClr val="1E2761"/>
-                </a:solidFill>
-                <a:latin typeface="Cambria" pitchFamily="34" charset="0"/>
-                <a:ea typeface="Cambria" pitchFamily="34" charset="-122"/>
-                <a:cs typeface="Cambria" pitchFamily="34" charset="-120"/>
-              </a:rPr>
-              <a:t>tabú</a:t>
-            </a:r>
-            <a:endParaRPr lang="en-US" sz="1300" dirty="0"/>
-          </a:p>
-        </p:txBody>
-      </p:sp>
-      <p:sp>
-        <p:nvSpPr>
-          <p:cNvPr id="24" name="Text 22"/>
-          <p:cNvSpPr/>
-          <p:nvPr/>
-        </p:nvSpPr>
-        <p:spPr>
-          <a:xfrm>
-            <a:off x="7397496" y="3794760"/>
-            <a:ext cx="1783080" cy="320040"/>
-          </a:xfrm>
-          <a:prstGeom prst="rect">
-            <a:avLst/>
-          </a:prstGeom>
-          <a:noFill/>
-          <a:ln/>
-        </p:spPr>
-        <p:txBody>
-          <a:bodyPr wrap="square" rtlCol="0" anchor="ctr"/>
-          <a:lstStyle/>
-          <a:p>
-            <a:pPr algn="ctr" indent="0" marL="0">
-              <a:buNone/>
-            </a:pPr>
-            <a:r>
-              <a:rPr lang="en-US" sz="1000" dirty="0">
-                <a:solidFill>
-                  <a:srgbClr val="6B7280"/>
-                </a:solidFill>
-                <a:latin typeface="Calibri" pitchFamily="34" charset="0"/>
-                <a:ea typeface="Calibri" pitchFamily="34" charset="-122"/>
-                <a:cs typeface="Calibri" pitchFamily="34" charset="-120"/>
-              </a:rPr>
-              <a:t>2.º heurístico</a:t>
-            </a:r>
-            <a:endParaRPr lang="en-US" sz="1000" dirty="0"/>
-          </a:p>
-        </p:txBody>
-      </p:sp>
-      <p:sp>
-        <p:nvSpPr>
-          <p:cNvPr id="25" name="Shape 23"/>
-          <p:cNvSpPr/>
-          <p:nvPr/>
-        </p:nvSpPr>
-        <p:spPr>
-          <a:xfrm>
-            <a:off x="9528048" y="2331720"/>
-            <a:ext cx="1965960" cy="1828800"/>
-          </a:xfrm>
-          <a:prstGeom prst="roundRect">
-            <a:avLst>
-              <a:gd name="adj" fmla="val 6000"/>
-            </a:avLst>
-          </a:prstGeom>
-          <a:solidFill>
-            <a:srgbClr val="F3F5FC"/>
-          </a:solidFill>
-          <a:ln/>
-          <a:effectLst>
-            <a:outerShdw sx="100000" sy="100000" kx="0" ky="0" algn="bl" rotWithShape="0" blurRad="76200" dist="25400" dir="5400000">
-              <a:srgbClr val="8891B0">
-                <a:alpha val="25000"/>
-              </a:srgbClr>
-            </a:outerShdw>
-          </a:effectLst>
-        </p:spPr>
-      </p:sp>
-      <p:sp>
-        <p:nvSpPr>
-          <p:cNvPr id="26" name="Shape 24"/>
-          <p:cNvSpPr/>
-          <p:nvPr/>
-        </p:nvSpPr>
-        <p:spPr>
-          <a:xfrm>
-            <a:off x="10190988" y="2606040"/>
-            <a:ext cx="640080" cy="640080"/>
-          </a:xfrm>
-          <a:prstGeom prst="ellipse">
-            <a:avLst/>
-          </a:prstGeom>
-          <a:solidFill>
-            <a:srgbClr val="1E2761"/>
-          </a:solidFill>
-          <a:ln/>
-        </p:spPr>
-      </p:sp>
-      <p:sp>
-        <p:nvSpPr>
-          <p:cNvPr id="27" name="Text 25"/>
-          <p:cNvSpPr/>
-          <p:nvPr/>
-        </p:nvSpPr>
-        <p:spPr>
-          <a:xfrm>
-            <a:off x="10190988" y="2606040"/>
-            <a:ext cx="640080" cy="640080"/>
-          </a:xfrm>
-          <a:prstGeom prst="rect">
-            <a:avLst/>
-          </a:prstGeom>
-          <a:noFill/>
-          <a:ln/>
-        </p:spPr>
-        <p:txBody>
-          <a:bodyPr wrap="square" rtlCol="0" anchor="ctr"/>
-          <a:lstStyle/>
-          <a:p>
-            <a:pPr algn="ctr" indent="0" marL="0">
-              <a:buNone/>
-            </a:pPr>
-            <a:r>
-              <a:rPr lang="en-US" sz="2000" b="1" dirty="0">
-                <a:solidFill>
-                  <a:srgbClr val="FFFFFF"/>
-                </a:solidFill>
-                <a:latin typeface="Cambria" pitchFamily="34" charset="0"/>
-                <a:ea typeface="Cambria" pitchFamily="34" charset="-122"/>
-                <a:cs typeface="Cambria" pitchFamily="34" charset="-120"/>
-              </a:rPr>
-              <a:t>5</a:t>
-            </a:r>
-            <a:endParaRPr lang="en-US" sz="2000" dirty="0"/>
-          </a:p>
-        </p:txBody>
-      </p:sp>
-      <p:sp>
-        <p:nvSpPr>
-          <p:cNvPr id="28" name="Text 26"/>
-          <p:cNvSpPr/>
-          <p:nvPr/>
-        </p:nvSpPr>
-        <p:spPr>
-          <a:xfrm>
-            <a:off x="9619488" y="3291840"/>
-            <a:ext cx="1783080" cy="548640"/>
-          </a:xfrm>
-          <a:prstGeom prst="rect">
-            <a:avLst/>
-          </a:prstGeom>
-          <a:noFill/>
-          <a:ln/>
-        </p:spPr>
-        <p:txBody>
-          <a:bodyPr wrap="square" rtlCol="0" anchor="ctr"/>
-          <a:lstStyle/>
-          <a:p>
-            <a:pPr algn="ctr" indent="0" marL="0">
-              <a:buNone/>
-            </a:pPr>
-            <a:r>
-              <a:rPr lang="en-US" sz="1300" b="1" dirty="0">
-                <a:solidFill>
-                  <a:srgbClr val="1E2761"/>
-                </a:solidFill>
-                <a:latin typeface="Cambria" pitchFamily="34" charset="0"/>
-                <a:ea typeface="Cambria" pitchFamily="34" charset="-122"/>
-                <a:cs typeface="Cambria" pitchFamily="34" charset="-120"/>
-              </a:rPr>
-              <a:t>QAOA</a:t>
-            </a:r>
-            <a:endParaRPr lang="en-US" sz="1300" dirty="0"/>
-          </a:p>
-          <a:p>
-            <a:pPr algn="ctr" indent="0" marL="0">
-              <a:buNone/>
-            </a:pPr>
-            <a:r>
-              <a:rPr lang="en-US" sz="1300" b="1" dirty="0">
-                <a:solidFill>
-                  <a:srgbClr val="1E2761"/>
-                </a:solidFill>
-                <a:latin typeface="Cambria" pitchFamily="34" charset="0"/>
-                <a:ea typeface="Cambria" pitchFamily="34" charset="-122"/>
-                <a:cs typeface="Cambria" pitchFamily="34" charset="-120"/>
-              </a:rPr>
-              <a:t>(simulado)</a:t>
-            </a:r>
-            <a:endParaRPr lang="en-US" sz="1300" dirty="0"/>
-          </a:p>
-        </p:txBody>
-      </p:sp>
-      <p:sp>
-        <p:nvSpPr>
-          <p:cNvPr id="29" name="Text 27"/>
-          <p:cNvSpPr/>
-          <p:nvPr/>
-        </p:nvSpPr>
-        <p:spPr>
-          <a:xfrm>
-            <a:off x="9619488" y="3794760"/>
-            <a:ext cx="1783080" cy="320040"/>
-          </a:xfrm>
-          <a:prstGeom prst="rect">
-            <a:avLst/>
-          </a:prstGeom>
-          <a:noFill/>
-          <a:ln/>
-        </p:spPr>
-        <p:txBody>
-          <a:bodyPr wrap="square" rtlCol="0" anchor="ctr"/>
-          <a:lstStyle/>
-          <a:p>
-            <a:pPr algn="ctr" indent="0" marL="0">
-              <a:buNone/>
-            </a:pPr>
-            <a:r>
-              <a:rPr lang="en-US" sz="1000" dirty="0">
-                <a:solidFill>
-                  <a:srgbClr val="6B7280"/>
-                </a:solidFill>
-                <a:latin typeface="Calibri" pitchFamily="34" charset="0"/>
-                <a:ea typeface="Calibri" pitchFamily="34" charset="-122"/>
-                <a:cs typeface="Calibri" pitchFamily="34" charset="-120"/>
-              </a:rPr>
-              <a:t>Circuito cuántico</a:t>
-            </a:r>
-            <a:endParaRPr lang="en-US" sz="1000" dirty="0"/>
-          </a:p>
-          <a:p>
-            <a:pPr algn="ctr" indent="0" marL="0">
-              <a:buNone/>
-            </a:pPr>
-            <a:r>
-              <a:rPr lang="en-US" sz="1000" dirty="0">
-                <a:solidFill>
-                  <a:srgbClr val="6B7280"/>
-                </a:solidFill>
-                <a:latin typeface="Calibri" pitchFamily="34" charset="0"/>
-                <a:ea typeface="Calibri" pitchFamily="34" charset="-122"/>
-                <a:cs typeface="Calibri" pitchFamily="34" charset="-120"/>
-              </a:rPr>
-              <a:t>simulado</a:t>
-            </a:r>
-            <a:endParaRPr lang="en-US" sz="1000" dirty="0"/>
-          </a:p>
-        </p:txBody>
-      </p:sp>
-      <p:sp>
-        <p:nvSpPr>
-          <p:cNvPr id="30" name="Text 28"/>
-          <p:cNvSpPr/>
-          <p:nvPr/>
-        </p:nvSpPr>
-        <p:spPr>
-          <a:xfrm>
-            <a:off x="640080" y="4572000"/>
-            <a:ext cx="10607040" cy="640080"/>
-          </a:xfrm>
-          <a:prstGeom prst="rect">
-            <a:avLst/>
-          </a:prstGeom>
-          <a:noFill/>
-          <a:ln/>
-        </p:spPr>
-        <p:txBody>
-          <a:bodyPr wrap="square" rtlCol="0" anchor="ctr"/>
-          <a:lstStyle/>
-          <a:p>
-            <a:pPr indent="0" marL="0">
-              <a:buNone/>
-            </a:pPr>
-            <a:r>
-              <a:rPr lang="en-US" sz="1300" dirty="0">
-                <a:solidFill>
-                  <a:srgbClr val="1F2937"/>
-                </a:solidFill>
-                <a:latin typeface="Calibri" pitchFamily="34" charset="0"/>
-                <a:ea typeface="Calibri" pitchFamily="34" charset="-122"/>
-                <a:cs typeface="Calibri" pitchFamily="34" charset="-120"/>
-              </a:rPr>
-              <a:t>Dos escalas: Nivel A (18 variables, óptimo verificable) y Nivel B (45 variables, incluye trampas de ruido diseñadas a propósito) — cada una corrida sobre 10 generaciones de datos independientes.</a:t>
-            </a:r>
-            <a:endParaRPr lang="en-US" sz="1300" dirty="0"/>
-          </a:p>
-        </p:txBody>
-      </p:sp>
-      <p:sp>
-        <p:nvSpPr>
-          <p:cNvPr id="31" name="Text 29"/>
+              <a:t>Un optimizador combinatorio (QUBO) sobre relevancia-redundancia promete modelos más chicos. ¿Es solo una caja negra más opaca, o de verdad ayuda?</a:t>
+            </a:r>
+            <a:endParaRPr lang="en-US" sz="1350" dirty="0"/>
+          </a:p>
+        </p:txBody>
+      </p:sp>
+      <p:sp>
+        <p:nvSpPr>
+          <p:cNvPr id="16" name="Text 14"/>
           <p:cNvSpPr/>
           <p:nvPr/>
         </p:nvSpPr>
@@ -5220,6 +5151,1165 @@
 <file path=ppt/slides/slide4.xml><?xml version="1.0" encoding="utf-8"?>
 <p:sld xmlns:a="http://schemas.openxmlformats.org/drawingml/2006/main" xmlns:r="http://schemas.openxmlformats.org/officeDocument/2006/relationships" xmlns:p="http://schemas.openxmlformats.org/presentationml/2006/main">
   <p:cSld name="Slide 4">
+    <p:bg>
+      <p:bgPr>
+        <a:solidFill>
+          <a:srgbClr val="FFFFFF"/>
+        </a:solidFill>
+      </p:bgPr>
+    </p:bg>
+    <p:spTree>
+      <p:nvGrpSpPr>
+        <p:cNvPr id="1" name=""/>
+        <p:cNvGrpSpPr/>
+        <p:nvPr/>
+      </p:nvGrpSpPr>
+      <p:grpSpPr>
+        <a:xfrm>
+          <a:off x="0" y="0"/>
+          <a:ext cx="0" cy="0"/>
+          <a:chOff x="0" y="0"/>
+          <a:chExt cx="0" cy="0"/>
+        </a:xfrm>
+      </p:grpSpPr>
+      <p:sp>
+        <p:nvSpPr>
+          <p:cNvPr id="2" name="Text 0"/>
+          <p:cNvSpPr/>
+          <p:nvPr/>
+        </p:nvSpPr>
+        <p:spPr>
+          <a:xfrm>
+            <a:off x="548640" y="411480"/>
+            <a:ext cx="7315200" cy="320040"/>
+          </a:xfrm>
+          <a:prstGeom prst="rect">
+            <a:avLst/>
+          </a:prstGeom>
+          <a:noFill/>
+          <a:ln/>
+        </p:spPr>
+        <p:txBody>
+          <a:bodyPr wrap="square" rtlCol="0" anchor="ctr"/>
+          <a:lstStyle/>
+          <a:p>
+            <a:pPr indent="0" marL="0">
+              <a:buNone/>
+            </a:pPr>
+            <a:r>
+              <a:rPr lang="en-US" sz="1200" b="1" spc="200" kern="0" dirty="0">
+                <a:solidFill>
+                  <a:srgbClr val="B23A48"/>
+                </a:solidFill>
+                <a:latin typeface="Calibri" pitchFamily="34" charset="0"/>
+                <a:ea typeface="Calibri" pitchFamily="34" charset="-122"/>
+                <a:cs typeface="Calibri" pitchFamily="34" charset="-120"/>
+              </a:rPr>
+              <a:t>EL ENFOQUE</a:t>
+            </a:r>
+            <a:endParaRPr lang="en-US" sz="1200" dirty="0"/>
+          </a:p>
+        </p:txBody>
+      </p:sp>
+      <p:sp>
+        <p:nvSpPr>
+          <p:cNvPr id="3" name="Text 1"/>
+          <p:cNvSpPr/>
+          <p:nvPr/>
+        </p:nvSpPr>
+        <p:spPr>
+          <a:xfrm>
+            <a:off x="548640" y="685800"/>
+            <a:ext cx="11064240" cy="822960"/>
+          </a:xfrm>
+          <a:prstGeom prst="rect">
+            <a:avLst/>
+          </a:prstGeom>
+          <a:noFill/>
+          <a:ln/>
+        </p:spPr>
+        <p:txBody>
+          <a:bodyPr wrap="square" rtlCol="0" anchor="ctr"/>
+          <a:lstStyle/>
+          <a:p>
+            <a:pPr indent="0" marL="0">
+              <a:buNone/>
+            </a:pPr>
+            <a:r>
+              <a:rPr lang="en-US" sz="3000" b="1" dirty="0">
+                <a:solidFill>
+                  <a:srgbClr val="1E2761"/>
+                </a:solidFill>
+                <a:latin typeface="Cambria" pitchFamily="34" charset="0"/>
+                <a:ea typeface="Cambria" pitchFamily="34" charset="-122"/>
+                <a:cs typeface="Cambria" pitchFamily="34" charset="-120"/>
+              </a:rPr>
+              <a:t>Cinco solucionadores, el mismo problema matemático</a:t>
+            </a:r>
+            <a:endParaRPr lang="en-US" sz="3000" dirty="0"/>
+          </a:p>
+        </p:txBody>
+      </p:sp>
+      <p:sp>
+        <p:nvSpPr>
+          <p:cNvPr id="4" name="Text 2"/>
+          <p:cNvSpPr/>
+          <p:nvPr/>
+        </p:nvSpPr>
+        <p:spPr>
+          <a:xfrm>
+            <a:off x="548640" y="1508760"/>
+            <a:ext cx="10789920" cy="502920"/>
+          </a:xfrm>
+          <a:prstGeom prst="rect">
+            <a:avLst/>
+          </a:prstGeom>
+          <a:noFill/>
+          <a:ln/>
+        </p:spPr>
+        <p:txBody>
+          <a:bodyPr wrap="square" rtlCol="0" anchor="ctr"/>
+          <a:lstStyle/>
+          <a:p>
+            <a:pPr indent="0" marL="0">
+              <a:buNone/>
+            </a:pPr>
+            <a:r>
+              <a:rPr lang="en-US" sz="1350" i="1" dirty="0">
+                <a:solidFill>
+                  <a:srgbClr val="6B7280"/>
+                </a:solidFill>
+                <a:latin typeface="Calibri" pitchFamily="34" charset="0"/>
+                <a:ea typeface="Calibri" pitchFamily="34" charset="-122"/>
+                <a:cs typeface="Calibri" pitchFamily="34" charset="-120"/>
+              </a:rPr>
+              <a:t>Para separar tres preguntas que la literatura suele mezclar: ¿la formulación es buena? ¿el heurístico aporta algo? ¿el paradigma cuántico aporta algo?</a:t>
+            </a:r>
+            <a:endParaRPr lang="en-US" sz="1350" dirty="0"/>
+          </a:p>
+        </p:txBody>
+      </p:sp>
+      <p:sp>
+        <p:nvSpPr>
+          <p:cNvPr id="5" name="Shape 3"/>
+          <p:cNvSpPr/>
+          <p:nvPr/>
+        </p:nvSpPr>
+        <p:spPr>
+          <a:xfrm>
+            <a:off x="640080" y="2331720"/>
+            <a:ext cx="1965960" cy="1828800"/>
+          </a:xfrm>
+          <a:prstGeom prst="roundRect">
+            <a:avLst>
+              <a:gd name="adj" fmla="val 6000"/>
+            </a:avLst>
+          </a:prstGeom>
+          <a:solidFill>
+            <a:srgbClr val="F3F5FC"/>
+          </a:solidFill>
+          <a:ln/>
+          <a:effectLst>
+            <a:outerShdw sx="100000" sy="100000" kx="0" ky="0" algn="bl" rotWithShape="0" blurRad="76200" dist="25400" dir="5400000">
+              <a:srgbClr val="8891B0">
+                <a:alpha val="25000"/>
+              </a:srgbClr>
+            </a:outerShdw>
+          </a:effectLst>
+        </p:spPr>
+      </p:sp>
+      <p:sp>
+        <p:nvSpPr>
+          <p:cNvPr id="6" name="Shape 4"/>
+          <p:cNvSpPr/>
+          <p:nvPr/>
+        </p:nvSpPr>
+        <p:spPr>
+          <a:xfrm>
+            <a:off x="1303020" y="2606040"/>
+            <a:ext cx="640080" cy="640080"/>
+          </a:xfrm>
+          <a:prstGeom prst="ellipse">
+            <a:avLst/>
+          </a:prstGeom>
+          <a:solidFill>
+            <a:srgbClr val="1E2761"/>
+          </a:solidFill>
+          <a:ln/>
+        </p:spPr>
+      </p:sp>
+      <p:sp>
+        <p:nvSpPr>
+          <p:cNvPr id="7" name="Text 5"/>
+          <p:cNvSpPr/>
+          <p:nvPr/>
+        </p:nvSpPr>
+        <p:spPr>
+          <a:xfrm>
+            <a:off x="1303020" y="2606040"/>
+            <a:ext cx="640080" cy="640080"/>
+          </a:xfrm>
+          <a:prstGeom prst="rect">
+            <a:avLst/>
+          </a:prstGeom>
+          <a:noFill/>
+          <a:ln/>
+        </p:spPr>
+        <p:txBody>
+          <a:bodyPr wrap="square" rtlCol="0" anchor="ctr"/>
+          <a:lstStyle/>
+          <a:p>
+            <a:pPr algn="ctr" indent="0" marL="0">
+              <a:buNone/>
+            </a:pPr>
+            <a:r>
+              <a:rPr lang="en-US" sz="2000" b="1" dirty="0">
+                <a:solidFill>
+                  <a:srgbClr val="FFFFFF"/>
+                </a:solidFill>
+                <a:latin typeface="Cambria" pitchFamily="34" charset="0"/>
+                <a:ea typeface="Cambria" pitchFamily="34" charset="-122"/>
+                <a:cs typeface="Cambria" pitchFamily="34" charset="-120"/>
+              </a:rPr>
+              <a:t>1</a:t>
+            </a:r>
+            <a:endParaRPr lang="en-US" sz="2000" dirty="0"/>
+          </a:p>
+        </p:txBody>
+      </p:sp>
+      <p:sp>
+        <p:nvSpPr>
+          <p:cNvPr id="8" name="Text 6"/>
+          <p:cNvSpPr/>
+          <p:nvPr/>
+        </p:nvSpPr>
+        <p:spPr>
+          <a:xfrm>
+            <a:off x="731520" y="3291840"/>
+            <a:ext cx="1783080" cy="548640"/>
+          </a:xfrm>
+          <a:prstGeom prst="rect">
+            <a:avLst/>
+          </a:prstGeom>
+          <a:noFill/>
+          <a:ln/>
+        </p:spPr>
+        <p:txBody>
+          <a:bodyPr wrap="square" rtlCol="0" anchor="ctr"/>
+          <a:lstStyle/>
+          <a:p>
+            <a:pPr algn="ctr" indent="0" marL="0">
+              <a:buNone/>
+            </a:pPr>
+            <a:r>
+              <a:rPr lang="en-US" sz="1300" b="1" dirty="0">
+                <a:solidFill>
+                  <a:srgbClr val="1E2761"/>
+                </a:solidFill>
+                <a:latin typeface="Cambria" pitchFamily="34" charset="0"/>
+                <a:ea typeface="Cambria" pitchFamily="34" charset="-122"/>
+                <a:cs typeface="Cambria" pitchFamily="34" charset="-120"/>
+              </a:rPr>
+              <a:t>Recocido</a:t>
+            </a:r>
+            <a:endParaRPr lang="en-US" sz="1300" dirty="0"/>
+          </a:p>
+          <a:p>
+            <a:pPr algn="ctr" indent="0" marL="0">
+              <a:buNone/>
+            </a:pPr>
+            <a:r>
+              <a:rPr lang="en-US" sz="1300" b="1" dirty="0">
+                <a:solidFill>
+                  <a:srgbClr val="1E2761"/>
+                </a:solidFill>
+                <a:latin typeface="Cambria" pitchFamily="34" charset="0"/>
+                <a:ea typeface="Cambria" pitchFamily="34" charset="-122"/>
+                <a:cs typeface="Cambria" pitchFamily="34" charset="-120"/>
+              </a:rPr>
+              <a:t>simulado</a:t>
+            </a:r>
+            <a:endParaRPr lang="en-US" sz="1300" dirty="0"/>
+          </a:p>
+        </p:txBody>
+      </p:sp>
+      <p:sp>
+        <p:nvSpPr>
+          <p:cNvPr id="9" name="Text 7"/>
+          <p:cNvSpPr/>
+          <p:nvPr/>
+        </p:nvSpPr>
+        <p:spPr>
+          <a:xfrm>
+            <a:off x="731520" y="3794760"/>
+            <a:ext cx="1783080" cy="320040"/>
+          </a:xfrm>
+          <a:prstGeom prst="rect">
+            <a:avLst/>
+          </a:prstGeom>
+          <a:noFill/>
+          <a:ln/>
+        </p:spPr>
+        <p:txBody>
+          <a:bodyPr wrap="square" rtlCol="0" anchor="ctr"/>
+          <a:lstStyle/>
+          <a:p>
+            <a:pPr algn="ctr" indent="0" marL="0">
+              <a:buNone/>
+            </a:pPr>
+            <a:r>
+              <a:rPr lang="en-US" sz="1000" dirty="0">
+                <a:solidFill>
+                  <a:srgbClr val="6B7280"/>
+                </a:solidFill>
+                <a:latin typeface="Calibri" pitchFamily="34" charset="0"/>
+                <a:ea typeface="Calibri" pitchFamily="34" charset="-122"/>
+                <a:cs typeface="Calibri" pitchFamily="34" charset="-120"/>
+              </a:rPr>
+              <a:t>Heurístico rápido</a:t>
+            </a:r>
+            <a:endParaRPr lang="en-US" sz="1000" dirty="0"/>
+          </a:p>
+        </p:txBody>
+      </p:sp>
+      <p:sp>
+        <p:nvSpPr>
+          <p:cNvPr id="10" name="Shape 8"/>
+          <p:cNvSpPr/>
+          <p:nvPr/>
+        </p:nvSpPr>
+        <p:spPr>
+          <a:xfrm>
+            <a:off x="2862072" y="2331720"/>
+            <a:ext cx="1965960" cy="1828800"/>
+          </a:xfrm>
+          <a:prstGeom prst="roundRect">
+            <a:avLst>
+              <a:gd name="adj" fmla="val 6000"/>
+            </a:avLst>
+          </a:prstGeom>
+          <a:solidFill>
+            <a:srgbClr val="F3F5FC"/>
+          </a:solidFill>
+          <a:ln/>
+          <a:effectLst>
+            <a:outerShdw sx="100000" sy="100000" kx="0" ky="0" algn="bl" rotWithShape="0" blurRad="76200" dist="25400" dir="5400000">
+              <a:srgbClr val="8891B0">
+                <a:alpha val="25000"/>
+              </a:srgbClr>
+            </a:outerShdw>
+          </a:effectLst>
+        </p:spPr>
+      </p:sp>
+      <p:sp>
+        <p:nvSpPr>
+          <p:cNvPr id="11" name="Shape 9"/>
+          <p:cNvSpPr/>
+          <p:nvPr/>
+        </p:nvSpPr>
+        <p:spPr>
+          <a:xfrm>
+            <a:off x="3525012" y="2606040"/>
+            <a:ext cx="640080" cy="640080"/>
+          </a:xfrm>
+          <a:prstGeom prst="ellipse">
+            <a:avLst/>
+          </a:prstGeom>
+          <a:solidFill>
+            <a:srgbClr val="1E2761"/>
+          </a:solidFill>
+          <a:ln/>
+        </p:spPr>
+      </p:sp>
+      <p:sp>
+        <p:nvSpPr>
+          <p:cNvPr id="12" name="Text 10"/>
+          <p:cNvSpPr/>
+          <p:nvPr/>
+        </p:nvSpPr>
+        <p:spPr>
+          <a:xfrm>
+            <a:off x="3525012" y="2606040"/>
+            <a:ext cx="640080" cy="640080"/>
+          </a:xfrm>
+          <a:prstGeom prst="rect">
+            <a:avLst/>
+          </a:prstGeom>
+          <a:noFill/>
+          <a:ln/>
+        </p:spPr>
+        <p:txBody>
+          <a:bodyPr wrap="square" rtlCol="0" anchor="ctr"/>
+          <a:lstStyle/>
+          <a:p>
+            <a:pPr algn="ctr" indent="0" marL="0">
+              <a:buNone/>
+            </a:pPr>
+            <a:r>
+              <a:rPr lang="en-US" sz="2000" b="1" dirty="0">
+                <a:solidFill>
+                  <a:srgbClr val="FFFFFF"/>
+                </a:solidFill>
+                <a:latin typeface="Cambria" pitchFamily="34" charset="0"/>
+                <a:ea typeface="Cambria" pitchFamily="34" charset="-122"/>
+                <a:cs typeface="Cambria" pitchFamily="34" charset="-120"/>
+              </a:rPr>
+              <a:t>2</a:t>
+            </a:r>
+            <a:endParaRPr lang="en-US" sz="2000" dirty="0"/>
+          </a:p>
+        </p:txBody>
+      </p:sp>
+      <p:sp>
+        <p:nvSpPr>
+          <p:cNvPr id="13" name="Text 11"/>
+          <p:cNvSpPr/>
+          <p:nvPr/>
+        </p:nvSpPr>
+        <p:spPr>
+          <a:xfrm>
+            <a:off x="2953512" y="3291840"/>
+            <a:ext cx="1783080" cy="548640"/>
+          </a:xfrm>
+          <a:prstGeom prst="rect">
+            <a:avLst/>
+          </a:prstGeom>
+          <a:noFill/>
+          <a:ln/>
+        </p:spPr>
+        <p:txBody>
+          <a:bodyPr wrap="square" rtlCol="0" anchor="ctr"/>
+          <a:lstStyle/>
+          <a:p>
+            <a:pPr algn="ctr" indent="0" marL="0">
+              <a:buNone/>
+            </a:pPr>
+            <a:r>
+              <a:rPr lang="en-US" sz="1300" b="1" dirty="0">
+                <a:solidFill>
+                  <a:srgbClr val="1E2761"/>
+                </a:solidFill>
+                <a:latin typeface="Cambria" pitchFamily="34" charset="0"/>
+                <a:ea typeface="Cambria" pitchFamily="34" charset="-122"/>
+                <a:cs typeface="Cambria" pitchFamily="34" charset="-120"/>
+              </a:rPr>
+              <a:t>Enumeración</a:t>
+            </a:r>
+            <a:endParaRPr lang="en-US" sz="1300" dirty="0"/>
+          </a:p>
+          <a:p>
+            <a:pPr algn="ctr" indent="0" marL="0">
+              <a:buNone/>
+            </a:pPr>
+            <a:r>
+              <a:rPr lang="en-US" sz="1300" b="1" dirty="0">
+                <a:solidFill>
+                  <a:srgbClr val="1E2761"/>
+                </a:solidFill>
+                <a:latin typeface="Cambria" pitchFamily="34" charset="0"/>
+                <a:ea typeface="Cambria" pitchFamily="34" charset="-122"/>
+                <a:cs typeface="Cambria" pitchFamily="34" charset="-120"/>
+              </a:rPr>
+              <a:t>exacta</a:t>
+            </a:r>
+            <a:endParaRPr lang="en-US" sz="1300" dirty="0"/>
+          </a:p>
+        </p:txBody>
+      </p:sp>
+      <p:sp>
+        <p:nvSpPr>
+          <p:cNvPr id="14" name="Text 12"/>
+          <p:cNvSpPr/>
+          <p:nvPr/>
+        </p:nvSpPr>
+        <p:spPr>
+          <a:xfrm>
+            <a:off x="2953512" y="3794760"/>
+            <a:ext cx="1783080" cy="320040"/>
+          </a:xfrm>
+          <a:prstGeom prst="rect">
+            <a:avLst/>
+          </a:prstGeom>
+          <a:noFill/>
+          <a:ln/>
+        </p:spPr>
+        <p:txBody>
+          <a:bodyPr wrap="square" rtlCol="0" anchor="ctr"/>
+          <a:lstStyle/>
+          <a:p>
+            <a:pPr algn="ctr" indent="0" marL="0">
+              <a:buNone/>
+            </a:pPr>
+            <a:r>
+              <a:rPr lang="en-US" sz="1000" dirty="0">
+                <a:solidFill>
+                  <a:srgbClr val="6B7280"/>
+                </a:solidFill>
+                <a:latin typeface="Calibri" pitchFamily="34" charset="0"/>
+                <a:ea typeface="Calibri" pitchFamily="34" charset="-122"/>
+                <a:cs typeface="Calibri" pitchFamily="34" charset="-120"/>
+              </a:rPr>
+              <a:t>Óptimo garantizado</a:t>
+            </a:r>
+            <a:endParaRPr lang="en-US" sz="1000" dirty="0"/>
+          </a:p>
+        </p:txBody>
+      </p:sp>
+      <p:sp>
+        <p:nvSpPr>
+          <p:cNvPr id="15" name="Shape 13"/>
+          <p:cNvSpPr/>
+          <p:nvPr/>
+        </p:nvSpPr>
+        <p:spPr>
+          <a:xfrm>
+            <a:off x="5084064" y="2331720"/>
+            <a:ext cx="1965960" cy="1828800"/>
+          </a:xfrm>
+          <a:prstGeom prst="roundRect">
+            <a:avLst>
+              <a:gd name="adj" fmla="val 6000"/>
+            </a:avLst>
+          </a:prstGeom>
+          <a:solidFill>
+            <a:srgbClr val="F3F5FC"/>
+          </a:solidFill>
+          <a:ln/>
+          <a:effectLst>
+            <a:outerShdw sx="100000" sy="100000" kx="0" ky="0" algn="bl" rotWithShape="0" blurRad="76200" dist="25400" dir="5400000">
+              <a:srgbClr val="8891B0">
+                <a:alpha val="25000"/>
+              </a:srgbClr>
+            </a:outerShdw>
+          </a:effectLst>
+        </p:spPr>
+      </p:sp>
+      <p:sp>
+        <p:nvSpPr>
+          <p:cNvPr id="16" name="Shape 14"/>
+          <p:cNvSpPr/>
+          <p:nvPr/>
+        </p:nvSpPr>
+        <p:spPr>
+          <a:xfrm>
+            <a:off x="5747004" y="2606040"/>
+            <a:ext cx="640080" cy="640080"/>
+          </a:xfrm>
+          <a:prstGeom prst="ellipse">
+            <a:avLst/>
+          </a:prstGeom>
+          <a:solidFill>
+            <a:srgbClr val="B23A48"/>
+          </a:solidFill>
+          <a:ln/>
+        </p:spPr>
+      </p:sp>
+      <p:sp>
+        <p:nvSpPr>
+          <p:cNvPr id="17" name="Text 15"/>
+          <p:cNvSpPr/>
+          <p:nvPr/>
+        </p:nvSpPr>
+        <p:spPr>
+          <a:xfrm>
+            <a:off x="5747004" y="2606040"/>
+            <a:ext cx="640080" cy="640080"/>
+          </a:xfrm>
+          <a:prstGeom prst="rect">
+            <a:avLst/>
+          </a:prstGeom>
+          <a:noFill/>
+          <a:ln/>
+        </p:spPr>
+        <p:txBody>
+          <a:bodyPr wrap="square" rtlCol="0" anchor="ctr"/>
+          <a:lstStyle/>
+          <a:p>
+            <a:pPr algn="ctr" indent="0" marL="0">
+              <a:buNone/>
+            </a:pPr>
+            <a:r>
+              <a:rPr lang="en-US" sz="2000" b="1" dirty="0">
+                <a:solidFill>
+                  <a:srgbClr val="FFFFFF"/>
+                </a:solidFill>
+                <a:latin typeface="Cambria" pitchFamily="34" charset="0"/>
+                <a:ea typeface="Cambria" pitchFamily="34" charset="-122"/>
+                <a:cs typeface="Cambria" pitchFamily="34" charset="-120"/>
+              </a:rPr>
+              <a:t>3</a:t>
+            </a:r>
+            <a:endParaRPr lang="en-US" sz="2000" dirty="0"/>
+          </a:p>
+        </p:txBody>
+      </p:sp>
+      <p:sp>
+        <p:nvSpPr>
+          <p:cNvPr id="18" name="Text 16"/>
+          <p:cNvSpPr/>
+          <p:nvPr/>
+        </p:nvSpPr>
+        <p:spPr>
+          <a:xfrm>
+            <a:off x="5175504" y="3291840"/>
+            <a:ext cx="1783080" cy="548640"/>
+          </a:xfrm>
+          <a:prstGeom prst="rect">
+            <a:avLst/>
+          </a:prstGeom>
+          <a:noFill/>
+          <a:ln/>
+        </p:spPr>
+        <p:txBody>
+          <a:bodyPr wrap="square" rtlCol="0" anchor="ctr"/>
+          <a:lstStyle/>
+          <a:p>
+            <a:pPr algn="ctr" indent="0" marL="0">
+              <a:buNone/>
+            </a:pPr>
+            <a:r>
+              <a:rPr lang="en-US" sz="1300" b="1" dirty="0">
+                <a:solidFill>
+                  <a:srgbClr val="1E2761"/>
+                </a:solidFill>
+                <a:latin typeface="Cambria" pitchFamily="34" charset="0"/>
+                <a:ea typeface="Cambria" pitchFamily="34" charset="-122"/>
+                <a:cs typeface="Cambria" pitchFamily="34" charset="-120"/>
+              </a:rPr>
+              <a:t>MILP +</a:t>
+            </a:r>
+            <a:endParaRPr lang="en-US" sz="1300" dirty="0"/>
+          </a:p>
+          <a:p>
+            <a:pPr algn="ctr" indent="0" marL="0">
+              <a:buNone/>
+            </a:pPr>
+            <a:r>
+              <a:rPr lang="en-US" sz="1300" b="1" dirty="0">
+                <a:solidFill>
+                  <a:srgbClr val="1E2761"/>
+                </a:solidFill>
+                <a:latin typeface="Cambria" pitchFamily="34" charset="0"/>
+                <a:ea typeface="Cambria" pitchFamily="34" charset="-122"/>
+                <a:cs typeface="Cambria" pitchFamily="34" charset="-120"/>
+              </a:rPr>
+              <a:t>Glover</a:t>
+            </a:r>
+            <a:endParaRPr lang="en-US" sz="1300" dirty="0"/>
+          </a:p>
+        </p:txBody>
+      </p:sp>
+      <p:sp>
+        <p:nvSpPr>
+          <p:cNvPr id="19" name="Text 17"/>
+          <p:cNvSpPr/>
+          <p:nvPr/>
+        </p:nvSpPr>
+        <p:spPr>
+          <a:xfrm>
+            <a:off x="5175504" y="3794760"/>
+            <a:ext cx="1783080" cy="320040"/>
+          </a:xfrm>
+          <a:prstGeom prst="rect">
+            <a:avLst/>
+          </a:prstGeom>
+          <a:noFill/>
+          <a:ln/>
+        </p:spPr>
+        <p:txBody>
+          <a:bodyPr wrap="square" rtlCol="0" anchor="ctr"/>
+          <a:lstStyle/>
+          <a:p>
+            <a:pPr algn="ctr" indent="0" marL="0">
+              <a:buNone/>
+            </a:pPr>
+            <a:r>
+              <a:rPr lang="en-US" sz="1000" dirty="0">
+                <a:solidFill>
+                  <a:srgbClr val="6B7280"/>
+                </a:solidFill>
+                <a:latin typeface="Calibri" pitchFamily="34" charset="0"/>
+                <a:ea typeface="Calibri" pitchFamily="34" charset="-122"/>
+                <a:cs typeface="Calibri" pitchFamily="34" charset="-120"/>
+              </a:rPr>
+              <a:t>Óptimo certificado</a:t>
+            </a:r>
+            <a:endParaRPr lang="en-US" sz="1000" dirty="0"/>
+          </a:p>
+        </p:txBody>
+      </p:sp>
+      <p:sp>
+        <p:nvSpPr>
+          <p:cNvPr id="20" name="Shape 18"/>
+          <p:cNvSpPr/>
+          <p:nvPr/>
+        </p:nvSpPr>
+        <p:spPr>
+          <a:xfrm>
+            <a:off x="7306056" y="2331720"/>
+            <a:ext cx="1965960" cy="1828800"/>
+          </a:xfrm>
+          <a:prstGeom prst="roundRect">
+            <a:avLst>
+              <a:gd name="adj" fmla="val 6000"/>
+            </a:avLst>
+          </a:prstGeom>
+          <a:solidFill>
+            <a:srgbClr val="F3F5FC"/>
+          </a:solidFill>
+          <a:ln/>
+          <a:effectLst>
+            <a:outerShdw sx="100000" sy="100000" kx="0" ky="0" algn="bl" rotWithShape="0" blurRad="76200" dist="25400" dir="5400000">
+              <a:srgbClr val="8891B0">
+                <a:alpha val="25000"/>
+              </a:srgbClr>
+            </a:outerShdw>
+          </a:effectLst>
+        </p:spPr>
+      </p:sp>
+      <p:sp>
+        <p:nvSpPr>
+          <p:cNvPr id="21" name="Shape 19"/>
+          <p:cNvSpPr/>
+          <p:nvPr/>
+        </p:nvSpPr>
+        <p:spPr>
+          <a:xfrm>
+            <a:off x="7968996" y="2606040"/>
+            <a:ext cx="640080" cy="640080"/>
+          </a:xfrm>
+          <a:prstGeom prst="ellipse">
+            <a:avLst/>
+          </a:prstGeom>
+          <a:solidFill>
+            <a:srgbClr val="1E2761"/>
+          </a:solidFill>
+          <a:ln/>
+        </p:spPr>
+      </p:sp>
+      <p:sp>
+        <p:nvSpPr>
+          <p:cNvPr id="22" name="Text 20"/>
+          <p:cNvSpPr/>
+          <p:nvPr/>
+        </p:nvSpPr>
+        <p:spPr>
+          <a:xfrm>
+            <a:off x="7968996" y="2606040"/>
+            <a:ext cx="640080" cy="640080"/>
+          </a:xfrm>
+          <a:prstGeom prst="rect">
+            <a:avLst/>
+          </a:prstGeom>
+          <a:noFill/>
+          <a:ln/>
+        </p:spPr>
+        <p:txBody>
+          <a:bodyPr wrap="square" rtlCol="0" anchor="ctr"/>
+          <a:lstStyle/>
+          <a:p>
+            <a:pPr algn="ctr" indent="0" marL="0">
+              <a:buNone/>
+            </a:pPr>
+            <a:r>
+              <a:rPr lang="en-US" sz="2000" b="1" dirty="0">
+                <a:solidFill>
+                  <a:srgbClr val="FFFFFF"/>
+                </a:solidFill>
+                <a:latin typeface="Cambria" pitchFamily="34" charset="0"/>
+                <a:ea typeface="Cambria" pitchFamily="34" charset="-122"/>
+                <a:cs typeface="Cambria" pitchFamily="34" charset="-120"/>
+              </a:rPr>
+              <a:t>4</a:t>
+            </a:r>
+            <a:endParaRPr lang="en-US" sz="2000" dirty="0"/>
+          </a:p>
+        </p:txBody>
+      </p:sp>
+      <p:sp>
+        <p:nvSpPr>
+          <p:cNvPr id="23" name="Text 21"/>
+          <p:cNvSpPr/>
+          <p:nvPr/>
+        </p:nvSpPr>
+        <p:spPr>
+          <a:xfrm>
+            <a:off x="7397496" y="3291840"/>
+            <a:ext cx="1783080" cy="548640"/>
+          </a:xfrm>
+          <a:prstGeom prst="rect">
+            <a:avLst/>
+          </a:prstGeom>
+          <a:noFill/>
+          <a:ln/>
+        </p:spPr>
+        <p:txBody>
+          <a:bodyPr wrap="square" rtlCol="0" anchor="ctr"/>
+          <a:lstStyle/>
+          <a:p>
+            <a:pPr algn="ctr" indent="0" marL="0">
+              <a:buNone/>
+            </a:pPr>
+            <a:r>
+              <a:rPr lang="en-US" sz="1300" b="1" dirty="0">
+                <a:solidFill>
+                  <a:srgbClr val="1E2761"/>
+                </a:solidFill>
+                <a:latin typeface="Cambria" pitchFamily="34" charset="0"/>
+                <a:ea typeface="Cambria" pitchFamily="34" charset="-122"/>
+                <a:cs typeface="Cambria" pitchFamily="34" charset="-120"/>
+              </a:rPr>
+              <a:t>Búsqueda</a:t>
+            </a:r>
+            <a:endParaRPr lang="en-US" sz="1300" dirty="0"/>
+          </a:p>
+          <a:p>
+            <a:pPr algn="ctr" indent="0" marL="0">
+              <a:buNone/>
+            </a:pPr>
+            <a:r>
+              <a:rPr lang="en-US" sz="1300" b="1" dirty="0">
+                <a:solidFill>
+                  <a:srgbClr val="1E2761"/>
+                </a:solidFill>
+                <a:latin typeface="Cambria" pitchFamily="34" charset="0"/>
+                <a:ea typeface="Cambria" pitchFamily="34" charset="-122"/>
+                <a:cs typeface="Cambria" pitchFamily="34" charset="-120"/>
+              </a:rPr>
+              <a:t>tabú</a:t>
+            </a:r>
+            <a:endParaRPr lang="en-US" sz="1300" dirty="0"/>
+          </a:p>
+        </p:txBody>
+      </p:sp>
+      <p:sp>
+        <p:nvSpPr>
+          <p:cNvPr id="24" name="Text 22"/>
+          <p:cNvSpPr/>
+          <p:nvPr/>
+        </p:nvSpPr>
+        <p:spPr>
+          <a:xfrm>
+            <a:off x="7397496" y="3794760"/>
+            <a:ext cx="1783080" cy="320040"/>
+          </a:xfrm>
+          <a:prstGeom prst="rect">
+            <a:avLst/>
+          </a:prstGeom>
+          <a:noFill/>
+          <a:ln/>
+        </p:spPr>
+        <p:txBody>
+          <a:bodyPr wrap="square" rtlCol="0" anchor="ctr"/>
+          <a:lstStyle/>
+          <a:p>
+            <a:pPr algn="ctr" indent="0" marL="0">
+              <a:buNone/>
+            </a:pPr>
+            <a:r>
+              <a:rPr lang="en-US" sz="1000" dirty="0">
+                <a:solidFill>
+                  <a:srgbClr val="6B7280"/>
+                </a:solidFill>
+                <a:latin typeface="Calibri" pitchFamily="34" charset="0"/>
+                <a:ea typeface="Calibri" pitchFamily="34" charset="-122"/>
+                <a:cs typeface="Calibri" pitchFamily="34" charset="-120"/>
+              </a:rPr>
+              <a:t>2.º heurístico</a:t>
+            </a:r>
+            <a:endParaRPr lang="en-US" sz="1000" dirty="0"/>
+          </a:p>
+        </p:txBody>
+      </p:sp>
+      <p:sp>
+        <p:nvSpPr>
+          <p:cNvPr id="25" name="Shape 23"/>
+          <p:cNvSpPr/>
+          <p:nvPr/>
+        </p:nvSpPr>
+        <p:spPr>
+          <a:xfrm>
+            <a:off x="9528048" y="2331720"/>
+            <a:ext cx="1965960" cy="1828800"/>
+          </a:xfrm>
+          <a:prstGeom prst="roundRect">
+            <a:avLst>
+              <a:gd name="adj" fmla="val 6000"/>
+            </a:avLst>
+          </a:prstGeom>
+          <a:solidFill>
+            <a:srgbClr val="F3F5FC"/>
+          </a:solidFill>
+          <a:ln/>
+          <a:effectLst>
+            <a:outerShdw sx="100000" sy="100000" kx="0" ky="0" algn="bl" rotWithShape="0" blurRad="76200" dist="25400" dir="5400000">
+              <a:srgbClr val="8891B0">
+                <a:alpha val="25000"/>
+              </a:srgbClr>
+            </a:outerShdw>
+          </a:effectLst>
+        </p:spPr>
+      </p:sp>
+      <p:sp>
+        <p:nvSpPr>
+          <p:cNvPr id="26" name="Shape 24"/>
+          <p:cNvSpPr/>
+          <p:nvPr/>
+        </p:nvSpPr>
+        <p:spPr>
+          <a:xfrm>
+            <a:off x="10190988" y="2606040"/>
+            <a:ext cx="640080" cy="640080"/>
+          </a:xfrm>
+          <a:prstGeom prst="ellipse">
+            <a:avLst/>
+          </a:prstGeom>
+          <a:solidFill>
+            <a:srgbClr val="1E2761"/>
+          </a:solidFill>
+          <a:ln/>
+        </p:spPr>
+      </p:sp>
+      <p:sp>
+        <p:nvSpPr>
+          <p:cNvPr id="27" name="Text 25"/>
+          <p:cNvSpPr/>
+          <p:nvPr/>
+        </p:nvSpPr>
+        <p:spPr>
+          <a:xfrm>
+            <a:off x="10190988" y="2606040"/>
+            <a:ext cx="640080" cy="640080"/>
+          </a:xfrm>
+          <a:prstGeom prst="rect">
+            <a:avLst/>
+          </a:prstGeom>
+          <a:noFill/>
+          <a:ln/>
+        </p:spPr>
+        <p:txBody>
+          <a:bodyPr wrap="square" rtlCol="0" anchor="ctr"/>
+          <a:lstStyle/>
+          <a:p>
+            <a:pPr algn="ctr" indent="0" marL="0">
+              <a:buNone/>
+            </a:pPr>
+            <a:r>
+              <a:rPr lang="en-US" sz="2000" b="1" dirty="0">
+                <a:solidFill>
+                  <a:srgbClr val="FFFFFF"/>
+                </a:solidFill>
+                <a:latin typeface="Cambria" pitchFamily="34" charset="0"/>
+                <a:ea typeface="Cambria" pitchFamily="34" charset="-122"/>
+                <a:cs typeface="Cambria" pitchFamily="34" charset="-120"/>
+              </a:rPr>
+              <a:t>5</a:t>
+            </a:r>
+            <a:endParaRPr lang="en-US" sz="2000" dirty="0"/>
+          </a:p>
+        </p:txBody>
+      </p:sp>
+      <p:sp>
+        <p:nvSpPr>
+          <p:cNvPr id="28" name="Text 26"/>
+          <p:cNvSpPr/>
+          <p:nvPr/>
+        </p:nvSpPr>
+        <p:spPr>
+          <a:xfrm>
+            <a:off x="9619488" y="3291840"/>
+            <a:ext cx="1783080" cy="548640"/>
+          </a:xfrm>
+          <a:prstGeom prst="rect">
+            <a:avLst/>
+          </a:prstGeom>
+          <a:noFill/>
+          <a:ln/>
+        </p:spPr>
+        <p:txBody>
+          <a:bodyPr wrap="square" rtlCol="0" anchor="ctr"/>
+          <a:lstStyle/>
+          <a:p>
+            <a:pPr algn="ctr" indent="0" marL="0">
+              <a:buNone/>
+            </a:pPr>
+            <a:r>
+              <a:rPr lang="en-US" sz="1300" b="1" dirty="0">
+                <a:solidFill>
+                  <a:srgbClr val="1E2761"/>
+                </a:solidFill>
+                <a:latin typeface="Cambria" pitchFamily="34" charset="0"/>
+                <a:ea typeface="Cambria" pitchFamily="34" charset="-122"/>
+                <a:cs typeface="Cambria" pitchFamily="34" charset="-120"/>
+              </a:rPr>
+              <a:t>QAOA</a:t>
+            </a:r>
+            <a:endParaRPr lang="en-US" sz="1300" dirty="0"/>
+          </a:p>
+          <a:p>
+            <a:pPr algn="ctr" indent="0" marL="0">
+              <a:buNone/>
+            </a:pPr>
+            <a:r>
+              <a:rPr lang="en-US" sz="1300" b="1" dirty="0">
+                <a:solidFill>
+                  <a:srgbClr val="1E2761"/>
+                </a:solidFill>
+                <a:latin typeface="Cambria" pitchFamily="34" charset="0"/>
+                <a:ea typeface="Cambria" pitchFamily="34" charset="-122"/>
+                <a:cs typeface="Cambria" pitchFamily="34" charset="-120"/>
+              </a:rPr>
+              <a:t>(simulado)</a:t>
+            </a:r>
+            <a:endParaRPr lang="en-US" sz="1300" dirty="0"/>
+          </a:p>
+        </p:txBody>
+      </p:sp>
+      <p:sp>
+        <p:nvSpPr>
+          <p:cNvPr id="29" name="Text 27"/>
+          <p:cNvSpPr/>
+          <p:nvPr/>
+        </p:nvSpPr>
+        <p:spPr>
+          <a:xfrm>
+            <a:off x="9619488" y="3794760"/>
+            <a:ext cx="1783080" cy="320040"/>
+          </a:xfrm>
+          <a:prstGeom prst="rect">
+            <a:avLst/>
+          </a:prstGeom>
+          <a:noFill/>
+          <a:ln/>
+        </p:spPr>
+        <p:txBody>
+          <a:bodyPr wrap="square" rtlCol="0" anchor="ctr"/>
+          <a:lstStyle/>
+          <a:p>
+            <a:pPr algn="ctr" indent="0" marL="0">
+              <a:buNone/>
+            </a:pPr>
+            <a:r>
+              <a:rPr lang="en-US" sz="1000" dirty="0">
+                <a:solidFill>
+                  <a:srgbClr val="6B7280"/>
+                </a:solidFill>
+                <a:latin typeface="Calibri" pitchFamily="34" charset="0"/>
+                <a:ea typeface="Calibri" pitchFamily="34" charset="-122"/>
+                <a:cs typeface="Calibri" pitchFamily="34" charset="-120"/>
+              </a:rPr>
+              <a:t>Circuito cuántico</a:t>
+            </a:r>
+            <a:endParaRPr lang="en-US" sz="1000" dirty="0"/>
+          </a:p>
+          <a:p>
+            <a:pPr algn="ctr" indent="0" marL="0">
+              <a:buNone/>
+            </a:pPr>
+            <a:r>
+              <a:rPr lang="en-US" sz="1000" dirty="0">
+                <a:solidFill>
+                  <a:srgbClr val="6B7280"/>
+                </a:solidFill>
+                <a:latin typeface="Calibri" pitchFamily="34" charset="0"/>
+                <a:ea typeface="Calibri" pitchFamily="34" charset="-122"/>
+                <a:cs typeface="Calibri" pitchFamily="34" charset="-120"/>
+              </a:rPr>
+              <a:t>simulado</a:t>
+            </a:r>
+            <a:endParaRPr lang="en-US" sz="1000" dirty="0"/>
+          </a:p>
+        </p:txBody>
+      </p:sp>
+      <p:sp>
+        <p:nvSpPr>
+          <p:cNvPr id="30" name="Text 28"/>
+          <p:cNvSpPr/>
+          <p:nvPr/>
+        </p:nvSpPr>
+        <p:spPr>
+          <a:xfrm>
+            <a:off x="640080" y="4572000"/>
+            <a:ext cx="10607040" cy="640080"/>
+          </a:xfrm>
+          <a:prstGeom prst="rect">
+            <a:avLst/>
+          </a:prstGeom>
+          <a:noFill/>
+          <a:ln/>
+        </p:spPr>
+        <p:txBody>
+          <a:bodyPr wrap="square" rtlCol="0" anchor="ctr"/>
+          <a:lstStyle/>
+          <a:p>
+            <a:pPr indent="0" marL="0">
+              <a:buNone/>
+            </a:pPr>
+            <a:r>
+              <a:rPr lang="en-US" sz="1300" dirty="0">
+                <a:solidFill>
+                  <a:srgbClr val="1F2937"/>
+                </a:solidFill>
+                <a:latin typeface="Calibri" pitchFamily="34" charset="0"/>
+                <a:ea typeface="Calibri" pitchFamily="34" charset="-122"/>
+                <a:cs typeface="Calibri" pitchFamily="34" charset="-120"/>
+              </a:rPr>
+              <a:t>Dos escalas: Nivel A (18 variables, óptimo verificable) y Nivel B (45 variables, incluye trampas de ruido diseñadas a propósito) — cada una corrida sobre 10 generaciones de datos independientes.</a:t>
+            </a:r>
+            <a:endParaRPr lang="en-US" sz="1300" dirty="0"/>
+          </a:p>
+        </p:txBody>
+      </p:sp>
+      <p:sp>
+        <p:nvSpPr>
+          <p:cNvPr id="31" name="Text 29"/>
+          <p:cNvSpPr/>
+          <p:nvPr/>
+        </p:nvSpPr>
+        <p:spPr>
+          <a:xfrm>
+            <a:off x="11521440" y="6446520"/>
+            <a:ext cx="548640" cy="274320"/>
+          </a:xfrm>
+          <a:prstGeom prst="rect">
+            <a:avLst/>
+          </a:prstGeom>
+          <a:noFill/>
+          <a:ln/>
+        </p:spPr>
+        <p:txBody>
+          <a:bodyPr wrap="square" rtlCol="0" anchor="ctr"/>
+          <a:lstStyle/>
+          <a:p>
+            <a:pPr algn="r" indent="0" marL="0">
+              <a:buNone/>
+            </a:pPr>
+            <a:r>
+              <a:rPr lang="en-US" sz="1000" dirty="0">
+                <a:solidFill>
+                  <a:srgbClr val="6B7280"/>
+                </a:solidFill>
+                <a:latin typeface="Calibri" pitchFamily="34" charset="0"/>
+                <a:ea typeface="Calibri" pitchFamily="34" charset="-122"/>
+                <a:cs typeface="Calibri" pitchFamily="34" charset="-120"/>
+              </a:rPr>
+              <a:t>04</a:t>
+            </a:r>
+            <a:endParaRPr lang="en-US" sz="1000" dirty="0"/>
+          </a:p>
+        </p:txBody>
+      </p:sp>
+    </p:spTree>
+  </p:cSld>
+  <p:clrMapOvr>
+    <a:masterClrMapping/>
+  </p:clrMapOvr>
+</p:sld>
+</file>
+
+<file path=ppt/slides/slide5.xml><?xml version="1.0" encoding="utf-8"?>
+<p:sld xmlns:a="http://schemas.openxmlformats.org/drawingml/2006/main" xmlns:r="http://schemas.openxmlformats.org/officeDocument/2006/relationships" xmlns:p="http://schemas.openxmlformats.org/presentationml/2006/main">
+  <p:cSld name="Slide 5">
     <p:bg>
       <p:bgPr>
         <a:solidFill>
@@ -5620,471 +6710,6 @@
               <a:rPr lang="en-US" sz="1000" dirty="0">
                 <a:solidFill>
                   <a:srgbClr val="7C8FC7"/>
-                </a:solidFill>
-                <a:latin typeface="Calibri" pitchFamily="34" charset="0"/>
-                <a:ea typeface="Calibri" pitchFamily="34" charset="-122"/>
-                <a:cs typeface="Calibri" pitchFamily="34" charset="-120"/>
-              </a:rPr>
-              <a:t>04</a:t>
-            </a:r>
-            <a:endParaRPr lang="en-US" sz="1000" dirty="0"/>
-          </a:p>
-        </p:txBody>
-      </p:sp>
-    </p:spTree>
-  </p:cSld>
-  <p:clrMapOvr>
-    <a:masterClrMapping/>
-  </p:clrMapOvr>
-</p:sld>
-</file>
-
-<file path=ppt/slides/slide5.xml><?xml version="1.0" encoding="utf-8"?>
-<p:sld xmlns:a="http://schemas.openxmlformats.org/drawingml/2006/main" xmlns:r="http://schemas.openxmlformats.org/officeDocument/2006/relationships" xmlns:p="http://schemas.openxmlformats.org/presentationml/2006/main">
-  <p:cSld name="Slide 5">
-    <p:bg>
-      <p:bgPr>
-        <a:solidFill>
-          <a:srgbClr val="FFFFFF"/>
-        </a:solidFill>
-      </p:bgPr>
-    </p:bg>
-    <p:spTree>
-      <p:nvGrpSpPr>
-        <p:cNvPr id="1" name=""/>
-        <p:cNvGrpSpPr/>
-        <p:nvPr/>
-      </p:nvGrpSpPr>
-      <p:grpSpPr>
-        <a:xfrm>
-          <a:off x="0" y="0"/>
-          <a:ext cx="0" cy="0"/>
-          <a:chOff x="0" y="0"/>
-          <a:chExt cx="0" cy="0"/>
-        </a:xfrm>
-      </p:grpSpPr>
-      <p:sp>
-        <p:nvSpPr>
-          <p:cNvPr id="2" name="Text 0"/>
-          <p:cNvSpPr/>
-          <p:nvPr/>
-        </p:nvSpPr>
-        <p:spPr>
-          <a:xfrm>
-            <a:off x="548640" y="411480"/>
-            <a:ext cx="7315200" cy="320040"/>
-          </a:xfrm>
-          <a:prstGeom prst="rect">
-            <a:avLst/>
-          </a:prstGeom>
-          <a:noFill/>
-          <a:ln/>
-        </p:spPr>
-        <p:txBody>
-          <a:bodyPr wrap="square" rtlCol="0" anchor="ctr"/>
-          <a:lstStyle/>
-          <a:p>
-            <a:pPr indent="0" marL="0">
-              <a:buNone/>
-            </a:pPr>
-            <a:r>
-              <a:rPr lang="en-US" sz="1200" b="1" spc="200" kern="0" dirty="0">
-                <a:solidFill>
-                  <a:srgbClr val="B23A48"/>
-                </a:solidFill>
-                <a:latin typeface="Calibri" pitchFamily="34" charset="0"/>
-                <a:ea typeface="Calibri" pitchFamily="34" charset="-122"/>
-                <a:cs typeface="Calibri" pitchFamily="34" charset="-120"/>
-              </a:rPr>
-              <a:t>RESULTADO — NIVEL A · 18 VARIABLES</a:t>
-            </a:r>
-            <a:endParaRPr lang="en-US" sz="1200" dirty="0"/>
-          </a:p>
-        </p:txBody>
-      </p:sp>
-      <p:sp>
-        <p:nvSpPr>
-          <p:cNvPr id="3" name="Text 1"/>
-          <p:cNvSpPr/>
-          <p:nvPr/>
-        </p:nvSpPr>
-        <p:spPr>
-          <a:xfrm>
-            <a:off x="548640" y="685800"/>
-            <a:ext cx="11064240" cy="822960"/>
-          </a:xfrm>
-          <a:prstGeom prst="rect">
-            <a:avLst/>
-          </a:prstGeom>
-          <a:noFill/>
-          <a:ln/>
-        </p:spPr>
-        <p:txBody>
-          <a:bodyPr wrap="square" rtlCol="0" anchor="ctr"/>
-          <a:lstStyle/>
-          <a:p>
-            <a:pPr indent="0" marL="0">
-              <a:buNone/>
-            </a:pPr>
-            <a:r>
-              <a:rPr lang="en-US" sz="3000" b="1" dirty="0">
-                <a:solidFill>
-                  <a:srgbClr val="1E2761"/>
-                </a:solidFill>
-                <a:latin typeface="Cambria" pitchFamily="34" charset="0"/>
-                <a:ea typeface="Cambria" pitchFamily="34" charset="-122"/>
-                <a:cs typeface="Cambria" pitchFamily="34" charset="-120"/>
-              </a:rPr>
-              <a:t>Empata en precisión. Gana en parsimonia. Pierde en estabilidad.</a:t>
-            </a:r>
-            <a:endParaRPr lang="en-US" sz="3000" dirty="0"/>
-          </a:p>
-        </p:txBody>
-      </p:sp>
-      <p:graphicFrame>
-        <p:nvGraphicFramePr>
-          <p:cNvPr id="4" name="Chart 0" descr=""/>
-          <p:cNvGraphicFramePr/>
-          <p:nvPr/>
-        </p:nvGraphicFramePr>
-        <p:xfrm>
-          <a:off x="548640" y="1600200"/>
-          <a:ext cx="6035040" cy="4206240"/>
-        </p:xfrm>
-        <a:graphic xmlns:a="http://schemas.openxmlformats.org/drawingml/2006/main">
-          <a:graphicData uri="http://schemas.openxmlformats.org/drawingml/2006/chart">
-            <c:chart xmlns:c="http://schemas.openxmlformats.org/drawingml/2006/chart" r:id="rId1"/>
-          </a:graphicData>
-        </a:graphic>
-      </p:graphicFrame>
-      <p:sp>
-        <p:nvSpPr>
-          <p:cNvPr id="5" name="Shape 2"/>
-          <p:cNvSpPr/>
-          <p:nvPr/>
-        </p:nvSpPr>
-        <p:spPr>
-          <a:xfrm>
-            <a:off x="6903720" y="1737360"/>
-            <a:ext cx="4754880" cy="1234440"/>
-          </a:xfrm>
-          <a:prstGeom prst="roundRect">
-            <a:avLst>
-              <a:gd name="adj" fmla="val 7407"/>
-            </a:avLst>
-          </a:prstGeom>
-          <a:solidFill>
-            <a:srgbClr val="F3F5FC"/>
-          </a:solidFill>
-          <a:ln/>
-        </p:spPr>
-      </p:sp>
-      <p:sp>
-        <p:nvSpPr>
-          <p:cNvPr id="6" name="Text 3"/>
-          <p:cNvSpPr/>
-          <p:nvPr/>
-        </p:nvSpPr>
-        <p:spPr>
-          <a:xfrm>
-            <a:off x="7132320" y="1847088"/>
-            <a:ext cx="4297680" cy="365760"/>
-          </a:xfrm>
-          <a:prstGeom prst="rect">
-            <a:avLst/>
-          </a:prstGeom>
-          <a:noFill/>
-          <a:ln/>
-        </p:spPr>
-        <p:txBody>
-          <a:bodyPr wrap="square" rtlCol="0" anchor="ctr"/>
-          <a:lstStyle/>
-          <a:p>
-            <a:pPr indent="0" marL="0">
-              <a:buNone/>
-            </a:pPr>
-            <a:r>
-              <a:rPr lang="en-US" sz="1350" b="1" dirty="0">
-                <a:solidFill>
-                  <a:srgbClr val="1E2761"/>
-                </a:solidFill>
-                <a:latin typeface="Cambria" pitchFamily="34" charset="0"/>
-                <a:ea typeface="Cambria" pitchFamily="34" charset="-122"/>
-                <a:cs typeface="Cambria" pitchFamily="34" charset="-120"/>
-              </a:rPr>
-              <a:t>Sin diferencia significativa</a:t>
-            </a:r>
-            <a:endParaRPr lang="en-US" sz="1350" dirty="0"/>
-          </a:p>
-        </p:txBody>
-      </p:sp>
-      <p:sp>
-        <p:nvSpPr>
-          <p:cNvPr id="7" name="Text 4"/>
-          <p:cNvSpPr/>
-          <p:nvPr/>
-        </p:nvSpPr>
-        <p:spPr>
-          <a:xfrm>
-            <a:off x="7132320" y="2240280"/>
-            <a:ext cx="4297680" cy="640080"/>
-          </a:xfrm>
-          <a:prstGeom prst="rect">
-            <a:avLst/>
-          </a:prstGeom>
-          <a:noFill/>
-          <a:ln/>
-        </p:spPr>
-        <p:txBody>
-          <a:bodyPr wrap="square" rtlCol="0" anchor="ctr"/>
-          <a:lstStyle/>
-          <a:p>
-            <a:pPr indent="0" marL="0">
-              <a:buNone/>
-            </a:pPr>
-            <a:r>
-              <a:rPr lang="en-US" sz="1150" dirty="0">
-                <a:solidFill>
-                  <a:srgbClr val="1F2937"/>
-                </a:solidFill>
-                <a:latin typeface="Calibri" pitchFamily="34" charset="0"/>
-                <a:ea typeface="Calibri" pitchFamily="34" charset="-122"/>
-                <a:cs typeface="Calibri" pitchFamily="34" charset="-120"/>
-              </a:rPr>
-              <a:t>Nemenyi no encuentra ninguna diferencia individual QUBO-vs-clásico.</a:t>
-            </a:r>
-            <a:endParaRPr lang="en-US" sz="1150" dirty="0"/>
-          </a:p>
-        </p:txBody>
-      </p:sp>
-      <p:sp>
-        <p:nvSpPr>
-          <p:cNvPr id="8" name="Shape 5"/>
-          <p:cNvSpPr/>
-          <p:nvPr/>
-        </p:nvSpPr>
-        <p:spPr>
-          <a:xfrm>
-            <a:off x="6903720" y="3154680"/>
-            <a:ext cx="4754880" cy="1234440"/>
-          </a:xfrm>
-          <a:prstGeom prst="roundRect">
-            <a:avLst>
-              <a:gd name="adj" fmla="val 7407"/>
-            </a:avLst>
-          </a:prstGeom>
-          <a:solidFill>
-            <a:srgbClr val="F3F5FC"/>
-          </a:solidFill>
-          <a:ln/>
-        </p:spPr>
-      </p:sp>
-      <p:sp>
-        <p:nvSpPr>
-          <p:cNvPr id="9" name="Text 6"/>
-          <p:cNvSpPr/>
-          <p:nvPr/>
-        </p:nvSpPr>
-        <p:spPr>
-          <a:xfrm>
-            <a:off x="7132320" y="3264408"/>
-            <a:ext cx="4297680" cy="365760"/>
-          </a:xfrm>
-          <a:prstGeom prst="rect">
-            <a:avLst/>
-          </a:prstGeom>
-          <a:noFill/>
-          <a:ln/>
-        </p:spPr>
-        <p:txBody>
-          <a:bodyPr wrap="square" rtlCol="0" anchor="ctr"/>
-          <a:lstStyle/>
-          <a:p>
-            <a:pPr indent="0" marL="0">
-              <a:buNone/>
-            </a:pPr>
-            <a:r>
-              <a:rPr lang="en-US" sz="1350" b="1" dirty="0">
-                <a:solidFill>
-                  <a:srgbClr val="1E2761"/>
-                </a:solidFill>
-                <a:latin typeface="Cambria" pitchFamily="34" charset="0"/>
-                <a:ea typeface="Cambria" pitchFamily="34" charset="-122"/>
-                <a:cs typeface="Cambria" pitchFamily="34" charset="-120"/>
-              </a:rPr>
-              <a:t>8.8 variables vs. 13.3 de LASSO</a:t>
-            </a:r>
-            <a:endParaRPr lang="en-US" sz="1350" dirty="0"/>
-          </a:p>
-        </p:txBody>
-      </p:sp>
-      <p:sp>
-        <p:nvSpPr>
-          <p:cNvPr id="10" name="Text 7"/>
-          <p:cNvSpPr/>
-          <p:nvPr/>
-        </p:nvSpPr>
-        <p:spPr>
-          <a:xfrm>
-            <a:off x="7132320" y="3657600"/>
-            <a:ext cx="4297680" cy="640080"/>
-          </a:xfrm>
-          <a:prstGeom prst="rect">
-            <a:avLst/>
-          </a:prstGeom>
-          <a:noFill/>
-          <a:ln/>
-        </p:spPr>
-        <p:txBody>
-          <a:bodyPr wrap="square" rtlCol="0" anchor="ctr"/>
-          <a:lstStyle/>
-          <a:p>
-            <a:pPr indent="0" marL="0">
-              <a:buNone/>
-            </a:pPr>
-            <a:r>
-              <a:rPr lang="en-US" sz="1150" dirty="0">
-                <a:solidFill>
-                  <a:srgbClr val="1F2937"/>
-                </a:solidFill>
-                <a:latin typeface="Calibri" pitchFamily="34" charset="0"/>
-                <a:ea typeface="Calibri" pitchFamily="34" charset="-122"/>
-                <a:cs typeface="Calibri" pitchFamily="34" charset="-120"/>
-              </a:rPr>
-              <a:t>Modelo final más chico y auditable.</a:t>
-            </a:r>
-            <a:endParaRPr lang="en-US" sz="1150" dirty="0"/>
-          </a:p>
-        </p:txBody>
-      </p:sp>
-      <p:sp>
-        <p:nvSpPr>
-          <p:cNvPr id="11" name="Shape 8"/>
-          <p:cNvSpPr/>
-          <p:nvPr/>
-        </p:nvSpPr>
-        <p:spPr>
-          <a:xfrm>
-            <a:off x="6903720" y="4572000"/>
-            <a:ext cx="4754880" cy="1234440"/>
-          </a:xfrm>
-          <a:prstGeom prst="roundRect">
-            <a:avLst>
-              <a:gd name="adj" fmla="val 7407"/>
-            </a:avLst>
-          </a:prstGeom>
-          <a:solidFill>
-            <a:srgbClr val="F3F5FC"/>
-          </a:solidFill>
-          <a:ln/>
-        </p:spPr>
-      </p:sp>
-      <p:sp>
-        <p:nvSpPr>
-          <p:cNvPr id="12" name="Text 9"/>
-          <p:cNvSpPr/>
-          <p:nvPr/>
-        </p:nvSpPr>
-        <p:spPr>
-          <a:xfrm>
-            <a:off x="7132320" y="4681728"/>
-            <a:ext cx="4297680" cy="365760"/>
-          </a:xfrm>
-          <a:prstGeom prst="rect">
-            <a:avLst/>
-          </a:prstGeom>
-          <a:noFill/>
-          <a:ln/>
-        </p:spPr>
-        <p:txBody>
-          <a:bodyPr wrap="square" rtlCol="0" anchor="ctr"/>
-          <a:lstStyle/>
-          <a:p>
-            <a:pPr indent="0" marL="0">
-              <a:buNone/>
-            </a:pPr>
-            <a:r>
-              <a:rPr lang="en-US" sz="1350" b="1" dirty="0">
-                <a:solidFill>
-                  <a:srgbClr val="1E2761"/>
-                </a:solidFill>
-                <a:latin typeface="Cambria" pitchFamily="34" charset="0"/>
-                <a:ea typeface="Cambria" pitchFamily="34" charset="-122"/>
-                <a:cs typeface="Cambria" pitchFamily="34" charset="-120"/>
-              </a:rPr>
-              <a:t>Estabilidad más baja</a:t>
-            </a:r>
-            <a:endParaRPr lang="en-US" sz="1350" dirty="0"/>
-          </a:p>
-        </p:txBody>
-      </p:sp>
-      <p:sp>
-        <p:nvSpPr>
-          <p:cNvPr id="13" name="Text 10"/>
-          <p:cNvSpPr/>
-          <p:nvPr/>
-        </p:nvSpPr>
-        <p:spPr>
-          <a:xfrm>
-            <a:off x="7132320" y="5074920"/>
-            <a:ext cx="4297680" cy="640080"/>
-          </a:xfrm>
-          <a:prstGeom prst="rect">
-            <a:avLst/>
-          </a:prstGeom>
-          <a:noFill/>
-          <a:ln/>
-        </p:spPr>
-        <p:txBody>
-          <a:bodyPr wrap="square" rtlCol="0" anchor="ctr"/>
-          <a:lstStyle/>
-          <a:p>
-            <a:pPr indent="0" marL="0">
-              <a:buNone/>
-            </a:pPr>
-            <a:r>
-              <a:rPr lang="en-US" sz="1150" dirty="0">
-                <a:solidFill>
-                  <a:srgbClr val="1F2937"/>
-                </a:solidFill>
-                <a:latin typeface="Calibri" pitchFamily="34" charset="0"/>
-                <a:ea typeface="Calibri" pitchFamily="34" charset="-122"/>
-                <a:cs typeface="Calibri" pitchFamily="34" charset="-120"/>
-              </a:rPr>
-              <a:t>Jaccard 0.45 (QUBO) vs. 0.64 (LASSO): elige variables algo distintas cada corrida.</a:t>
-            </a:r>
-            <a:endParaRPr lang="en-US" sz="1150" dirty="0"/>
-          </a:p>
-        </p:txBody>
-      </p:sp>
-      <p:sp>
-        <p:nvSpPr>
-          <p:cNvPr id="14" name="Text 11"/>
-          <p:cNvSpPr/>
-          <p:nvPr/>
-        </p:nvSpPr>
-        <p:spPr>
-          <a:xfrm>
-            <a:off x="11521440" y="6446520"/>
-            <a:ext cx="548640" cy="274320"/>
-          </a:xfrm>
-          <a:prstGeom prst="rect">
-            <a:avLst/>
-          </a:prstGeom>
-          <a:noFill/>
-          <a:ln/>
-        </p:spPr>
-        <p:txBody>
-          <a:bodyPr wrap="square" rtlCol="0" anchor="ctr"/>
-          <a:lstStyle/>
-          <a:p>
-            <a:pPr algn="r" indent="0" marL="0">
-              <a:buNone/>
-            </a:pPr>
-            <a:r>
-              <a:rPr lang="en-US" sz="1000" dirty="0">
-                <a:solidFill>
-                  <a:srgbClr val="6B7280"/>
                 </a:solidFill>
                 <a:latin typeface="Calibri" pitchFamily="34" charset="0"/>
                 <a:ea typeface="Calibri" pitchFamily="34" charset="-122"/>
@@ -6161,7 +6786,7 @@
                 <a:ea typeface="Calibri" pitchFamily="34" charset="-122"/>
                 <a:cs typeface="Calibri" pitchFamily="34" charset="-120"/>
               </a:rPr>
-              <a:t>RESULTADO — NIVEL B · 45 VARIABLES</a:t>
+              <a:t>RESULTADO — NIVEL A · 18 VARIABLES</a:t>
             </a:r>
             <a:endParaRPr lang="en-US" sz="1200" dirty="0"/>
           </a:p>
@@ -6192,7 +6817,7 @@
               <a:buNone/>
             </a:pPr>
             <a:r>
-              <a:rPr lang="en-US" sz="3000" b="1" dirty="0">
+              <a:rPr lang="en-US" sz="2500" b="1" dirty="0">
                 <a:solidFill>
                   <a:srgbClr val="1E2761"/>
                 </a:solidFill>
@@ -6200,9 +6825,9 @@
                 <a:ea typeface="Cambria" pitchFamily="34" charset="-122"/>
                 <a:cs typeface="Cambria" pitchFamily="34" charset="-120"/>
               </a:rPr>
-              <a:t>Aquí sí pierde — y sabemos exactamente por qué</a:t>
-            </a:r>
-            <a:endParaRPr lang="en-US" sz="3000" dirty="0"/>
+              <a:t>Empata en precisión. Gana en parsimonia. Pierde en estabilidad.</a:t>
+            </a:r>
+            <a:endParaRPr lang="en-US" sz="2500" dirty="0"/>
           </a:p>
         </p:txBody>
       </p:sp>
@@ -6231,15 +6856,15 @@
         <p:spPr>
           <a:xfrm>
             <a:off x="6903720" y="1737360"/>
-            <a:ext cx="4754880" cy="2331720"/>
+            <a:ext cx="4754880" cy="1234440"/>
           </a:xfrm>
           <a:prstGeom prst="roundRect">
             <a:avLst>
-              <a:gd name="adj" fmla="val 3922"/>
+              <a:gd name="adj" fmla="val 7407"/>
             </a:avLst>
           </a:prstGeom>
           <a:solidFill>
-            <a:srgbClr val="FDECEE"/>
+            <a:srgbClr val="F3F5FC"/>
           </a:solidFill>
           <a:ln/>
         </p:spPr>
@@ -6252,7 +6877,7 @@
         </p:nvSpPr>
         <p:spPr>
           <a:xfrm>
-            <a:off x="7132320" y="1874520"/>
+            <a:off x="7132320" y="1847088"/>
             <a:ext cx="4297680" cy="365760"/>
           </a:xfrm>
           <a:prstGeom prst="rect">
@@ -6269,17 +6894,17 @@
               <a:buNone/>
             </a:pPr>
             <a:r>
-              <a:rPr lang="en-US" sz="1400" b="1" dirty="0">
-                <a:solidFill>
-                  <a:srgbClr val="B23A48"/>
+              <a:rPr lang="en-US" sz="1350" b="1" dirty="0">
+                <a:solidFill>
+                  <a:srgbClr val="1E2761"/>
                 </a:solidFill>
                 <a:latin typeface="Cambria" pitchFamily="34" charset="0"/>
                 <a:ea typeface="Cambria" pitchFamily="34" charset="-122"/>
                 <a:cs typeface="Cambria" pitchFamily="34" charset="-120"/>
               </a:rPr>
-              <a:t>Diferencia real, no ruido</a:t>
-            </a:r>
-            <a:endParaRPr lang="en-US" sz="1400" dirty="0"/>
+              <a:t>Sin diferencia significativa</a:t>
+            </a:r>
+            <a:endParaRPr lang="en-US" sz="1350" dirty="0"/>
           </a:p>
         </p:txBody>
       </p:sp>
@@ -6291,7 +6916,7 @@
         </p:nvSpPr>
         <p:spPr>
           <a:xfrm>
-            <a:off x="7132320" y="2286000"/>
+            <a:off x="7132320" y="2240280"/>
             <a:ext cx="4297680" cy="640080"/>
           </a:xfrm>
           <a:prstGeom prst="rect">
@@ -6308,7 +6933,7 @@
               <a:buNone/>
             </a:pPr>
             <a:r>
-              <a:rPr lang="en-US" sz="1200" dirty="0">
+              <a:rPr lang="en-US" sz="1150" dirty="0">
                 <a:solidFill>
                   <a:srgbClr val="1F2937"/>
                 </a:solidFill>
@@ -6316,38 +6941,99 @@
                 <a:ea typeface="Calibri" pitchFamily="34" charset="-122"/>
                 <a:cs typeface="Calibri" pitchFamily="34" charset="-120"/>
               </a:rPr>
-              <a:t>Stepwise-AIC supera a QUBO con significancia estadística (prueba de Nemenyi, p&lt;0.05).</a:t>
-            </a:r>
-            <a:endParaRPr lang="en-US" sz="1200" dirty="0"/>
-          </a:p>
-        </p:txBody>
-      </p:sp>
-      <p:sp>
-        <p:nvSpPr>
-          <p:cNvPr id="8" name="Text 5"/>
-          <p:cNvSpPr/>
-          <p:nvPr/>
-        </p:nvSpPr>
-        <p:spPr>
-          <a:xfrm>
-            <a:off x="7132320" y="2926080"/>
-            <a:ext cx="4297680" cy="1051560"/>
-          </a:xfrm>
-          <a:prstGeom prst="rect">
-            <a:avLst/>
-          </a:prstGeom>
-          <a:noFill/>
-          <a:ln/>
-        </p:spPr>
-        <p:txBody>
-          <a:bodyPr wrap="square" rtlCol="0" anchor="ctr"/>
-          <a:lstStyle/>
-          <a:p>
-            <a:pPr indent="0" marL="0">
-              <a:buNone/>
-            </a:pPr>
-            <a:r>
-              <a:rPr lang="en-US" sz="1200" dirty="0">
+              <a:t>Nemenyi no encuentra ninguna diferencia individual QUBO-vs-clásico.</a:t>
+            </a:r>
+            <a:endParaRPr lang="en-US" sz="1150" dirty="0"/>
+          </a:p>
+        </p:txBody>
+      </p:sp>
+      <p:sp>
+        <p:nvSpPr>
+          <p:cNvPr id="8" name="Shape 5"/>
+          <p:cNvSpPr/>
+          <p:nvPr/>
+        </p:nvSpPr>
+        <p:spPr>
+          <a:xfrm>
+            <a:off x="6903720" y="3154680"/>
+            <a:ext cx="4754880" cy="1234440"/>
+          </a:xfrm>
+          <a:prstGeom prst="roundRect">
+            <a:avLst>
+              <a:gd name="adj" fmla="val 7407"/>
+            </a:avLst>
+          </a:prstGeom>
+          <a:solidFill>
+            <a:srgbClr val="F3F5FC"/>
+          </a:solidFill>
+          <a:ln/>
+        </p:spPr>
+      </p:sp>
+      <p:sp>
+        <p:nvSpPr>
+          <p:cNvPr id="9" name="Text 6"/>
+          <p:cNvSpPr/>
+          <p:nvPr/>
+        </p:nvSpPr>
+        <p:spPr>
+          <a:xfrm>
+            <a:off x="7132320" y="3264408"/>
+            <a:ext cx="4297680" cy="365760"/>
+          </a:xfrm>
+          <a:prstGeom prst="rect">
+            <a:avLst/>
+          </a:prstGeom>
+          <a:noFill/>
+          <a:ln/>
+        </p:spPr>
+        <p:txBody>
+          <a:bodyPr wrap="square" rtlCol="0" anchor="ctr"/>
+          <a:lstStyle/>
+          <a:p>
+            <a:pPr indent="0" marL="0">
+              <a:buNone/>
+            </a:pPr>
+            <a:r>
+              <a:rPr lang="en-US" sz="1350" b="1" dirty="0">
+                <a:solidFill>
+                  <a:srgbClr val="1E2761"/>
+                </a:solidFill>
+                <a:latin typeface="Cambria" pitchFamily="34" charset="0"/>
+                <a:ea typeface="Cambria" pitchFamily="34" charset="-122"/>
+                <a:cs typeface="Cambria" pitchFamily="34" charset="-120"/>
+              </a:rPr>
+              <a:t>8.8 variables vs. 13.3 de LASSO</a:t>
+            </a:r>
+            <a:endParaRPr lang="en-US" sz="1350" dirty="0"/>
+          </a:p>
+        </p:txBody>
+      </p:sp>
+      <p:sp>
+        <p:nvSpPr>
+          <p:cNvPr id="10" name="Text 7"/>
+          <p:cNvSpPr/>
+          <p:nvPr/>
+        </p:nvSpPr>
+        <p:spPr>
+          <a:xfrm>
+            <a:off x="7132320" y="3657600"/>
+            <a:ext cx="4297680" cy="640080"/>
+          </a:xfrm>
+          <a:prstGeom prst="rect">
+            <a:avLst/>
+          </a:prstGeom>
+          <a:noFill/>
+          <a:ln/>
+        </p:spPr>
+        <p:txBody>
+          <a:bodyPr wrap="square" rtlCol="0" anchor="ctr"/>
+          <a:lstStyle/>
+          <a:p>
+            <a:pPr indent="0" marL="0">
+              <a:buNone/>
+            </a:pPr>
+            <a:r>
+              <a:rPr lang="en-US" sz="1150" dirty="0">
                 <a:solidFill>
                   <a:srgbClr val="1F2937"/>
                 </a:solidFill>
@@ -6355,26 +7041,26 @@
                 <a:ea typeface="Calibri" pitchFamily="34" charset="-122"/>
                 <a:cs typeface="Calibri" pitchFamily="34" charset="-120"/>
               </a:rPr>
-              <a:t>Causa diagnosticada: el criterio deja entrar gratis a variables de ruido puro cuando la cardinalidad exigida supera las variables genuinamente útiles. Confirmado en los 3 solucionadores probados.</a:t>
-            </a:r>
-            <a:endParaRPr lang="en-US" sz="1200" dirty="0"/>
-          </a:p>
-        </p:txBody>
-      </p:sp>
-      <p:sp>
-        <p:nvSpPr>
-          <p:cNvPr id="9" name="Shape 6"/>
-          <p:cNvSpPr/>
-          <p:nvPr/>
-        </p:nvSpPr>
-        <p:spPr>
-          <a:xfrm>
-            <a:off x="6903720" y="4251960"/>
-            <a:ext cx="4754880" cy="1417320"/>
+              <a:t>Modelo final más chico y auditable.</a:t>
+            </a:r>
+            <a:endParaRPr lang="en-US" sz="1150" dirty="0"/>
+          </a:p>
+        </p:txBody>
+      </p:sp>
+      <p:sp>
+        <p:nvSpPr>
+          <p:cNvPr id="11" name="Shape 8"/>
+          <p:cNvSpPr/>
+          <p:nvPr/>
+        </p:nvSpPr>
+        <p:spPr>
+          <a:xfrm>
+            <a:off x="6903720" y="4572000"/>
+            <a:ext cx="4754880" cy="1234440"/>
           </a:xfrm>
           <a:prstGeom prst="roundRect">
             <a:avLst>
-              <a:gd name="adj" fmla="val 6452"/>
+              <a:gd name="adj" fmla="val 7407"/>
             </a:avLst>
           </a:prstGeom>
           <a:solidFill>
@@ -6385,30 +7071,30 @@
       </p:sp>
       <p:sp>
         <p:nvSpPr>
-          <p:cNvPr id="10" name="Text 7"/>
-          <p:cNvSpPr/>
-          <p:nvPr/>
-        </p:nvSpPr>
-        <p:spPr>
-          <a:xfrm>
-            <a:off x="7132320" y="4370832"/>
-            <a:ext cx="4297680" cy="320040"/>
-          </a:xfrm>
-          <a:prstGeom prst="rect">
-            <a:avLst/>
-          </a:prstGeom>
-          <a:noFill/>
-          <a:ln/>
-        </p:spPr>
-        <p:txBody>
-          <a:bodyPr wrap="square" rtlCol="0" anchor="ctr"/>
-          <a:lstStyle/>
-          <a:p>
-            <a:pPr indent="0" marL="0">
-              <a:buNone/>
-            </a:pPr>
-            <a:r>
-              <a:rPr lang="en-US" sz="1300" b="1" dirty="0">
+          <p:cNvPr id="12" name="Text 9"/>
+          <p:cNvSpPr/>
+          <p:nvPr/>
+        </p:nvSpPr>
+        <p:spPr>
+          <a:xfrm>
+            <a:off x="7132320" y="4681728"/>
+            <a:ext cx="4297680" cy="365760"/>
+          </a:xfrm>
+          <a:prstGeom prst="rect">
+            <a:avLst/>
+          </a:prstGeom>
+          <a:noFill/>
+          <a:ln/>
+        </p:spPr>
+        <p:txBody>
+          <a:bodyPr wrap="square" rtlCol="0" anchor="ctr"/>
+          <a:lstStyle/>
+          <a:p>
+            <a:pPr indent="0" marL="0">
+              <a:buNone/>
+            </a:pPr>
+            <a:r>
+              <a:rPr lang="en-US" sz="1350" b="1" dirty="0">
                 <a:solidFill>
                   <a:srgbClr val="1E2761"/>
                 </a:solidFill>
@@ -6416,46 +7102,46 @@
                 <a:ea typeface="Cambria" pitchFamily="34" charset="-122"/>
                 <a:cs typeface="Cambria" pitchFamily="34" charset="-120"/>
               </a:rPr>
-              <a:t>No es un parche cosmético</a:t>
-            </a:r>
-            <a:endParaRPr lang="en-US" sz="1300" dirty="0"/>
-          </a:p>
-        </p:txBody>
-      </p:sp>
-      <p:sp>
-        <p:nvSpPr>
-          <p:cNvPr id="11" name="Text 8"/>
-          <p:cNvSpPr/>
-          <p:nvPr/>
-        </p:nvSpPr>
-        <p:spPr>
-          <a:xfrm>
-            <a:off x="7132320" y="4709160"/>
-            <a:ext cx="4297680" cy="868680"/>
-          </a:xfrm>
-          <a:prstGeom prst="rect">
-            <a:avLst/>
-          </a:prstGeom>
-          <a:noFill/>
-          <a:ln/>
-        </p:spPr>
-        <p:txBody>
-          <a:bodyPr wrap="square" rtlCol="0" anchor="ctr"/>
-          <a:lstStyle/>
-          <a:p>
-            <a:pPr indent="0" marL="0">
-              <a:buNone/>
-            </a:pPr>
-            <a:r>
-              <a:rPr lang="en-US" sz="1150" i="1" dirty="0">
-                <a:solidFill>
-                  <a:srgbClr val="6B7280"/>
+              <a:t>Estabilidad más baja</a:t>
+            </a:r>
+            <a:endParaRPr lang="en-US" sz="1350" dirty="0"/>
+          </a:p>
+        </p:txBody>
+      </p:sp>
+      <p:sp>
+        <p:nvSpPr>
+          <p:cNvPr id="13" name="Text 10"/>
+          <p:cNvSpPr/>
+          <p:nvPr/>
+        </p:nvSpPr>
+        <p:spPr>
+          <a:xfrm>
+            <a:off x="7132320" y="5074920"/>
+            <a:ext cx="4297680" cy="640080"/>
+          </a:xfrm>
+          <a:prstGeom prst="rect">
+            <a:avLst/>
+          </a:prstGeom>
+          <a:noFill/>
+          <a:ln/>
+        </p:spPr>
+        <p:txBody>
+          <a:bodyPr wrap="square" rtlCol="0" anchor="ctr"/>
+          <a:lstStyle/>
+          <a:p>
+            <a:pPr indent="0" marL="0">
+              <a:buNone/>
+            </a:pPr>
+            <a:r>
+              <a:rPr lang="en-US" sz="1150" dirty="0">
+                <a:solidFill>
+                  <a:srgbClr val="1F2937"/>
                 </a:solidFill>
                 <a:latin typeface="Calibri" pitchFamily="34" charset="0"/>
                 <a:ea typeface="Calibri" pitchFamily="34" charset="-122"/>
                 <a:cs typeface="Calibri" pitchFamily="34" charset="-120"/>
               </a:rPr>
-              <a:t>Probamos subir la sensibilidad del estimador de relevancia: no separa limpiamente ruido de señal débil real. El fix correcto es de v2, no de una tarde.</a:t>
+              <a:t>Jaccard 0.45 (QUBO) vs. 0.64 (LASSO): elige variables algo distintas cada corrida.</a:t>
             </a:r>
             <a:endParaRPr lang="en-US" sz="1150" dirty="0"/>
           </a:p>
@@ -6463,7 +7149,7 @@
       </p:sp>
       <p:sp>
         <p:nvSpPr>
-          <p:cNvPr id="12" name="Text 9"/>
+          <p:cNvPr id="14" name="Text 11"/>
           <p:cNvSpPr/>
           <p:nvPr/>
         </p:nvSpPr>
@@ -6511,6 +7197,410 @@
 <file path=ppt/slides/slide7.xml><?xml version="1.0" encoding="utf-8"?>
 <p:sld xmlns:a="http://schemas.openxmlformats.org/drawingml/2006/main" xmlns:r="http://schemas.openxmlformats.org/officeDocument/2006/relationships" xmlns:p="http://schemas.openxmlformats.org/presentationml/2006/main">
   <p:cSld name="Slide 7">
+    <p:bg>
+      <p:bgPr>
+        <a:solidFill>
+          <a:srgbClr val="FFFFFF"/>
+        </a:solidFill>
+      </p:bgPr>
+    </p:bg>
+    <p:spTree>
+      <p:nvGrpSpPr>
+        <p:cNvPr id="1" name=""/>
+        <p:cNvGrpSpPr/>
+        <p:nvPr/>
+      </p:nvGrpSpPr>
+      <p:grpSpPr>
+        <a:xfrm>
+          <a:off x="0" y="0"/>
+          <a:ext cx="0" cy="0"/>
+          <a:chOff x="0" y="0"/>
+          <a:chExt cx="0" cy="0"/>
+        </a:xfrm>
+      </p:grpSpPr>
+      <p:sp>
+        <p:nvSpPr>
+          <p:cNvPr id="2" name="Text 0"/>
+          <p:cNvSpPr/>
+          <p:nvPr/>
+        </p:nvSpPr>
+        <p:spPr>
+          <a:xfrm>
+            <a:off x="548640" y="411480"/>
+            <a:ext cx="7315200" cy="320040"/>
+          </a:xfrm>
+          <a:prstGeom prst="rect">
+            <a:avLst/>
+          </a:prstGeom>
+          <a:noFill/>
+          <a:ln/>
+        </p:spPr>
+        <p:txBody>
+          <a:bodyPr wrap="square" rtlCol="0" anchor="ctr"/>
+          <a:lstStyle/>
+          <a:p>
+            <a:pPr indent="0" marL="0">
+              <a:buNone/>
+            </a:pPr>
+            <a:r>
+              <a:rPr lang="en-US" sz="1200" b="1" spc="200" kern="0" dirty="0">
+                <a:solidFill>
+                  <a:srgbClr val="B23A48"/>
+                </a:solidFill>
+                <a:latin typeface="Calibri" pitchFamily="34" charset="0"/>
+                <a:ea typeface="Calibri" pitchFamily="34" charset="-122"/>
+                <a:cs typeface="Calibri" pitchFamily="34" charset="-120"/>
+              </a:rPr>
+              <a:t>RESULTADO — NIVEL B · 45 VARIABLES</a:t>
+            </a:r>
+            <a:endParaRPr lang="en-US" sz="1200" dirty="0"/>
+          </a:p>
+        </p:txBody>
+      </p:sp>
+      <p:sp>
+        <p:nvSpPr>
+          <p:cNvPr id="3" name="Text 1"/>
+          <p:cNvSpPr/>
+          <p:nvPr/>
+        </p:nvSpPr>
+        <p:spPr>
+          <a:xfrm>
+            <a:off x="548640" y="685800"/>
+            <a:ext cx="11064240" cy="822960"/>
+          </a:xfrm>
+          <a:prstGeom prst="rect">
+            <a:avLst/>
+          </a:prstGeom>
+          <a:noFill/>
+          <a:ln/>
+        </p:spPr>
+        <p:txBody>
+          <a:bodyPr wrap="square" rtlCol="0" anchor="ctr"/>
+          <a:lstStyle/>
+          <a:p>
+            <a:pPr indent="0" marL="0">
+              <a:buNone/>
+            </a:pPr>
+            <a:r>
+              <a:rPr lang="en-US" sz="3000" b="1" dirty="0">
+                <a:solidFill>
+                  <a:srgbClr val="1E2761"/>
+                </a:solidFill>
+                <a:latin typeface="Cambria" pitchFamily="34" charset="0"/>
+                <a:ea typeface="Cambria" pitchFamily="34" charset="-122"/>
+                <a:cs typeface="Cambria" pitchFamily="34" charset="-120"/>
+              </a:rPr>
+              <a:t>Aquí sí pierde — y sabemos exactamente por qué</a:t>
+            </a:r>
+            <a:endParaRPr lang="en-US" sz="3000" dirty="0"/>
+          </a:p>
+        </p:txBody>
+      </p:sp>
+      <p:graphicFrame>
+        <p:nvGraphicFramePr>
+          <p:cNvPr id="4" name="Chart 0" descr=""/>
+          <p:cNvGraphicFramePr/>
+          <p:nvPr/>
+        </p:nvGraphicFramePr>
+        <p:xfrm>
+          <a:off x="548640" y="1600200"/>
+          <a:ext cx="6035040" cy="4206240"/>
+        </p:xfrm>
+        <a:graphic xmlns:a="http://schemas.openxmlformats.org/drawingml/2006/main">
+          <a:graphicData uri="http://schemas.openxmlformats.org/drawingml/2006/chart">
+            <c:chart xmlns:c="http://schemas.openxmlformats.org/drawingml/2006/chart" r:id="rId1"/>
+          </a:graphicData>
+        </a:graphic>
+      </p:graphicFrame>
+      <p:sp>
+        <p:nvSpPr>
+          <p:cNvPr id="5" name="Shape 2"/>
+          <p:cNvSpPr/>
+          <p:nvPr/>
+        </p:nvSpPr>
+        <p:spPr>
+          <a:xfrm>
+            <a:off x="6903720" y="1737360"/>
+            <a:ext cx="4754880" cy="2331720"/>
+          </a:xfrm>
+          <a:prstGeom prst="roundRect">
+            <a:avLst>
+              <a:gd name="adj" fmla="val 3922"/>
+            </a:avLst>
+          </a:prstGeom>
+          <a:solidFill>
+            <a:srgbClr val="FDECEE"/>
+          </a:solidFill>
+          <a:ln/>
+        </p:spPr>
+      </p:sp>
+      <p:sp>
+        <p:nvSpPr>
+          <p:cNvPr id="6" name="Text 3"/>
+          <p:cNvSpPr/>
+          <p:nvPr/>
+        </p:nvSpPr>
+        <p:spPr>
+          <a:xfrm>
+            <a:off x="7132320" y="1874520"/>
+            <a:ext cx="4297680" cy="365760"/>
+          </a:xfrm>
+          <a:prstGeom prst="rect">
+            <a:avLst/>
+          </a:prstGeom>
+          <a:noFill/>
+          <a:ln/>
+        </p:spPr>
+        <p:txBody>
+          <a:bodyPr wrap="square" rtlCol="0" anchor="ctr"/>
+          <a:lstStyle/>
+          <a:p>
+            <a:pPr indent="0" marL="0">
+              <a:buNone/>
+            </a:pPr>
+            <a:r>
+              <a:rPr lang="en-US" sz="1400" b="1" dirty="0">
+                <a:solidFill>
+                  <a:srgbClr val="B23A48"/>
+                </a:solidFill>
+                <a:latin typeface="Cambria" pitchFamily="34" charset="0"/>
+                <a:ea typeface="Cambria" pitchFamily="34" charset="-122"/>
+                <a:cs typeface="Cambria" pitchFamily="34" charset="-120"/>
+              </a:rPr>
+              <a:t>Diferencia real, no ruido</a:t>
+            </a:r>
+            <a:endParaRPr lang="en-US" sz="1400" dirty="0"/>
+          </a:p>
+        </p:txBody>
+      </p:sp>
+      <p:sp>
+        <p:nvSpPr>
+          <p:cNvPr id="7" name="Text 4"/>
+          <p:cNvSpPr/>
+          <p:nvPr/>
+        </p:nvSpPr>
+        <p:spPr>
+          <a:xfrm>
+            <a:off x="7132320" y="2286000"/>
+            <a:ext cx="4297680" cy="640080"/>
+          </a:xfrm>
+          <a:prstGeom prst="rect">
+            <a:avLst/>
+          </a:prstGeom>
+          <a:noFill/>
+          <a:ln/>
+        </p:spPr>
+        <p:txBody>
+          <a:bodyPr wrap="square" rtlCol="0" anchor="ctr"/>
+          <a:lstStyle/>
+          <a:p>
+            <a:pPr indent="0" marL="0">
+              <a:buNone/>
+            </a:pPr>
+            <a:r>
+              <a:rPr lang="en-US" sz="1200" dirty="0">
+                <a:solidFill>
+                  <a:srgbClr val="1F2937"/>
+                </a:solidFill>
+                <a:latin typeface="Calibri" pitchFamily="34" charset="0"/>
+                <a:ea typeface="Calibri" pitchFamily="34" charset="-122"/>
+                <a:cs typeface="Calibri" pitchFamily="34" charset="-120"/>
+              </a:rPr>
+              <a:t>Stepwise-AIC supera a QUBO con significancia estadística (prueba de Nemenyi, p&lt;0.05).</a:t>
+            </a:r>
+            <a:endParaRPr lang="en-US" sz="1200" dirty="0"/>
+          </a:p>
+        </p:txBody>
+      </p:sp>
+      <p:sp>
+        <p:nvSpPr>
+          <p:cNvPr id="8" name="Text 5"/>
+          <p:cNvSpPr/>
+          <p:nvPr/>
+        </p:nvSpPr>
+        <p:spPr>
+          <a:xfrm>
+            <a:off x="7132320" y="2926080"/>
+            <a:ext cx="4297680" cy="1051560"/>
+          </a:xfrm>
+          <a:prstGeom prst="rect">
+            <a:avLst/>
+          </a:prstGeom>
+          <a:noFill/>
+          <a:ln/>
+        </p:spPr>
+        <p:txBody>
+          <a:bodyPr wrap="square" rtlCol="0" anchor="ctr"/>
+          <a:lstStyle/>
+          <a:p>
+            <a:pPr indent="0" marL="0">
+              <a:buNone/>
+            </a:pPr>
+            <a:r>
+              <a:rPr lang="en-US" sz="1200" dirty="0">
+                <a:solidFill>
+                  <a:srgbClr val="1F2937"/>
+                </a:solidFill>
+                <a:latin typeface="Calibri" pitchFamily="34" charset="0"/>
+                <a:ea typeface="Calibri" pitchFamily="34" charset="-122"/>
+                <a:cs typeface="Calibri" pitchFamily="34" charset="-120"/>
+              </a:rPr>
+              <a:t>Causa diagnosticada: el criterio deja entrar gratis a variables de ruido puro cuando la cardinalidad exigida supera las variables genuinamente útiles. Confirmado en los 3 solucionadores probados.</a:t>
+            </a:r>
+            <a:endParaRPr lang="en-US" sz="1200" dirty="0"/>
+          </a:p>
+        </p:txBody>
+      </p:sp>
+      <p:sp>
+        <p:nvSpPr>
+          <p:cNvPr id="9" name="Shape 6"/>
+          <p:cNvSpPr/>
+          <p:nvPr/>
+        </p:nvSpPr>
+        <p:spPr>
+          <a:xfrm>
+            <a:off x="6903720" y="4251960"/>
+            <a:ext cx="4754880" cy="1417320"/>
+          </a:xfrm>
+          <a:prstGeom prst="roundRect">
+            <a:avLst>
+              <a:gd name="adj" fmla="val 6452"/>
+            </a:avLst>
+          </a:prstGeom>
+          <a:solidFill>
+            <a:srgbClr val="F3F5FC"/>
+          </a:solidFill>
+          <a:ln/>
+        </p:spPr>
+      </p:sp>
+      <p:sp>
+        <p:nvSpPr>
+          <p:cNvPr id="10" name="Text 7"/>
+          <p:cNvSpPr/>
+          <p:nvPr/>
+        </p:nvSpPr>
+        <p:spPr>
+          <a:xfrm>
+            <a:off x="7132320" y="4370832"/>
+            <a:ext cx="4297680" cy="320040"/>
+          </a:xfrm>
+          <a:prstGeom prst="rect">
+            <a:avLst/>
+          </a:prstGeom>
+          <a:noFill/>
+          <a:ln/>
+        </p:spPr>
+        <p:txBody>
+          <a:bodyPr wrap="square" rtlCol="0" anchor="ctr"/>
+          <a:lstStyle/>
+          <a:p>
+            <a:pPr indent="0" marL="0">
+              <a:buNone/>
+            </a:pPr>
+            <a:r>
+              <a:rPr lang="en-US" sz="1300" b="1" dirty="0">
+                <a:solidFill>
+                  <a:srgbClr val="1E2761"/>
+                </a:solidFill>
+                <a:latin typeface="Cambria" pitchFamily="34" charset="0"/>
+                <a:ea typeface="Cambria" pitchFamily="34" charset="-122"/>
+                <a:cs typeface="Cambria" pitchFamily="34" charset="-120"/>
+              </a:rPr>
+              <a:t>No es un parche cosmético</a:t>
+            </a:r>
+            <a:endParaRPr lang="en-US" sz="1300" dirty="0"/>
+          </a:p>
+        </p:txBody>
+      </p:sp>
+      <p:sp>
+        <p:nvSpPr>
+          <p:cNvPr id="11" name="Text 8"/>
+          <p:cNvSpPr/>
+          <p:nvPr/>
+        </p:nvSpPr>
+        <p:spPr>
+          <a:xfrm>
+            <a:off x="7132320" y="4709160"/>
+            <a:ext cx="4297680" cy="868680"/>
+          </a:xfrm>
+          <a:prstGeom prst="rect">
+            <a:avLst/>
+          </a:prstGeom>
+          <a:noFill/>
+          <a:ln/>
+        </p:spPr>
+        <p:txBody>
+          <a:bodyPr wrap="square" rtlCol="0" anchor="ctr"/>
+          <a:lstStyle/>
+          <a:p>
+            <a:pPr indent="0" marL="0">
+              <a:buNone/>
+            </a:pPr>
+            <a:r>
+              <a:rPr lang="en-US" sz="1150" i="1" dirty="0">
+                <a:solidFill>
+                  <a:srgbClr val="6B7280"/>
+                </a:solidFill>
+                <a:latin typeface="Calibri" pitchFamily="34" charset="0"/>
+                <a:ea typeface="Calibri" pitchFamily="34" charset="-122"/>
+                <a:cs typeface="Calibri" pitchFamily="34" charset="-120"/>
+              </a:rPr>
+              <a:t>Probamos subir la sensibilidad del estimador de relevancia: no separa limpiamente ruido de señal débil real. El fix correcto es de v2, no de una tarde.</a:t>
+            </a:r>
+            <a:endParaRPr lang="en-US" sz="1150" dirty="0"/>
+          </a:p>
+        </p:txBody>
+      </p:sp>
+      <p:sp>
+        <p:nvSpPr>
+          <p:cNvPr id="12" name="Text 9"/>
+          <p:cNvSpPr/>
+          <p:nvPr/>
+        </p:nvSpPr>
+        <p:spPr>
+          <a:xfrm>
+            <a:off x="11521440" y="6446520"/>
+            <a:ext cx="548640" cy="274320"/>
+          </a:xfrm>
+          <a:prstGeom prst="rect">
+            <a:avLst/>
+          </a:prstGeom>
+          <a:noFill/>
+          <a:ln/>
+        </p:spPr>
+        <p:txBody>
+          <a:bodyPr wrap="square" rtlCol="0" anchor="ctr"/>
+          <a:lstStyle/>
+          <a:p>
+            <a:pPr algn="r" indent="0" marL="0">
+              <a:buNone/>
+            </a:pPr>
+            <a:r>
+              <a:rPr lang="en-US" sz="1000" dirty="0">
+                <a:solidFill>
+                  <a:srgbClr val="6B7280"/>
+                </a:solidFill>
+                <a:latin typeface="Calibri" pitchFamily="34" charset="0"/>
+                <a:ea typeface="Calibri" pitchFamily="34" charset="-122"/>
+                <a:cs typeface="Calibri" pitchFamily="34" charset="-120"/>
+              </a:rPr>
+              <a:t>07</a:t>
+            </a:r>
+            <a:endParaRPr lang="en-US" sz="1000" dirty="0"/>
+          </a:p>
+        </p:txBody>
+      </p:sp>
+    </p:spTree>
+  </p:cSld>
+  <p:clrMapOvr>
+    <a:masterClrMapping/>
+  </p:clrMapOvr>
+</p:sld>
+</file>
+
+<file path=ppt/slides/slide8.xml><?xml version="1.0" encoding="utf-8"?>
+<p:sld xmlns:a="http://schemas.openxmlformats.org/drawingml/2006/main" xmlns:r="http://schemas.openxmlformats.org/officeDocument/2006/relationships" xmlns:p="http://schemas.openxmlformats.org/presentationml/2006/main">
+  <p:cSld name="Slide 8">
     <p:bg>
       <p:bgPr>
         <a:solidFill>
@@ -6965,645 +8055,6 @@
               <a:rPr lang="en-US" sz="1000" dirty="0">
                 <a:solidFill>
                   <a:srgbClr val="7C8FC7"/>
-                </a:solidFill>
-                <a:latin typeface="Calibri" pitchFamily="34" charset="0"/>
-                <a:ea typeface="Calibri" pitchFamily="34" charset="-122"/>
-                <a:cs typeface="Calibri" pitchFamily="34" charset="-120"/>
-              </a:rPr>
-              <a:t>07</a:t>
-            </a:r>
-            <a:endParaRPr lang="en-US" sz="1000" dirty="0"/>
-          </a:p>
-        </p:txBody>
-      </p:sp>
-    </p:spTree>
-  </p:cSld>
-  <p:clrMapOvr>
-    <a:masterClrMapping/>
-  </p:clrMapOvr>
-</p:sld>
-</file>
-
-<file path=ppt/slides/slide8.xml><?xml version="1.0" encoding="utf-8"?>
-<p:sld xmlns:a="http://schemas.openxmlformats.org/drawingml/2006/main" xmlns:r="http://schemas.openxmlformats.org/officeDocument/2006/relationships" xmlns:p="http://schemas.openxmlformats.org/presentationml/2006/main">
-  <p:cSld name="Slide 8">
-    <p:bg>
-      <p:bgPr>
-        <a:solidFill>
-          <a:srgbClr val="FFFFFF"/>
-        </a:solidFill>
-      </p:bgPr>
-    </p:bg>
-    <p:spTree>
-      <p:nvGrpSpPr>
-        <p:cNvPr id="1" name=""/>
-        <p:cNvGrpSpPr/>
-        <p:nvPr/>
-      </p:nvGrpSpPr>
-      <p:grpSpPr>
-        <a:xfrm>
-          <a:off x="0" y="0"/>
-          <a:ext cx="0" cy="0"/>
-          <a:chOff x="0" y="0"/>
-          <a:chExt cx="0" cy="0"/>
-        </a:xfrm>
-      </p:grpSpPr>
-      <p:sp>
-        <p:nvSpPr>
-          <p:cNvPr id="2" name="Text 0"/>
-          <p:cNvSpPr/>
-          <p:nvPr/>
-        </p:nvSpPr>
-        <p:spPr>
-          <a:xfrm>
-            <a:off x="548640" y="411480"/>
-            <a:ext cx="7315200" cy="320040"/>
-          </a:xfrm>
-          <a:prstGeom prst="rect">
-            <a:avLst/>
-          </a:prstGeom>
-          <a:noFill/>
-          <a:ln/>
-        </p:spPr>
-        <p:txBody>
-          <a:bodyPr wrap="square" rtlCol="0" anchor="ctr"/>
-          <a:lstStyle/>
-          <a:p>
-            <a:pPr indent="0" marL="0">
-              <a:buNone/>
-            </a:pPr>
-            <a:r>
-              <a:rPr lang="en-US" sz="1200" b="1" spc="200" kern="0" dirty="0">
-                <a:solidFill>
-                  <a:srgbClr val="B23A48"/>
-                </a:solidFill>
-                <a:latin typeface="Calibri" pitchFamily="34" charset="0"/>
-                <a:ea typeface="Calibri" pitchFamily="34" charset="-122"/>
-                <a:cs typeface="Calibri" pitchFamily="34" charset="-120"/>
-              </a:rPr>
-              <a:t>EL ARGUMENTO REGULATORIO</a:t>
-            </a:r>
-            <a:endParaRPr lang="en-US" sz="1200" dirty="0"/>
-          </a:p>
-        </p:txBody>
-      </p:sp>
-      <p:sp>
-        <p:nvSpPr>
-          <p:cNvPr id="3" name="Text 1"/>
-          <p:cNvSpPr/>
-          <p:nvPr/>
-        </p:nvSpPr>
-        <p:spPr>
-          <a:xfrm>
-            <a:off x="548640" y="685800"/>
-            <a:ext cx="11064240" cy="822960"/>
-          </a:xfrm>
-          <a:prstGeom prst="rect">
-            <a:avLst/>
-          </a:prstGeom>
-          <a:noFill/>
-          <a:ln/>
-        </p:spPr>
-        <p:txBody>
-          <a:bodyPr wrap="square" rtlCol="0" anchor="ctr"/>
-          <a:lstStyle/>
-          <a:p>
-            <a:pPr indent="0" marL="0">
-              <a:buNone/>
-            </a:pPr>
-            <a:r>
-              <a:rPr lang="en-US" sz="3000" b="1" dirty="0">
-                <a:solidFill>
-                  <a:srgbClr val="1E2761"/>
-                </a:solidFill>
-                <a:latin typeface="Cambria" pitchFamily="34" charset="0"/>
-                <a:ea typeface="Cambria" pitchFamily="34" charset="-122"/>
-                <a:cs typeface="Cambria" pitchFamily="34" charset="-120"/>
-              </a:rPr>
-              <a:t>Lo que esto significa frente a la SEPS</a:t>
-            </a:r>
-            <a:endParaRPr lang="en-US" sz="3000" dirty="0"/>
-          </a:p>
-        </p:txBody>
-      </p:sp>
-      <p:sp>
-        <p:nvSpPr>
-          <p:cNvPr id="4" name="Shape 2"/>
-          <p:cNvSpPr/>
-          <p:nvPr/>
-        </p:nvSpPr>
-        <p:spPr>
-          <a:xfrm>
-            <a:off x="548640" y="1691640"/>
-            <a:ext cx="5212080" cy="3931920"/>
-          </a:xfrm>
-          <a:prstGeom prst="roundRect">
-            <a:avLst>
-              <a:gd name="adj" fmla="val 2791"/>
-            </a:avLst>
-          </a:prstGeom>
-          <a:solidFill>
-            <a:srgbClr val="F3F5FC"/>
-          </a:solidFill>
-          <a:ln/>
-        </p:spPr>
-      </p:sp>
-      <p:sp>
-        <p:nvSpPr>
-          <p:cNvPr id="5" name="Text 3"/>
-          <p:cNvSpPr/>
-          <p:nvPr/>
-        </p:nvSpPr>
-        <p:spPr>
-          <a:xfrm>
-            <a:off x="822960" y="1920240"/>
-            <a:ext cx="4663440" cy="822960"/>
-          </a:xfrm>
-          <a:prstGeom prst="rect">
-            <a:avLst/>
-          </a:prstGeom>
-          <a:noFill/>
-          <a:ln/>
-        </p:spPr>
-        <p:txBody>
-          <a:bodyPr wrap="square" rtlCol="0" anchor="ctr"/>
-          <a:lstStyle/>
-          <a:p>
-            <a:pPr indent="0" marL="0">
-              <a:buNone/>
-            </a:pPr>
-            <a:r>
-              <a:rPr lang="en-US" sz="1700" b="1" dirty="0">
-                <a:solidFill>
-                  <a:srgbClr val="1E2761"/>
-                </a:solidFill>
-                <a:latin typeface="Cambria" pitchFamily="34" charset="0"/>
-                <a:ea typeface="Cambria" pitchFamily="34" charset="-122"/>
-                <a:cs typeface="Cambria" pitchFamily="34" charset="-120"/>
-              </a:rPr>
-              <a:t>La selección es opaca.</a:t>
-            </a:r>
-            <a:endParaRPr lang="en-US" sz="1700" dirty="0"/>
-          </a:p>
-          <a:p>
-            <a:pPr indent="0" marL="0">
-              <a:buNone/>
-            </a:pPr>
-            <a:r>
-              <a:rPr lang="en-US" sz="1700" b="1" dirty="0">
-                <a:solidFill>
-                  <a:srgbClr val="1E2761"/>
-                </a:solidFill>
-                <a:latin typeface="Cambria" pitchFamily="34" charset="0"/>
-                <a:ea typeface="Cambria" pitchFamily="34" charset="-122"/>
-                <a:cs typeface="Cambria" pitchFamily="34" charset="-120"/>
-              </a:rPr>
-              <a:t>El modelo no tiene que serlo.</a:t>
-            </a:r>
-            <a:endParaRPr lang="en-US" sz="1700" dirty="0"/>
-          </a:p>
-        </p:txBody>
-      </p:sp>
-      <p:sp>
-        <p:nvSpPr>
-          <p:cNvPr id="6" name="Text 4"/>
-          <p:cNvSpPr/>
-          <p:nvPr/>
-        </p:nvSpPr>
-        <p:spPr>
-          <a:xfrm>
-            <a:off x="822960" y="2788920"/>
-            <a:ext cx="4663440" cy="1371600"/>
-          </a:xfrm>
-          <a:prstGeom prst="rect">
-            <a:avLst/>
-          </a:prstGeom>
-          <a:noFill/>
-          <a:ln/>
-        </p:spPr>
-        <p:txBody>
-          <a:bodyPr wrap="square" rtlCol="0" anchor="ctr"/>
-          <a:lstStyle/>
-          <a:p>
-            <a:pPr indent="0" marL="0">
-              <a:buNone/>
-            </a:pPr>
-            <a:r>
-              <a:rPr lang="en-US" sz="1300" dirty="0">
-                <a:solidFill>
-                  <a:srgbClr val="1F2937"/>
-                </a:solidFill>
-                <a:latin typeface="Calibri" pitchFamily="34" charset="0"/>
-                <a:ea typeface="Calibri" pitchFamily="34" charset="-122"/>
-                <a:cs typeface="Calibri" pitchFamily="34" charset="-120"/>
-              </a:rPr>
-              <a:t>Explicar por qué el optimizador eligió esas 8 variables y no otras es difícil. Pero una regresión logística sobre esas 8 variables es perfectamente auditable: cada coeficiente se explica al socio.</a:t>
-            </a:r>
-            <a:endParaRPr lang="en-US" sz="1300" dirty="0"/>
-          </a:p>
-        </p:txBody>
-      </p:sp>
-      <p:sp>
-        <p:nvSpPr>
-          <p:cNvPr id="7" name="Text 5"/>
-          <p:cNvSpPr/>
-          <p:nvPr/>
-        </p:nvSpPr>
-        <p:spPr>
-          <a:xfrm>
-            <a:off x="822960" y="4297680"/>
-            <a:ext cx="4663440" cy="1097280"/>
-          </a:xfrm>
-          <a:prstGeom prst="rect">
-            <a:avLst/>
-          </a:prstGeom>
-          <a:noFill/>
-          <a:ln/>
-        </p:spPr>
-        <p:txBody>
-          <a:bodyPr wrap="square" rtlCol="0" anchor="ctr"/>
-          <a:lstStyle/>
-          <a:p>
-            <a:pPr indent="0" marL="0">
-              <a:buNone/>
-            </a:pPr>
-            <a:r>
-              <a:rPr lang="en-US" sz="1350" i="1" dirty="0">
-                <a:solidFill>
-                  <a:srgbClr val="B23A48"/>
-                </a:solidFill>
-                <a:latin typeface="Cambria" pitchFamily="34" charset="0"/>
-                <a:ea typeface="Cambria" pitchFamily="34" charset="-122"/>
-                <a:cs typeface="Cambria" pitchFamily="34" charset="-120"/>
-              </a:rPr>
-              <a:t>“QUBO + logística es más defendible ante el supervisor que XGBoost con 45 variables.”</a:t>
-            </a:r>
-            <a:endParaRPr lang="en-US" sz="1350" dirty="0"/>
-          </a:p>
-        </p:txBody>
-      </p:sp>
-      <p:sp>
-        <p:nvSpPr>
-          <p:cNvPr id="8" name="Shape 6"/>
-          <p:cNvSpPr/>
-          <p:nvPr/>
-        </p:nvSpPr>
-        <p:spPr>
-          <a:xfrm>
-            <a:off x="5989320" y="1691640"/>
-            <a:ext cx="5669280" cy="3931920"/>
-          </a:xfrm>
-          <a:prstGeom prst="roundRect">
-            <a:avLst>
-              <a:gd name="adj" fmla="val 2791"/>
-            </a:avLst>
-          </a:prstGeom>
-          <a:solidFill>
-            <a:srgbClr val="F3F5FC"/>
-          </a:solidFill>
-          <a:ln/>
-        </p:spPr>
-      </p:sp>
-      <p:sp>
-        <p:nvSpPr>
-          <p:cNvPr id="9" name="Text 7"/>
-          <p:cNvSpPr/>
-          <p:nvPr/>
-        </p:nvSpPr>
-        <p:spPr>
-          <a:xfrm>
-            <a:off x="6263640" y="1874520"/>
-            <a:ext cx="5120640" cy="274320"/>
-          </a:xfrm>
-          <a:prstGeom prst="rect">
-            <a:avLst/>
-          </a:prstGeom>
-          <a:noFill/>
-          <a:ln/>
-        </p:spPr>
-        <p:txBody>
-          <a:bodyPr wrap="square" rtlCol="0" anchor="ctr"/>
-          <a:lstStyle/>
-          <a:p>
-            <a:pPr indent="0" marL="0">
-              <a:buNone/>
-            </a:pPr>
-            <a:r>
-              <a:rPr lang="en-US" sz="1300" b="1" dirty="0">
-                <a:solidFill>
-                  <a:srgbClr val="1E2761"/>
-                </a:solidFill>
-                <a:latin typeface="Cambria" pitchFamily="34" charset="0"/>
-                <a:ea typeface="Cambria" pitchFamily="34" charset="-122"/>
-                <a:cs typeface="Cambria" pitchFamily="34" charset="-120"/>
-              </a:rPr>
-              <a:t>Parsimonia</a:t>
-            </a:r>
-            <a:endParaRPr lang="en-US" sz="1300" dirty="0"/>
-          </a:p>
-        </p:txBody>
-      </p:sp>
-      <p:sp>
-        <p:nvSpPr>
-          <p:cNvPr id="10" name="Text 8"/>
-          <p:cNvSpPr/>
-          <p:nvPr/>
-        </p:nvSpPr>
-        <p:spPr>
-          <a:xfrm>
-            <a:off x="6263640" y="2167128"/>
-            <a:ext cx="5120640" cy="594360"/>
-          </a:xfrm>
-          <a:prstGeom prst="rect">
-            <a:avLst/>
-          </a:prstGeom>
-          <a:noFill/>
-          <a:ln/>
-        </p:spPr>
-        <p:txBody>
-          <a:bodyPr wrap="square" rtlCol="0" anchor="ctr"/>
-          <a:lstStyle/>
-          <a:p>
-            <a:pPr indent="0" marL="0">
-              <a:buNone/>
-            </a:pPr>
-            <a:r>
-              <a:rPr lang="en-US" sz="1150" dirty="0">
-                <a:solidFill>
-                  <a:srgbClr val="1F2937"/>
-                </a:solidFill>
-                <a:latin typeface="Calibri" pitchFamily="34" charset="0"/>
-                <a:ea typeface="Calibri" pitchFamily="34" charset="-122"/>
-                <a:cs typeface="Calibri" pitchFamily="34" charset="-120"/>
-              </a:rPr>
-              <a:t>8-12 variables vs. 18-45 — expediente más simple, menos consultas al buró.</a:t>
-            </a:r>
-            <a:endParaRPr lang="en-US" sz="1150" dirty="0"/>
-          </a:p>
-        </p:txBody>
-      </p:sp>
-      <p:sp>
-        <p:nvSpPr>
-          <p:cNvPr id="11" name="Text 9"/>
-          <p:cNvSpPr/>
-          <p:nvPr/>
-        </p:nvSpPr>
-        <p:spPr>
-          <a:xfrm>
-            <a:off x="6263640" y="2807208"/>
-            <a:ext cx="5120640" cy="274320"/>
-          </a:xfrm>
-          <a:prstGeom prst="rect">
-            <a:avLst/>
-          </a:prstGeom>
-          <a:noFill/>
-          <a:ln/>
-        </p:spPr>
-        <p:txBody>
-          <a:bodyPr wrap="square" rtlCol="0" anchor="ctr"/>
-          <a:lstStyle/>
-          <a:p>
-            <a:pPr indent="0" marL="0">
-              <a:buNone/>
-            </a:pPr>
-            <a:r>
-              <a:rPr lang="en-US" sz="1300" b="1" dirty="0">
-                <a:solidFill>
-                  <a:srgbClr val="1E2761"/>
-                </a:solidFill>
-                <a:latin typeface="Cambria" pitchFamily="34" charset="0"/>
-                <a:ea typeface="Cambria" pitchFamily="34" charset="-122"/>
-                <a:cs typeface="Cambria" pitchFamily="34" charset="-120"/>
-              </a:rPr>
-              <a:t>Sesgo indirecto</a:t>
-            </a:r>
-            <a:endParaRPr lang="en-US" sz="1300" dirty="0"/>
-          </a:p>
-        </p:txBody>
-      </p:sp>
-      <p:sp>
-        <p:nvSpPr>
-          <p:cNvPr id="12" name="Text 10"/>
-          <p:cNvSpPr/>
-          <p:nvPr/>
-        </p:nvSpPr>
-        <p:spPr>
-          <a:xfrm>
-            <a:off x="6263640" y="3099816"/>
-            <a:ext cx="5120640" cy="594360"/>
-          </a:xfrm>
-          <a:prstGeom prst="rect">
-            <a:avLst/>
-          </a:prstGeom>
-          <a:noFill/>
-          <a:ln/>
-        </p:spPr>
-        <p:txBody>
-          <a:bodyPr wrap="square" rtlCol="0" anchor="ctr"/>
-          <a:lstStyle/>
-          <a:p>
-            <a:pPr indent="0" marL="0">
-              <a:buNone/>
-            </a:pPr>
-            <a:r>
-              <a:rPr lang="en-US" sz="1150" dirty="0">
-                <a:solidFill>
-                  <a:srgbClr val="1F2937"/>
-                </a:solidFill>
-                <a:latin typeface="Calibri" pitchFamily="34" charset="0"/>
-                <a:ea typeface="Calibri" pitchFamily="34" charset="-122"/>
-                <a:cs typeface="Calibri" pitchFamily="34" charset="-120"/>
-              </a:rPr>
-              <a:t>AUC_proxy de zona de residencia cae de 1,00 a 0,61.</a:t>
-            </a:r>
-            <a:endParaRPr lang="en-US" sz="1150" dirty="0"/>
-          </a:p>
-        </p:txBody>
-      </p:sp>
-      <p:sp>
-        <p:nvSpPr>
-          <p:cNvPr id="13" name="Text 11"/>
-          <p:cNvSpPr/>
-          <p:nvPr/>
-        </p:nvSpPr>
-        <p:spPr>
-          <a:xfrm>
-            <a:off x="6263640" y="3739896"/>
-            <a:ext cx="5120640" cy="274320"/>
-          </a:xfrm>
-          <a:prstGeom prst="rect">
-            <a:avLst/>
-          </a:prstGeom>
-          <a:noFill/>
-          <a:ln/>
-        </p:spPr>
-        <p:txBody>
-          <a:bodyPr wrap="square" rtlCol="0" anchor="ctr"/>
-          <a:lstStyle/>
-          <a:p>
-            <a:pPr indent="0" marL="0">
-              <a:buNone/>
-            </a:pPr>
-            <a:r>
-              <a:rPr lang="en-US" sz="1300" b="1" dirty="0">
-                <a:solidFill>
-                  <a:srgbClr val="1E2761"/>
-                </a:solidFill>
-                <a:latin typeface="Cambria" pitchFamily="34" charset="0"/>
-                <a:ea typeface="Cambria" pitchFamily="34" charset="-122"/>
-                <a:cs typeface="Cambria" pitchFamily="34" charset="-120"/>
-              </a:rPr>
-              <a:t>Verificación</a:t>
-            </a:r>
-            <a:endParaRPr lang="en-US" sz="1300" dirty="0"/>
-          </a:p>
-        </p:txBody>
-      </p:sp>
-      <p:sp>
-        <p:nvSpPr>
-          <p:cNvPr id="14" name="Text 12"/>
-          <p:cNvSpPr/>
-          <p:nvPr/>
-        </p:nvSpPr>
-        <p:spPr>
-          <a:xfrm>
-            <a:off x="6263640" y="4032504"/>
-            <a:ext cx="5120640" cy="594360"/>
-          </a:xfrm>
-          <a:prstGeom prst="rect">
-            <a:avLst/>
-          </a:prstGeom>
-          <a:noFill/>
-          <a:ln/>
-        </p:spPr>
-        <p:txBody>
-          <a:bodyPr wrap="square" rtlCol="0" anchor="ctr"/>
-          <a:lstStyle/>
-          <a:p>
-            <a:pPr indent="0" marL="0">
-              <a:buNone/>
-            </a:pPr>
-            <a:r>
-              <a:rPr lang="en-US" sz="1150" dirty="0">
-                <a:solidFill>
-                  <a:srgbClr val="1F2937"/>
-                </a:solidFill>
-                <a:latin typeface="Calibri" pitchFamily="34" charset="0"/>
-                <a:ea typeface="Calibri" pitchFamily="34" charset="-122"/>
-                <a:cs typeface="Calibri" pitchFamily="34" charset="-120"/>
-              </a:rPr>
-              <a:t>Óptimo certificado por MILP, no solo un heurístico sin garantías.</a:t>
-            </a:r>
-            <a:endParaRPr lang="en-US" sz="1150" dirty="0"/>
-          </a:p>
-        </p:txBody>
-      </p:sp>
-      <p:sp>
-        <p:nvSpPr>
-          <p:cNvPr id="15" name="Text 13"/>
-          <p:cNvSpPr/>
-          <p:nvPr/>
-        </p:nvSpPr>
-        <p:spPr>
-          <a:xfrm>
-            <a:off x="6263640" y="4672584"/>
-            <a:ext cx="5120640" cy="274320"/>
-          </a:xfrm>
-          <a:prstGeom prst="rect">
-            <a:avLst/>
-          </a:prstGeom>
-          <a:noFill/>
-          <a:ln/>
-        </p:spPr>
-        <p:txBody>
-          <a:bodyPr wrap="square" rtlCol="0" anchor="ctr"/>
-          <a:lstStyle/>
-          <a:p>
-            <a:pPr indent="0" marL="0">
-              <a:buNone/>
-            </a:pPr>
-            <a:r>
-              <a:rPr lang="en-US" sz="1300" b="1" dirty="0">
-                <a:solidFill>
-                  <a:srgbClr val="1E2761"/>
-                </a:solidFill>
-                <a:latin typeface="Cambria" pitchFamily="34" charset="0"/>
-                <a:ea typeface="Cambria" pitchFamily="34" charset="-122"/>
-                <a:cs typeface="Cambria" pitchFamily="34" charset="-120"/>
-              </a:rPr>
-              <a:t>El costo, con números</a:t>
-            </a:r>
-            <a:endParaRPr lang="en-US" sz="1300" dirty="0"/>
-          </a:p>
-        </p:txBody>
-      </p:sp>
-      <p:sp>
-        <p:nvSpPr>
-          <p:cNvPr id="16" name="Text 14"/>
-          <p:cNvSpPr/>
-          <p:nvPr/>
-        </p:nvSpPr>
-        <p:spPr>
-          <a:xfrm>
-            <a:off x="6263640" y="4965192"/>
-            <a:ext cx="5120640" cy="594360"/>
-          </a:xfrm>
-          <a:prstGeom prst="rect">
-            <a:avLst/>
-          </a:prstGeom>
-          <a:noFill/>
-          <a:ln/>
-        </p:spPr>
-        <p:txBody>
-          <a:bodyPr wrap="square" rtlCol="0" anchor="ctr"/>
-          <a:lstStyle/>
-          <a:p>
-            <a:pPr indent="0" marL="0">
-              <a:buNone/>
-            </a:pPr>
-            <a:r>
-              <a:rPr lang="en-US" sz="1150" dirty="0">
-                <a:solidFill>
-                  <a:srgbClr val="1F2937"/>
-                </a:solidFill>
-                <a:latin typeface="Calibri" pitchFamily="34" charset="0"/>
-                <a:ea typeface="Calibri" pitchFamily="34" charset="-122"/>
-                <a:cs typeface="Calibri" pitchFamily="34" charset="-120"/>
-              </a:rPr>
-              <a:t>Si la ganancia de AUC es 0,003 y hay que justificar un optimizador combinatorio ante el regulador, la recomendación honesta puede ser no adoptarlo — y este framework es lo que permite decidirlo con datos.</a:t>
-            </a:r>
-            <a:endParaRPr lang="en-US" sz="1150" dirty="0"/>
-          </a:p>
-        </p:txBody>
-      </p:sp>
-      <p:sp>
-        <p:nvSpPr>
-          <p:cNvPr id="17" name="Text 15"/>
-          <p:cNvSpPr/>
-          <p:nvPr/>
-        </p:nvSpPr>
-        <p:spPr>
-          <a:xfrm>
-            <a:off x="11521440" y="6446520"/>
-            <a:ext cx="548640" cy="274320"/>
-          </a:xfrm>
-          <a:prstGeom prst="rect">
-            <a:avLst/>
-          </a:prstGeom>
-          <a:noFill/>
-          <a:ln/>
-        </p:spPr>
-        <p:txBody>
-          <a:bodyPr wrap="square" rtlCol="0" anchor="ctr"/>
-          <a:lstStyle/>
-          <a:p>
-            <a:pPr algn="r" indent="0" marL="0">
-              <a:buNone/>
-            </a:pPr>
-            <a:r>
-              <a:rPr lang="en-US" sz="1000" dirty="0">
-                <a:solidFill>
-                  <a:srgbClr val="6B7280"/>
                 </a:solidFill>
                 <a:latin typeface="Calibri" pitchFamily="34" charset="0"/>
                 <a:ea typeface="Calibri" pitchFamily="34" charset="-122"/>
@@ -7680,7 +8131,7 @@
                 <a:ea typeface="Calibri" pitchFamily="34" charset="-122"/>
                 <a:cs typeface="Calibri" pitchFamily="34" charset="-120"/>
               </a:rPr>
-              <a:t>HONESTIDAD ANTE TODO</a:t>
+              <a:t>EL ARGUMENTO REGULATORIO</a:t>
             </a:r>
             <a:endParaRPr lang="en-US" sz="1200" dirty="0"/>
           </a:p>
@@ -7719,7 +8170,7 @@
                 <a:ea typeface="Cambria" pitchFamily="34" charset="-122"/>
                 <a:cs typeface="Cambria" pitchFamily="34" charset="-120"/>
               </a:rPr>
-              <a:t>Lo que este prototipo todavía no resuelve</a:t>
+              <a:t>Lo que esto significa frente a la SEPS</a:t>
             </a:r>
             <a:endParaRPr lang="en-US" sz="3000" dirty="0"/>
           </a:p>
@@ -7733,14 +8184,16 @@
         </p:nvSpPr>
         <p:spPr>
           <a:xfrm>
-            <a:off x="640080" y="1901952"/>
-            <a:ext cx="128016" cy="128016"/>
-          </a:xfrm>
-          <a:prstGeom prst="rect">
-            <a:avLst/>
+            <a:off x="548640" y="1691640"/>
+            <a:ext cx="5212080" cy="3931920"/>
+          </a:xfrm>
+          <a:prstGeom prst="roundRect">
+            <a:avLst>
+              <a:gd name="adj" fmla="val 2791"/>
+            </a:avLst>
           </a:prstGeom>
           <a:solidFill>
-            <a:srgbClr val="B23A48"/>
+            <a:srgbClr val="F3F5FC"/>
           </a:solidFill>
           <a:ln/>
         </p:spPr>
@@ -7753,24 +8206,80 @@
         </p:nvSpPr>
         <p:spPr>
           <a:xfrm>
-            <a:off x="960120" y="1828800"/>
-            <a:ext cx="10332720" cy="685800"/>
-          </a:xfrm>
-          <a:prstGeom prst="rect">
-            <a:avLst/>
-          </a:prstGeom>
-          <a:noFill/>
-          <a:ln/>
-        </p:spPr>
-        <p:txBody>
-          <a:bodyPr wrap="square" rtlCol="0" anchor="ctr"/>
-          <a:lstStyle/>
-          <a:p>
-            <a:pPr indent="0" marL="0">
-              <a:buNone/>
-            </a:pPr>
-            <a:r>
-              <a:rPr lang="en-US" sz="1400" dirty="0">
+            <a:off x="822960" y="1920240"/>
+            <a:ext cx="4663440" cy="822960"/>
+          </a:xfrm>
+          <a:prstGeom prst="rect">
+            <a:avLst/>
+          </a:prstGeom>
+          <a:noFill/>
+          <a:ln/>
+        </p:spPr>
+        <p:txBody>
+          <a:bodyPr wrap="square" rtlCol="0" anchor="ctr"/>
+          <a:lstStyle/>
+          <a:p>
+            <a:pPr indent="0" marL="0">
+              <a:buNone/>
+            </a:pPr>
+            <a:r>
+              <a:rPr lang="en-US" sz="1700" b="1" dirty="0">
+                <a:solidFill>
+                  <a:srgbClr val="1E2761"/>
+                </a:solidFill>
+                <a:latin typeface="Cambria" pitchFamily="34" charset="0"/>
+                <a:ea typeface="Cambria" pitchFamily="34" charset="-122"/>
+                <a:cs typeface="Cambria" pitchFamily="34" charset="-120"/>
+              </a:rPr>
+              <a:t>La selección es opaca.</a:t>
+            </a:r>
+            <a:endParaRPr lang="en-US" sz="1700" dirty="0"/>
+          </a:p>
+          <a:p>
+            <a:pPr indent="0" marL="0">
+              <a:buNone/>
+            </a:pPr>
+            <a:r>
+              <a:rPr lang="en-US" sz="1700" b="1" dirty="0">
+                <a:solidFill>
+                  <a:srgbClr val="1E2761"/>
+                </a:solidFill>
+                <a:latin typeface="Cambria" pitchFamily="34" charset="0"/>
+                <a:ea typeface="Cambria" pitchFamily="34" charset="-122"/>
+                <a:cs typeface="Cambria" pitchFamily="34" charset="-120"/>
+              </a:rPr>
+              <a:t>El modelo no tiene que serlo.</a:t>
+            </a:r>
+            <a:endParaRPr lang="en-US" sz="1700" dirty="0"/>
+          </a:p>
+        </p:txBody>
+      </p:sp>
+      <p:sp>
+        <p:nvSpPr>
+          <p:cNvPr id="6" name="Text 4"/>
+          <p:cNvSpPr/>
+          <p:nvPr/>
+        </p:nvSpPr>
+        <p:spPr>
+          <a:xfrm>
+            <a:off x="822960" y="2788920"/>
+            <a:ext cx="4663440" cy="1371600"/>
+          </a:xfrm>
+          <a:prstGeom prst="rect">
+            <a:avLst/>
+          </a:prstGeom>
+          <a:noFill/>
+          <a:ln/>
+        </p:spPr>
+        <p:txBody>
+          <a:bodyPr wrap="square" rtlCol="0" anchor="ctr"/>
+          <a:lstStyle/>
+          <a:p>
+            <a:pPr indent="0" marL="0">
+              <a:buNone/>
+            </a:pPr>
+            <a:r>
+              <a:rPr lang="en-US" sz="1300" dirty="0">
                 <a:solidFill>
                   <a:srgbClr val="1F2937"/>
                 </a:solidFill>
@@ -7778,58 +8287,138 @@
                 <a:ea typeface="Calibri" pitchFamily="34" charset="-122"/>
                 <a:cs typeface="Calibri" pitchFamily="34" charset="-120"/>
               </a:rPr>
-              <a:t>Datos sintéticos: mide recuperar una estructura que nosotros diseñamos, no el riesgo real de crédito en Ecuador.</a:t>
-            </a:r>
-            <a:endParaRPr lang="en-US" sz="1400" dirty="0"/>
-          </a:p>
-        </p:txBody>
-      </p:sp>
-      <p:sp>
-        <p:nvSpPr>
-          <p:cNvPr id="6" name="Shape 4"/>
-          <p:cNvSpPr/>
-          <p:nvPr/>
-        </p:nvSpPr>
-        <p:spPr>
-          <a:xfrm>
-            <a:off x="640080" y="2953512"/>
-            <a:ext cx="128016" cy="128016"/>
-          </a:xfrm>
-          <a:prstGeom prst="rect">
-            <a:avLst/>
+              <a:t>Explicar por qué el optimizador eligió esas 8 variables y no otras es difícil. Pero una regresión logística sobre esas 8 variables es perfectamente auditable: cada coeficiente se explica al socio.</a:t>
+            </a:r>
+            <a:endParaRPr lang="en-US" sz="1300" dirty="0"/>
+          </a:p>
+        </p:txBody>
+      </p:sp>
+      <p:sp>
+        <p:nvSpPr>
+          <p:cNvPr id="7" name="Text 5"/>
+          <p:cNvSpPr/>
+          <p:nvPr/>
+        </p:nvSpPr>
+        <p:spPr>
+          <a:xfrm>
+            <a:off x="822960" y="4297680"/>
+            <a:ext cx="4663440" cy="1097280"/>
+          </a:xfrm>
+          <a:prstGeom prst="rect">
+            <a:avLst/>
+          </a:prstGeom>
+          <a:noFill/>
+          <a:ln/>
+        </p:spPr>
+        <p:txBody>
+          <a:bodyPr wrap="square" rtlCol="0" anchor="ctr"/>
+          <a:lstStyle/>
+          <a:p>
+            <a:pPr indent="0" marL="0">
+              <a:buNone/>
+            </a:pPr>
+            <a:r>
+              <a:rPr lang="en-US" sz="1350" i="1" dirty="0">
+                <a:solidFill>
+                  <a:srgbClr val="B23A48"/>
+                </a:solidFill>
+                <a:latin typeface="Cambria" pitchFamily="34" charset="0"/>
+                <a:ea typeface="Cambria" pitchFamily="34" charset="-122"/>
+                <a:cs typeface="Cambria" pitchFamily="34" charset="-120"/>
+              </a:rPr>
+              <a:t>“QUBO + logística es más defendible ante el supervisor que XGBoost con 45 variables.”</a:t>
+            </a:r>
+            <a:endParaRPr lang="en-US" sz="1350" dirty="0"/>
+          </a:p>
+        </p:txBody>
+      </p:sp>
+      <p:sp>
+        <p:nvSpPr>
+          <p:cNvPr id="8" name="Shape 6"/>
+          <p:cNvSpPr/>
+          <p:nvPr/>
+        </p:nvSpPr>
+        <p:spPr>
+          <a:xfrm>
+            <a:off x="5989320" y="1691640"/>
+            <a:ext cx="5669280" cy="3931920"/>
+          </a:xfrm>
+          <a:prstGeom prst="roundRect">
+            <a:avLst>
+              <a:gd name="adj" fmla="val 2791"/>
+            </a:avLst>
           </a:prstGeom>
           <a:solidFill>
-            <a:srgbClr val="B23A48"/>
+            <a:srgbClr val="F3F5FC"/>
           </a:solidFill>
           <a:ln/>
         </p:spPr>
       </p:sp>
       <p:sp>
         <p:nvSpPr>
-          <p:cNvPr id="7" name="Text 5"/>
-          <p:cNvSpPr/>
-          <p:nvPr/>
-        </p:nvSpPr>
-        <p:spPr>
-          <a:xfrm>
-            <a:off x="960120" y="2880360"/>
-            <a:ext cx="10332720" cy="685800"/>
-          </a:xfrm>
-          <a:prstGeom prst="rect">
-            <a:avLst/>
-          </a:prstGeom>
-          <a:noFill/>
-          <a:ln/>
-        </p:spPr>
-        <p:txBody>
-          <a:bodyPr wrap="square" rtlCol="0" anchor="ctr"/>
-          <a:lstStyle/>
-          <a:p>
-            <a:pPr indent="0" marL="0">
-              <a:buNone/>
-            </a:pPr>
-            <a:r>
-              <a:rPr lang="en-US" sz="1400" dirty="0">
+          <p:cNvPr id="9" name="Text 7"/>
+          <p:cNvSpPr/>
+          <p:nvPr/>
+        </p:nvSpPr>
+        <p:spPr>
+          <a:xfrm>
+            <a:off x="6263640" y="1874520"/>
+            <a:ext cx="5120640" cy="274320"/>
+          </a:xfrm>
+          <a:prstGeom prst="rect">
+            <a:avLst/>
+          </a:prstGeom>
+          <a:noFill/>
+          <a:ln/>
+        </p:spPr>
+        <p:txBody>
+          <a:bodyPr wrap="square" rtlCol="0" anchor="ctr"/>
+          <a:lstStyle/>
+          <a:p>
+            <a:pPr indent="0" marL="0">
+              <a:buNone/>
+            </a:pPr>
+            <a:r>
+              <a:rPr lang="en-US" sz="1300" b="1" dirty="0">
+                <a:solidFill>
+                  <a:srgbClr val="1E2761"/>
+                </a:solidFill>
+                <a:latin typeface="Cambria" pitchFamily="34" charset="0"/>
+                <a:ea typeface="Cambria" pitchFamily="34" charset="-122"/>
+                <a:cs typeface="Cambria" pitchFamily="34" charset="-120"/>
+              </a:rPr>
+              <a:t>Parsimonia</a:t>
+            </a:r>
+            <a:endParaRPr lang="en-US" sz="1300" dirty="0"/>
+          </a:p>
+        </p:txBody>
+      </p:sp>
+      <p:sp>
+        <p:nvSpPr>
+          <p:cNvPr id="10" name="Text 8"/>
+          <p:cNvSpPr/>
+          <p:nvPr/>
+        </p:nvSpPr>
+        <p:spPr>
+          <a:xfrm>
+            <a:off x="6263640" y="2167128"/>
+            <a:ext cx="5120640" cy="594360"/>
+          </a:xfrm>
+          <a:prstGeom prst="rect">
+            <a:avLst/>
+          </a:prstGeom>
+          <a:noFill/>
+          <a:ln/>
+        </p:spPr>
+        <p:txBody>
+          <a:bodyPr wrap="square" rtlCol="0" anchor="ctr"/>
+          <a:lstStyle/>
+          <a:p>
+            <a:pPr indent="0" marL="0">
+              <a:buNone/>
+            </a:pPr>
+            <a:r>
+              <a:rPr lang="en-US" sz="1150" dirty="0">
                 <a:solidFill>
                   <a:srgbClr val="1F2937"/>
                 </a:solidFill>
@@ -7837,58 +8426,77 @@
                 <a:ea typeface="Calibri" pitchFamily="34" charset="-122"/>
                 <a:cs typeface="Calibri" pitchFamily="34" charset="-120"/>
               </a:rPr>
-              <a:t>El criterio de selección tiene una vulnerabilidad diagnosticada en 45 variables (trampa de ruido) — con causa conocida, sin parche rápido validado todavía.</a:t>
-            </a:r>
-            <a:endParaRPr lang="en-US" sz="1400" dirty="0"/>
-          </a:p>
-        </p:txBody>
-      </p:sp>
-      <p:sp>
-        <p:nvSpPr>
-          <p:cNvPr id="8" name="Shape 6"/>
-          <p:cNvSpPr/>
-          <p:nvPr/>
-        </p:nvSpPr>
-        <p:spPr>
-          <a:xfrm>
-            <a:off x="640080" y="4005072"/>
-            <a:ext cx="128016" cy="128016"/>
-          </a:xfrm>
-          <a:prstGeom prst="rect">
-            <a:avLst/>
-          </a:prstGeom>
-          <a:solidFill>
-            <a:srgbClr val="B23A48"/>
-          </a:solidFill>
-          <a:ln/>
-        </p:spPr>
-      </p:sp>
-      <p:sp>
-        <p:nvSpPr>
-          <p:cNvPr id="9" name="Text 7"/>
-          <p:cNvSpPr/>
-          <p:nvPr/>
-        </p:nvSpPr>
-        <p:spPr>
-          <a:xfrm>
-            <a:off x="960120" y="3931920"/>
-            <a:ext cx="10332720" cy="685800"/>
-          </a:xfrm>
-          <a:prstGeom prst="rect">
-            <a:avLst/>
-          </a:prstGeom>
-          <a:noFill/>
-          <a:ln/>
-        </p:spPr>
-        <p:txBody>
-          <a:bodyPr wrap="square" rtlCol="0" anchor="ctr"/>
-          <a:lstStyle/>
-          <a:p>
-            <a:pPr indent="0" marL="0">
-              <a:buNone/>
-            </a:pPr>
-            <a:r>
-              <a:rPr lang="en-US" sz="1400" dirty="0">
+              <a:t>8-12 variables vs. 18-45 — expediente más simple, menos consultas al buró.</a:t>
+            </a:r>
+            <a:endParaRPr lang="en-US" sz="1150" dirty="0"/>
+          </a:p>
+        </p:txBody>
+      </p:sp>
+      <p:sp>
+        <p:nvSpPr>
+          <p:cNvPr id="11" name="Text 9"/>
+          <p:cNvSpPr/>
+          <p:nvPr/>
+        </p:nvSpPr>
+        <p:spPr>
+          <a:xfrm>
+            <a:off x="6263640" y="2807208"/>
+            <a:ext cx="5120640" cy="274320"/>
+          </a:xfrm>
+          <a:prstGeom prst="rect">
+            <a:avLst/>
+          </a:prstGeom>
+          <a:noFill/>
+          <a:ln/>
+        </p:spPr>
+        <p:txBody>
+          <a:bodyPr wrap="square" rtlCol="0" anchor="ctr"/>
+          <a:lstStyle/>
+          <a:p>
+            <a:pPr indent="0" marL="0">
+              <a:buNone/>
+            </a:pPr>
+            <a:r>
+              <a:rPr lang="en-US" sz="1300" b="1" dirty="0">
+                <a:solidFill>
+                  <a:srgbClr val="1E2761"/>
+                </a:solidFill>
+                <a:latin typeface="Cambria" pitchFamily="34" charset="0"/>
+                <a:ea typeface="Cambria" pitchFamily="34" charset="-122"/>
+                <a:cs typeface="Cambria" pitchFamily="34" charset="-120"/>
+              </a:rPr>
+              <a:t>Sesgo indirecto</a:t>
+            </a:r>
+            <a:endParaRPr lang="en-US" sz="1300" dirty="0"/>
+          </a:p>
+        </p:txBody>
+      </p:sp>
+      <p:sp>
+        <p:nvSpPr>
+          <p:cNvPr id="12" name="Text 10"/>
+          <p:cNvSpPr/>
+          <p:nvPr/>
+        </p:nvSpPr>
+        <p:spPr>
+          <a:xfrm>
+            <a:off x="6263640" y="3099816"/>
+            <a:ext cx="5120640" cy="594360"/>
+          </a:xfrm>
+          <a:prstGeom prst="rect">
+            <a:avLst/>
+          </a:prstGeom>
+          <a:noFill/>
+          <a:ln/>
+        </p:spPr>
+        <p:txBody>
+          <a:bodyPr wrap="square" rtlCol="0" anchor="ctr"/>
+          <a:lstStyle/>
+          <a:p>
+            <a:pPr indent="0" marL="0">
+              <a:buNone/>
+            </a:pPr>
+            <a:r>
+              <a:rPr lang="en-US" sz="1150" dirty="0">
                 <a:solidFill>
                   <a:srgbClr val="1F2937"/>
                 </a:solidFill>
@@ -7896,58 +8504,77 @@
                 <a:ea typeface="Calibri" pitchFamily="34" charset="-122"/>
                 <a:cs typeface="Calibri" pitchFamily="34" charset="-120"/>
               </a:rPr>
-              <a:t>El circuito cuántico simulado no aporta ninguna ventaja de tiempo ni de calidad en este problema — y es físicamente imposible de simular en la escala de 45 variables.</a:t>
-            </a:r>
-            <a:endParaRPr lang="en-US" sz="1400" dirty="0"/>
-          </a:p>
-        </p:txBody>
-      </p:sp>
-      <p:sp>
-        <p:nvSpPr>
-          <p:cNvPr id="10" name="Shape 8"/>
-          <p:cNvSpPr/>
-          <p:nvPr/>
-        </p:nvSpPr>
-        <p:spPr>
-          <a:xfrm>
-            <a:off x="640080" y="5056632"/>
-            <a:ext cx="128016" cy="128016"/>
-          </a:xfrm>
-          <a:prstGeom prst="rect">
-            <a:avLst/>
-          </a:prstGeom>
-          <a:solidFill>
-            <a:srgbClr val="B23A48"/>
-          </a:solidFill>
-          <a:ln/>
-        </p:spPr>
-      </p:sp>
-      <p:sp>
-        <p:nvSpPr>
-          <p:cNvPr id="11" name="Text 9"/>
-          <p:cNvSpPr/>
-          <p:nvPr/>
-        </p:nvSpPr>
-        <p:spPr>
-          <a:xfrm>
-            <a:off x="960120" y="4983480"/>
-            <a:ext cx="10332720" cy="685800"/>
-          </a:xfrm>
-          <a:prstGeom prst="rect">
-            <a:avLst/>
-          </a:prstGeom>
-          <a:noFill/>
-          <a:ln/>
-        </p:spPr>
-        <p:txBody>
-          <a:bodyPr wrap="square" rtlCol="0" anchor="ctr"/>
-          <a:lstStyle/>
-          <a:p>
-            <a:pPr indent="0" marL="0">
-              <a:buNone/>
-            </a:pPr>
-            <a:r>
-              <a:rPr lang="en-US" sz="1400" dirty="0">
+              <a:t>AUC_proxy de zona de residencia cae de 1,00 a 0,61.</a:t>
+            </a:r>
+            <a:endParaRPr lang="en-US" sz="1150" dirty="0"/>
+          </a:p>
+        </p:txBody>
+      </p:sp>
+      <p:sp>
+        <p:nvSpPr>
+          <p:cNvPr id="13" name="Text 11"/>
+          <p:cNvSpPr/>
+          <p:nvPr/>
+        </p:nvSpPr>
+        <p:spPr>
+          <a:xfrm>
+            <a:off x="6263640" y="3739896"/>
+            <a:ext cx="5120640" cy="274320"/>
+          </a:xfrm>
+          <a:prstGeom prst="rect">
+            <a:avLst/>
+          </a:prstGeom>
+          <a:noFill/>
+          <a:ln/>
+        </p:spPr>
+        <p:txBody>
+          <a:bodyPr wrap="square" rtlCol="0" anchor="ctr"/>
+          <a:lstStyle/>
+          <a:p>
+            <a:pPr indent="0" marL="0">
+              <a:buNone/>
+            </a:pPr>
+            <a:r>
+              <a:rPr lang="en-US" sz="1300" b="1" dirty="0">
+                <a:solidFill>
+                  <a:srgbClr val="1E2761"/>
+                </a:solidFill>
+                <a:latin typeface="Cambria" pitchFamily="34" charset="0"/>
+                <a:ea typeface="Cambria" pitchFamily="34" charset="-122"/>
+                <a:cs typeface="Cambria" pitchFamily="34" charset="-120"/>
+              </a:rPr>
+              <a:t>Verificación</a:t>
+            </a:r>
+            <a:endParaRPr lang="en-US" sz="1300" dirty="0"/>
+          </a:p>
+        </p:txBody>
+      </p:sp>
+      <p:sp>
+        <p:nvSpPr>
+          <p:cNvPr id="14" name="Text 12"/>
+          <p:cNvSpPr/>
+          <p:nvPr/>
+        </p:nvSpPr>
+        <p:spPr>
+          <a:xfrm>
+            <a:off x="6263640" y="4032504"/>
+            <a:ext cx="5120640" cy="594360"/>
+          </a:xfrm>
+          <a:prstGeom prst="rect">
+            <a:avLst/>
+          </a:prstGeom>
+          <a:noFill/>
+          <a:ln/>
+        </p:spPr>
+        <p:txBody>
+          <a:bodyPr wrap="square" rtlCol="0" anchor="ctr"/>
+          <a:lstStyle/>
+          <a:p>
+            <a:pPr indent="0" marL="0">
+              <a:buNone/>
+            </a:pPr>
+            <a:r>
+              <a:rPr lang="en-US" sz="1150" dirty="0">
                 <a:solidFill>
                   <a:srgbClr val="1F2937"/>
                 </a:solidFill>
@@ -7955,54 +8582,93 @@
                 <a:ea typeface="Calibri" pitchFamily="34" charset="-122"/>
                 <a:cs typeface="Calibri" pitchFamily="34" charset="-120"/>
               </a:rPr>
-              <a:t>La auditoría de equidad mide propagación de sesgo sobre datos sintéticos con sesgo inyectado por diseño, no el sesgo real del crédito ecuatoriano.</a:t>
-            </a:r>
-            <a:endParaRPr lang="en-US" sz="1400" dirty="0"/>
-          </a:p>
-        </p:txBody>
-      </p:sp>
-      <p:sp>
-        <p:nvSpPr>
-          <p:cNvPr id="12" name="Text 10"/>
-          <p:cNvSpPr/>
-          <p:nvPr/>
-        </p:nvSpPr>
-        <p:spPr>
-          <a:xfrm>
-            <a:off x="640080" y="5989320"/>
-            <a:ext cx="10332720" cy="457200"/>
-          </a:xfrm>
-          <a:prstGeom prst="rect">
-            <a:avLst/>
-          </a:prstGeom>
-          <a:noFill/>
-          <a:ln/>
-        </p:spPr>
-        <p:txBody>
-          <a:bodyPr wrap="square" rtlCol="0" anchor="ctr"/>
-          <a:lstStyle/>
-          <a:p>
-            <a:pPr indent="0" marL="0">
-              <a:buNone/>
-            </a:pPr>
-            <a:r>
-              <a:rPr lang="en-US" sz="1300" i="1" dirty="0">
-                <a:solidFill>
-                  <a:srgbClr val="6B7280"/>
+              <a:t>Óptimo certificado por MILP, no solo un heurístico sin garantías.</a:t>
+            </a:r>
+            <a:endParaRPr lang="en-US" sz="1150" dirty="0"/>
+          </a:p>
+        </p:txBody>
+      </p:sp>
+      <p:sp>
+        <p:nvSpPr>
+          <p:cNvPr id="15" name="Text 13"/>
+          <p:cNvSpPr/>
+          <p:nvPr/>
+        </p:nvSpPr>
+        <p:spPr>
+          <a:xfrm>
+            <a:off x="6263640" y="4672584"/>
+            <a:ext cx="5120640" cy="274320"/>
+          </a:xfrm>
+          <a:prstGeom prst="rect">
+            <a:avLst/>
+          </a:prstGeom>
+          <a:noFill/>
+          <a:ln/>
+        </p:spPr>
+        <p:txBody>
+          <a:bodyPr wrap="square" rtlCol="0" anchor="ctr"/>
+          <a:lstStyle/>
+          <a:p>
+            <a:pPr indent="0" marL="0">
+              <a:buNone/>
+            </a:pPr>
+            <a:r>
+              <a:rPr lang="en-US" sz="1300" b="1" dirty="0">
+                <a:solidFill>
+                  <a:srgbClr val="1E2761"/>
+                </a:solidFill>
+                <a:latin typeface="Cambria" pitchFamily="34" charset="0"/>
+                <a:ea typeface="Cambria" pitchFamily="34" charset="-122"/>
+                <a:cs typeface="Cambria" pitchFamily="34" charset="-120"/>
+              </a:rPr>
+              <a:t>El costo, con números</a:t>
+            </a:r>
+            <a:endParaRPr lang="en-US" sz="1300" dirty="0"/>
+          </a:p>
+        </p:txBody>
+      </p:sp>
+      <p:sp>
+        <p:nvSpPr>
+          <p:cNvPr id="16" name="Text 14"/>
+          <p:cNvSpPr/>
+          <p:nvPr/>
+        </p:nvSpPr>
+        <p:spPr>
+          <a:xfrm>
+            <a:off x="6263640" y="4965192"/>
+            <a:ext cx="5120640" cy="594360"/>
+          </a:xfrm>
+          <a:prstGeom prst="rect">
+            <a:avLst/>
+          </a:prstGeom>
+          <a:noFill/>
+          <a:ln/>
+        </p:spPr>
+        <p:txBody>
+          <a:bodyPr wrap="square" rtlCol="0" anchor="ctr"/>
+          <a:lstStyle/>
+          <a:p>
+            <a:pPr indent="0" marL="0">
+              <a:buNone/>
+            </a:pPr>
+            <a:r>
+              <a:rPr lang="en-US" sz="1150" dirty="0">
+                <a:solidFill>
+                  <a:srgbClr val="1F2937"/>
                 </a:solidFill>
                 <a:latin typeface="Calibri" pitchFamily="34" charset="0"/>
                 <a:ea typeface="Calibri" pitchFamily="34" charset="-122"/>
                 <a:cs typeface="Calibri" pitchFamily="34" charset="-120"/>
               </a:rPr>
-              <a:t>Un prototipo que declara sus límites con la misma precisión que sus resultados es más creíble, no menos.</a:t>
-            </a:r>
-            <a:endParaRPr lang="en-US" sz="1300" dirty="0"/>
-          </a:p>
-        </p:txBody>
-      </p:sp>
-      <p:sp>
-        <p:nvSpPr>
-          <p:cNvPr id="13" name="Text 11"/>
+              <a:t>Si la ganancia de AUC es 0,003 y hay que justificar un optimizador combinatorio ante el regulador, la recomendación honesta puede ser no adoptarlo — y este framework es lo que permite decidirlo con datos.</a:t>
+            </a:r>
+            <a:endParaRPr lang="en-US" sz="1150" dirty="0"/>
+          </a:p>
+        </p:txBody>
+      </p:sp>
+      <p:sp>
+        <p:nvSpPr>
+          <p:cNvPr id="17" name="Text 15"/>
           <p:cNvSpPr/>
           <p:nvPr/>
         </p:nvSpPr>
